--- a/report/20_题3_黄锦添_v3.pptx
+++ b/report/20_题3_黄锦添_v3.pptx
@@ -1082,7 +1082,36 @@
           <a:lstStyle/>
           <a:p>
             <a:r>
-              <a:t>个体差异按五个维度量化：初始容量相差 9.7%，衰减最快者是最慢者的 1.56 倍。同批三块的波动 82.4% 来自共同成分，远高于独立基准的三分之一，说明回升不是随机抖动，不能平滑。</a:t>
+              <a:rPr dirty="0" err="1"/>
+              <a:t>个体差异按五个维度量化：初始容量相差</a:t>
+            </a:r>
+            <a:r>
+              <a:rPr dirty="0"/>
+              <a:t> 9.7%，</a:t>
+            </a:r>
+            <a:r>
+              <a:rPr dirty="0" err="1"/>
+              <a:t>衰减最快者是最慢者的</a:t>
+            </a:r>
+            <a:r>
+              <a:rPr dirty="0"/>
+              <a:t> 1.56 </a:t>
+            </a:r>
+            <a:r>
+              <a:rPr dirty="0" err="1"/>
+              <a:t>倍。同批三块的波动</a:t>
+            </a:r>
+            <a:r>
+              <a:rPr dirty="0"/>
+              <a:t> 82.4% </a:t>
+            </a:r>
+            <a:r>
+              <a:rPr dirty="0" err="1"/>
+              <a:t>来自共同成分，远高于独立基准的三分之一，说明回升不是随机抖动，不能平滑</a:t>
+            </a:r>
+            <a:r>
+              <a:rPr dirty="0"/>
+              <a:t>。</a:t>
             </a:r>
           </a:p>
         </p:txBody>
@@ -1152,7 +1181,36 @@
           <a:lstStyle/>
           <a:p>
             <a:r>
-              <a:t>本页是全文口径的起点。阈值每移动 0.01 Ah，寿命相差 3 至 4 个循环；但排序在 80 个阈值上从未翻转。因此后文寿命数字都附带阈值口径。</a:t>
+              <a:rPr dirty="0" err="1"/>
+              <a:t>本页是全文口径的起点。阈值每移动</a:t>
+            </a:r>
+            <a:r>
+              <a:rPr dirty="0"/>
+              <a:t> 0.01 </a:t>
+            </a:r>
+            <a:r>
+              <a:rPr dirty="0" err="1"/>
+              <a:t>Ah，寿命相差</a:t>
+            </a:r>
+            <a:r>
+              <a:rPr dirty="0"/>
+              <a:t> 3 至 4 </a:t>
+            </a:r>
+            <a:r>
+              <a:rPr dirty="0" err="1"/>
+              <a:t>个循环；但排序在</a:t>
+            </a:r>
+            <a:r>
+              <a:rPr dirty="0"/>
+              <a:t> 80 </a:t>
+            </a:r>
+            <a:r>
+              <a:rPr dirty="0" err="1"/>
+              <a:t>个阈值上从未翻转。因此后文寿命数字都附带阈值口径</a:t>
+            </a:r>
+            <a:r>
+              <a:rPr dirty="0"/>
+              <a:t>。</a:t>
             </a:r>
           </a:p>
         </p:txBody>
@@ -1636,7 +1694,7 @@
           <a:p>
             <a:fld id="{5BCAD085-E8A6-8845-BD4E-CB4CCA059FC4}" type="datetimeFigureOut">
               <a:rPr lang="en-US" smtClean="0"/>
-              <a:t>10/30/2026</a:t>
+              <a:t>10/31/2026</a:t>
             </a:fld>
             <a:endParaRPr lang="en-US"/>
           </a:p>
@@ -1804,7 +1862,7 @@
           <a:p>
             <a:fld id="{5BCAD085-E8A6-8845-BD4E-CB4CCA059FC4}" type="datetimeFigureOut">
               <a:rPr lang="en-US" smtClean="0"/>
-              <a:t>10/30/2026</a:t>
+              <a:t>10/31/2026</a:t>
             </a:fld>
             <a:endParaRPr lang="en-US"/>
           </a:p>
@@ -1982,7 +2040,7 @@
           <a:p>
             <a:fld id="{5BCAD085-E8A6-8845-BD4E-CB4CCA059FC4}" type="datetimeFigureOut">
               <a:rPr lang="en-US" smtClean="0"/>
-              <a:t>10/30/2026</a:t>
+              <a:t>10/31/2026</a:t>
             </a:fld>
             <a:endParaRPr lang="en-US"/>
           </a:p>
@@ -2150,7 +2208,7 @@
           <a:p>
             <a:fld id="{5BCAD085-E8A6-8845-BD4E-CB4CCA059FC4}" type="datetimeFigureOut">
               <a:rPr lang="en-US" smtClean="0"/>
-              <a:t>10/30/2026</a:t>
+              <a:t>10/31/2026</a:t>
             </a:fld>
             <a:endParaRPr lang="en-US"/>
           </a:p>
@@ -2395,7 +2453,7 @@
           <a:p>
             <a:fld id="{5BCAD085-E8A6-8845-BD4E-CB4CCA059FC4}" type="datetimeFigureOut">
               <a:rPr lang="en-US" smtClean="0"/>
-              <a:t>10/30/2026</a:t>
+              <a:t>10/31/2026</a:t>
             </a:fld>
             <a:endParaRPr lang="en-US"/>
           </a:p>
@@ -2680,7 +2738,7 @@
           <a:p>
             <a:fld id="{5BCAD085-E8A6-8845-BD4E-CB4CCA059FC4}" type="datetimeFigureOut">
               <a:rPr lang="en-US" smtClean="0"/>
-              <a:t>10/30/2026</a:t>
+              <a:t>10/31/2026</a:t>
             </a:fld>
             <a:endParaRPr lang="en-US"/>
           </a:p>
@@ -3099,7 +3157,7 @@
           <a:p>
             <a:fld id="{5BCAD085-E8A6-8845-BD4E-CB4CCA059FC4}" type="datetimeFigureOut">
               <a:rPr lang="en-US" smtClean="0"/>
-              <a:t>10/30/2026</a:t>
+              <a:t>10/31/2026</a:t>
             </a:fld>
             <a:endParaRPr lang="en-US"/>
           </a:p>
@@ -3216,7 +3274,7 @@
           <a:p>
             <a:fld id="{5BCAD085-E8A6-8845-BD4E-CB4CCA059FC4}" type="datetimeFigureOut">
               <a:rPr lang="en-US" smtClean="0"/>
-              <a:t>10/30/2026</a:t>
+              <a:t>10/31/2026</a:t>
             </a:fld>
             <a:endParaRPr lang="en-US"/>
           </a:p>
@@ -3311,7 +3369,7 @@
           <a:p>
             <a:fld id="{5BCAD085-E8A6-8845-BD4E-CB4CCA059FC4}" type="datetimeFigureOut">
               <a:rPr lang="en-US" smtClean="0"/>
-              <a:t>10/30/2026</a:t>
+              <a:t>10/31/2026</a:t>
             </a:fld>
             <a:endParaRPr lang="en-US"/>
           </a:p>
@@ -3586,7 +3644,7 @@
           <a:p>
             <a:fld id="{5BCAD085-E8A6-8845-BD4E-CB4CCA059FC4}" type="datetimeFigureOut">
               <a:rPr lang="en-US" smtClean="0"/>
-              <a:t>10/30/2026</a:t>
+              <a:t>10/31/2026</a:t>
             </a:fld>
             <a:endParaRPr lang="en-US"/>
           </a:p>
@@ -3838,7 +3896,7 @@
           <a:p>
             <a:fld id="{5BCAD085-E8A6-8845-BD4E-CB4CCA059FC4}" type="datetimeFigureOut">
               <a:rPr lang="en-US" smtClean="0"/>
-              <a:t>10/30/2026</a:t>
+              <a:t>10/31/2026</a:t>
             </a:fld>
             <a:endParaRPr lang="en-US"/>
           </a:p>
@@ -4049,7 +4107,7 @@
           <a:p>
             <a:fld id="{5BCAD085-E8A6-8845-BD4E-CB4CCA059FC4}" type="datetimeFigureOut">
               <a:rPr lang="en-US" smtClean="0"/>
-              <a:t>10/30/2026</a:t>
+              <a:t>10/31/2026</a:t>
             </a:fld>
             <a:endParaRPr lang="en-US"/>
           </a:p>
@@ -4549,8 +4607,9 @@
                 <a:solidFill>
                   <a:srgbClr val="BFCDE6"/>
                 </a:solidFill>
-                <a:latin typeface="微软雅黑"/>
-                <a:ea typeface="微软雅黑"/>
+                <a:latin typeface="宋体"/>
+                <a:ea typeface="宋体"/>
+                <a:cs typeface="宋体"/>
               </a:rPr>
               <a:t>《Python 数据分析编程》课程项目　·　题目三</a:t>
             </a:r>
@@ -4592,8 +4651,9 @@
                 <a:solidFill>
                   <a:srgbClr val="FFFFFF"/>
                 </a:solidFill>
-                <a:latin typeface="微软雅黑"/>
-                <a:ea typeface="微软雅黑"/>
+                <a:latin typeface="宋体"/>
+                <a:ea typeface="宋体"/>
+                <a:cs typeface="宋体"/>
               </a:rPr>
               <a:t>无人设备电池健康评估与剩余寿命预测</a:t>
             </a:r>
@@ -4612,8 +4672,9 @@
                 <a:solidFill>
                   <a:srgbClr val="D8E2F2"/>
                 </a:solidFill>
-                <a:latin typeface="微软雅黑"/>
-                <a:ea typeface="微软雅黑"/>
+                <a:latin typeface="宋体"/>
+                <a:ea typeface="宋体"/>
+                <a:cs typeface="宋体"/>
               </a:rPr>
               <a:t>容量退化建模与不确定性量化</a:t>
             </a:r>
@@ -4655,8 +4716,9 @@
                 <a:solidFill>
                   <a:srgbClr val="BFCDE6"/>
                 </a:solidFill>
-                <a:latin typeface="微软雅黑"/>
-                <a:ea typeface="微软雅黑"/>
+                <a:latin typeface="宋体"/>
+                <a:ea typeface="宋体"/>
+                <a:cs typeface="宋体"/>
               </a:rPr>
               <a:t>第 20 组　黄锦添　25121605　·　上海大学 未来技术学院 人工智能</a:t>
             </a:r>
@@ -4745,8 +4807,9 @@
                 <a:solidFill>
                   <a:srgbClr val="E07B27"/>
                 </a:solidFill>
-                <a:latin typeface="微软雅黑"/>
-                <a:ea typeface="微软雅黑"/>
+                <a:latin typeface="宋体"/>
+                <a:ea typeface="宋体"/>
+                <a:cs typeface="宋体"/>
               </a:rPr>
               <a:t>4 块 · 636 循环</a:t>
             </a:r>
@@ -4788,8 +4851,9 @@
                 <a:solidFill>
                   <a:srgbClr val="D8E2F2"/>
                 </a:solidFill>
-                <a:latin typeface="微软雅黑"/>
-                <a:ea typeface="微软雅黑"/>
+                <a:latin typeface="宋体"/>
+                <a:ea typeface="宋体"/>
+                <a:cs typeface="宋体"/>
               </a:rPr>
               <a:t>NASA PCoE 锂离子电池老化数据</a:t>
             </a:r>
@@ -4878,8 +4942,9 @@
                 <a:solidFill>
                   <a:srgbClr val="E07B27"/>
                 </a:solidFill>
-                <a:latin typeface="微软雅黑"/>
-                <a:ea typeface="微软雅黑"/>
+                <a:latin typeface="宋体"/>
+                <a:ea typeface="宋体"/>
+                <a:cs typeface="宋体"/>
               </a:rPr>
               <a:t>4 类模型 · 2 个任务</a:t>
             </a:r>
@@ -4921,8 +4986,9 @@
                 <a:solidFill>
                   <a:srgbClr val="D8E2F2"/>
                 </a:solidFill>
-                <a:latin typeface="微软雅黑"/>
-                <a:ea typeface="微软雅黑"/>
+                <a:latin typeface="宋体"/>
+                <a:ea typeface="宋体"/>
+                <a:cs typeface="宋体"/>
               </a:rPr>
               <a:t>个体内外推 / 跨个体早期预测</a:t>
             </a:r>
@@ -5011,8 +5077,9 @@
                 <a:solidFill>
                   <a:srgbClr val="E07B27"/>
                 </a:solidFill>
-                <a:latin typeface="微软雅黑"/>
-                <a:ea typeface="微软雅黑"/>
+                <a:latin typeface="宋体"/>
+                <a:ea typeface="宋体"/>
+                <a:cs typeface="宋体"/>
               </a:rPr>
               <a:t>1 条命令重建</a:t>
             </a:r>
@@ -5054,8 +5121,9 @@
                 <a:solidFill>
                   <a:srgbClr val="D8E2F2"/>
                 </a:solidFill>
-                <a:latin typeface="微软雅黑"/>
-                <a:ea typeface="微软雅黑"/>
+                <a:latin typeface="宋体"/>
+                <a:ea typeface="宋体"/>
+                <a:cs typeface="宋体"/>
               </a:rPr>
               <a:t>17 步管线 · 40 个产物逐字节一致</a:t>
             </a:r>
@@ -5067,6 +5135,101 @@
   <p:clrMapOvr>
     <a:masterClrMapping/>
   </p:clrMapOvr>
+  <mc:AlternateContent xmlns:mc="http://schemas.openxmlformats.org/markup-compatibility/2006">
+    <mc:Choice xmlns:p14="http://schemas.microsoft.com/office/powerpoint/2010/main" Requires="p14">
+      <p:transition spd="slow" p14:dur="2000" advTm="5498"/>
+    </mc:Choice>
+    <mc:Fallback>
+      <p:transition spd="slow" advTm="5498"/>
+    </mc:Fallback>
+  </mc:AlternateContent>
+  <p:timing>
+    <p:tnLst>
+      <p:par>
+        <p:cTn id="1" dur="indefinite" restart="never" nodeType="tmRoot">
+          <p:childTnLst>
+            <p:seq concurrent="1" nextAc="seek">
+              <p:cTn id="2" dur="indefinite" nodeType="mainSeq">
+                <p:childTnLst>
+                  <p:par>
+                    <p:cTn id="3" fill="hold">
+                      <p:stCondLst>
+                        <p:cond delay="indefinite"/>
+                        <p:cond evt="onBegin" delay="0">
+                          <p:tn val="2"/>
+                        </p:cond>
+                      </p:stCondLst>
+                      <p:childTnLst>
+                        <p:par>
+                          <p:cTn id="4" fill="hold">
+                            <p:stCondLst>
+                              <p:cond delay="0"/>
+                            </p:stCondLst>
+                            <p:childTnLst>
+                              <p:par>
+                                <p:cTn id="5" presetID="1" presetClass="mediacall" presetSubtype="0" fill="hold" nodeType="afterEffect">
+                                  <p:stCondLst>
+                                    <p:cond delay="0"/>
+                                  </p:stCondLst>
+                                  <p:childTnLst>
+                                    <p:cmd type="call" cmd="playFrom(0.0)">
+                                      <p:cBhvr>
+                                        <p:cTn id="6" dur="1" fill="hold"/>
+                                        <p:tgtEl>
+                                          <p:spTgt spid="16"/>
+                                        </p:tgtEl>
+                                      </p:cBhvr>
+                                    </p:cmd>
+                                  </p:childTnLst>
+                                </p:cTn>
+                              </p:par>
+                            </p:childTnLst>
+                          </p:cTn>
+                        </p:par>
+                      </p:childTnLst>
+                    </p:cTn>
+                  </p:par>
+                </p:childTnLst>
+              </p:cTn>
+              <p:prevCondLst>
+                <p:cond evt="onPrev" delay="0">
+                  <p:tgtEl>
+                    <p:sldTgt/>
+                  </p:tgtEl>
+                </p:cond>
+              </p:prevCondLst>
+              <p:nextCondLst>
+                <p:cond evt="onNext" delay="0">
+                  <p:tgtEl>
+                    <p:sldTgt/>
+                  </p:tgtEl>
+                </p:cond>
+              </p:nextCondLst>
+            </p:seq>
+            <p:audio isNarration="1">
+              <p:cMediaNode vol="80000" showWhenStopped="0">
+                <p:cTn id="7" fill="hold" display="0">
+                  <p:stCondLst>
+                    <p:cond delay="indefinite"/>
+                  </p:stCondLst>
+                  <p:endCondLst>
+                    <p:cond evt="onStopAudio" delay="0">
+                      <p:tgtEl>
+                        <p:sldTgt/>
+                      </p:tgtEl>
+                    </p:cond>
+                  </p:endCondLst>
+                </p:cTn>
+                <p:tgtEl>
+                  <p:spTgt spid="16"/>
+                </p:tgtEl>
+              </p:cMediaNode>
+            </p:audio>
+          </p:childTnLst>
+        </p:cTn>
+      </p:par>
+    </p:tnLst>
+  </p:timing>
 </p:sld>
 </file>
 
@@ -5257,8 +5420,9 @@
                 <a:solidFill>
                   <a:srgbClr val="BFCDE6"/>
                 </a:solidFill>
-                <a:latin typeface="微软雅黑"/>
-                <a:ea typeface="微软雅黑"/>
+                <a:latin typeface="宋体"/>
+                <a:ea typeface="宋体"/>
+                <a:cs typeface="宋体"/>
               </a:rPr>
               <a:t>05 · 不确定性</a:t>
             </a:r>
@@ -5300,8 +5464,9 @@
                 <a:solidFill>
                   <a:srgbClr val="FFFFFF"/>
                 </a:solidFill>
-                <a:latin typeface="微软雅黑"/>
-                <a:ea typeface="微软雅黑"/>
+                <a:latin typeface="宋体"/>
+                <a:ea typeface="宋体"/>
+                <a:cs typeface="宋体"/>
               </a:rPr>
               <a:t>三层不确定性预算</a:t>
             </a:r>
@@ -5343,8 +5508,9 @@
                 <a:solidFill>
                   <a:srgbClr val="FFFFFF"/>
                 </a:solidFill>
-                <a:latin typeface="微软雅黑"/>
-                <a:ea typeface="微软雅黑"/>
+                <a:latin typeface="宋体"/>
+                <a:ea typeface="宋体"/>
+                <a:cs typeface="宋体"/>
               </a:rPr>
               <a:t>10</a:t>
             </a:r>
@@ -5353,8 +5519,9 @@
                 <a:solidFill>
                   <a:srgbClr val="9FB3D6"/>
                 </a:solidFill>
-                <a:latin typeface="微软雅黑"/>
-                <a:ea typeface="微软雅黑"/>
+                <a:latin typeface="宋体"/>
+                <a:ea typeface="宋体"/>
+                <a:cs typeface="宋体"/>
               </a:rPr>
               <a:t> / 13</a:t>
             </a:r>
@@ -5488,8 +5655,9 @@
                 <a:solidFill>
                   <a:srgbClr val="1F3864"/>
                 </a:solidFill>
-                <a:latin typeface="微软雅黑"/>
-                <a:ea typeface="微软雅黑"/>
+                <a:latin typeface="宋体"/>
+                <a:ea typeface="宋体"/>
+                <a:cs typeface="宋体"/>
               </a:rPr>
               <a:t>定义层　</a:t>
             </a:r>
@@ -5498,8 +5666,9 @@
                 <a:solidFill>
                   <a:srgbClr val="E07B27"/>
                 </a:solidFill>
-                <a:latin typeface="微软雅黑"/>
-                <a:ea typeface="微软雅黑"/>
+                <a:latin typeface="宋体"/>
+                <a:ea typeface="宋体"/>
+                <a:cs typeface="宋体"/>
               </a:rPr>
               <a:t>11–20</a:t>
             </a:r>
@@ -5508,8 +5677,9 @@
                 <a:solidFill>
                   <a:srgbClr val="595959"/>
                 </a:solidFill>
-                <a:latin typeface="微软雅黑"/>
-                <a:ea typeface="微软雅黑"/>
+                <a:latin typeface="宋体"/>
+                <a:ea typeface="宋体"/>
+                <a:cs typeface="宋体"/>
               </a:rPr>
               <a:t> 循环</a:t>
             </a:r>
@@ -5551,8 +5721,9 @@
                 <a:solidFill>
                   <a:srgbClr val="262626"/>
                 </a:solidFill>
-                <a:latin typeface="微软雅黑"/>
-                <a:ea typeface="微软雅黑"/>
+                <a:latin typeface="宋体"/>
+                <a:ea typeface="宋体"/>
+                <a:cs typeface="宋体"/>
               </a:rPr>
               <a:t>失效判据阈值选取（τ ± 0.05 Ah）引入的 EOL 极差，属口径约定而非模型误差</a:t>
             </a:r>
@@ -5686,8 +5857,9 @@
                 <a:solidFill>
                   <a:srgbClr val="1F3864"/>
                 </a:solidFill>
-                <a:latin typeface="微软雅黑"/>
-                <a:ea typeface="微软雅黑"/>
+                <a:latin typeface="宋体"/>
+                <a:ea typeface="宋体"/>
+                <a:cs typeface="宋体"/>
               </a:rPr>
               <a:t>模型形式层　</a:t>
             </a:r>
@@ -5696,8 +5868,9 @@
                 <a:solidFill>
                   <a:srgbClr val="E07B27"/>
                 </a:solidFill>
-                <a:latin typeface="微软雅黑"/>
-                <a:ea typeface="微软雅黑"/>
+                <a:latin typeface="宋体"/>
+                <a:ea typeface="宋体"/>
+                <a:cs typeface="宋体"/>
               </a:rPr>
               <a:t>0–22</a:t>
             </a:r>
@@ -5706,8 +5879,9 @@
                 <a:solidFill>
                   <a:srgbClr val="595959"/>
                 </a:solidFill>
-                <a:latin typeface="微软雅黑"/>
-                <a:ea typeface="微软雅黑"/>
+                <a:latin typeface="宋体"/>
+                <a:ea typeface="宋体"/>
+                <a:cs typeface="宋体"/>
               </a:rPr>
               <a:t> 循环</a:t>
             </a:r>
@@ -5745,15 +5919,45 @@
               </a:spcAft>
             </a:pPr>
             <a:r>
-              <a:rPr sz="1050" b="0">
+              <a:rPr sz="1050" b="0" dirty="0" err="1">
                 <a:solidFill>
                   <a:srgbClr val="262626"/>
                 </a:solidFill>
-                <a:latin typeface="微软雅黑"/>
-                <a:ea typeface="微软雅黑"/>
-              </a:rPr>
-              <a:t>模型形式选择引入的 EOL 半极差，其宽度全部来自双指数模型，应解释为形式差异的上界</a:t>
-            </a:r>
+                <a:latin typeface="宋体"/>
+                <a:ea typeface="宋体"/>
+                <a:cs typeface="宋体"/>
+              </a:rPr>
+              <a:t>模型形式选择引入的</a:t>
+            </a:r>
+            <a:r>
+              <a:rPr sz="1050" b="0" dirty="0">
+                <a:solidFill>
+                  <a:srgbClr val="262626"/>
+                </a:solidFill>
+                <a:latin typeface="宋体"/>
+                <a:ea typeface="宋体"/>
+                <a:cs typeface="宋体"/>
+              </a:rPr>
+              <a:t> EOL </a:t>
+            </a:r>
+            <a:r>
+              <a:rPr sz="1050" b="0" dirty="0" err="1">
+                <a:solidFill>
+                  <a:srgbClr val="262626"/>
+                </a:solidFill>
+                <a:latin typeface="宋体"/>
+                <a:ea typeface="宋体"/>
+                <a:cs typeface="宋体"/>
+              </a:rPr>
+              <a:t>半极差，其宽度全部来自双指数模型，应解释为形式差异的上界</a:t>
+            </a:r>
+            <a:endParaRPr sz="1050" b="0" dirty="0">
+              <a:solidFill>
+                <a:srgbClr val="262626"/>
+              </a:solidFill>
+              <a:latin typeface="微软雅黑"/>
+              <a:ea typeface="微软雅黑"/>
+            </a:endParaRPr>
           </a:p>
         </p:txBody>
       </p:sp>
@@ -5884,8 +6088,9 @@
                 <a:solidFill>
                   <a:srgbClr val="1F3864"/>
                 </a:solidFill>
-                <a:latin typeface="微软雅黑"/>
-                <a:ea typeface="微软雅黑"/>
+                <a:latin typeface="宋体"/>
+                <a:ea typeface="宋体"/>
+                <a:cs typeface="宋体"/>
               </a:rPr>
               <a:t>数据层　</a:t>
             </a:r>
@@ -5894,8 +6099,9 @@
                 <a:solidFill>
                   <a:srgbClr val="E07B27"/>
                 </a:solidFill>
-                <a:latin typeface="微软雅黑"/>
-                <a:ea typeface="微软雅黑"/>
+                <a:latin typeface="宋体"/>
+                <a:ea typeface="宋体"/>
+                <a:cs typeface="宋体"/>
               </a:rPr>
               <a:t>6–20</a:t>
             </a:r>
@@ -5904,8 +6110,9 @@
                 <a:solidFill>
                   <a:srgbClr val="595959"/>
                 </a:solidFill>
-                <a:latin typeface="微软雅黑"/>
-                <a:ea typeface="微软雅黑"/>
+                <a:latin typeface="宋体"/>
+                <a:ea typeface="宋体"/>
+                <a:cs typeface="宋体"/>
               </a:rPr>
               <a:t> 循环</a:t>
             </a:r>
@@ -5947,8 +6154,9 @@
                 <a:solidFill>
                   <a:srgbClr val="262626"/>
                 </a:solidFill>
-                <a:latin typeface="微软雅黑"/>
-                <a:ea typeface="微软雅黑"/>
+                <a:latin typeface="宋体"/>
+                <a:ea typeface="宋体"/>
+                <a:cs typeface="宋体"/>
               </a:rPr>
               <a:t>残差噪声与趋势参数，取自 M4 后验 90% 半宽</a:t>
             </a:r>
@@ -5990,8 +6198,9 @@
                 <a:solidFill>
                   <a:srgbClr val="595959"/>
                 </a:solidFill>
-                <a:latin typeface="微软雅黑"/>
-                <a:ea typeface="微软雅黑"/>
+                <a:latin typeface="宋体"/>
+                <a:ea typeface="宋体"/>
+                <a:cs typeface="宋体"/>
               </a:rPr>
               <a:t>合并口径：RSS 为独立假设下的乐观口径，SUM 为最坏情况下的保守口径，宽度 28–53 循环；运维取 SUM。</a:t>
             </a:r>
@@ -6007,7 +6216,7 @@
           <p:nvPr/>
         </p:nvPicPr>
         <p:blipFill>
-          <a:blip r:embed="rId3"/>
+          <a:blip r:embed="rId5"/>
           <a:stretch>
             <a:fillRect/>
           </a:stretch>
@@ -6031,7 +6240,7 @@
           <p:nvPr/>
         </p:nvPicPr>
         <p:blipFill>
-          <a:blip r:embed="rId4"/>
+          <a:blip r:embed="rId6"/>
           <a:stretch>
             <a:fillRect/>
           </a:stretch>
@@ -6051,6 +6260,101 @@
   <p:clrMapOvr>
     <a:masterClrMapping/>
   </p:clrMapOvr>
+  <mc:AlternateContent xmlns:mc="http://schemas.openxmlformats.org/markup-compatibility/2006">
+    <mc:Choice xmlns:p14="http://schemas.microsoft.com/office/powerpoint/2010/main" Requires="p14">
+      <p:transition spd="slow" p14:dur="2000" advTm="5312"/>
+    </mc:Choice>
+    <mc:Fallback>
+      <p:transition spd="slow" advTm="5312"/>
+    </mc:Fallback>
+  </mc:AlternateContent>
+  <p:timing>
+    <p:tnLst>
+      <p:par>
+        <p:cTn id="1" dur="indefinite" restart="never" nodeType="tmRoot">
+          <p:childTnLst>
+            <p:seq concurrent="1" nextAc="seek">
+              <p:cTn id="2" dur="indefinite" nodeType="mainSeq">
+                <p:childTnLst>
+                  <p:par>
+                    <p:cTn id="3" fill="hold">
+                      <p:stCondLst>
+                        <p:cond delay="indefinite"/>
+                        <p:cond evt="onBegin" delay="0">
+                          <p:tn val="2"/>
+                        </p:cond>
+                      </p:stCondLst>
+                      <p:childTnLst>
+                        <p:par>
+                          <p:cTn id="4" fill="hold">
+                            <p:stCondLst>
+                              <p:cond delay="0"/>
+                            </p:stCondLst>
+                            <p:childTnLst>
+                              <p:par>
+                                <p:cTn id="5" presetID="1" presetClass="mediacall" presetSubtype="0" fill="hold" nodeType="afterEffect">
+                                  <p:stCondLst>
+                                    <p:cond delay="0"/>
+                                  </p:stCondLst>
+                                  <p:childTnLst>
+                                    <p:cmd type="call" cmd="playFrom(0.0)">
+                                      <p:cBhvr>
+                                        <p:cTn id="6" dur="1" fill="hold"/>
+                                        <p:tgtEl>
+                                          <p:spTgt spid="8"/>
+                                        </p:tgtEl>
+                                      </p:cBhvr>
+                                    </p:cmd>
+                                  </p:childTnLst>
+                                </p:cTn>
+                              </p:par>
+                            </p:childTnLst>
+                          </p:cTn>
+                        </p:par>
+                      </p:childTnLst>
+                    </p:cTn>
+                  </p:par>
+                </p:childTnLst>
+              </p:cTn>
+              <p:prevCondLst>
+                <p:cond evt="onPrev" delay="0">
+                  <p:tgtEl>
+                    <p:sldTgt/>
+                  </p:tgtEl>
+                </p:cond>
+              </p:prevCondLst>
+              <p:nextCondLst>
+                <p:cond evt="onNext" delay="0">
+                  <p:tgtEl>
+                    <p:sldTgt/>
+                  </p:tgtEl>
+                </p:cond>
+              </p:nextCondLst>
+            </p:seq>
+            <p:audio isNarration="1">
+              <p:cMediaNode vol="80000" showWhenStopped="0">
+                <p:cTn id="7" fill="hold" display="0">
+                  <p:stCondLst>
+                    <p:cond delay="indefinite"/>
+                  </p:stCondLst>
+                  <p:endCondLst>
+                    <p:cond evt="onStopAudio" delay="0">
+                      <p:tgtEl>
+                        <p:sldTgt/>
+                      </p:tgtEl>
+                    </p:cond>
+                  </p:endCondLst>
+                </p:cTn>
+                <p:tgtEl>
+                  <p:spTgt spid="8"/>
+                </p:tgtEl>
+              </p:cMediaNode>
+            </p:audio>
+          </p:childTnLst>
+        </p:cTn>
+      </p:par>
+    </p:tnLst>
+  </p:timing>
 </p:sld>
 </file>
 
@@ -6241,8 +6545,9 @@
                 <a:solidFill>
                   <a:srgbClr val="BFCDE6"/>
                 </a:solidFill>
-                <a:latin typeface="微软雅黑"/>
-                <a:ea typeface="微软雅黑"/>
+                <a:latin typeface="宋体"/>
+                <a:ea typeface="宋体"/>
+                <a:cs typeface="宋体"/>
               </a:rPr>
               <a:t>05 · 不确定性</a:t>
             </a:r>
@@ -6284,8 +6589,9 @@
                 <a:solidFill>
                   <a:srgbClr val="FFFFFF"/>
                 </a:solidFill>
-                <a:latin typeface="微软雅黑"/>
-                <a:ea typeface="微软雅黑"/>
+                <a:latin typeface="宋体"/>
+                <a:ea typeface="宋体"/>
+                <a:cs typeface="宋体"/>
               </a:rPr>
               <a:t>区间校准与覆盖缺口的归因</a:t>
             </a:r>
@@ -6327,8 +6633,9 @@
                 <a:solidFill>
                   <a:srgbClr val="FFFFFF"/>
                 </a:solidFill>
-                <a:latin typeface="微软雅黑"/>
-                <a:ea typeface="微软雅黑"/>
+                <a:latin typeface="宋体"/>
+                <a:ea typeface="宋体"/>
+                <a:cs typeface="宋体"/>
               </a:rPr>
               <a:t>11</a:t>
             </a:r>
@@ -6337,8 +6644,9 @@
                 <a:solidFill>
                   <a:srgbClr val="9FB3D6"/>
                 </a:solidFill>
-                <a:latin typeface="微软雅黑"/>
-                <a:ea typeface="微软雅黑"/>
+                <a:latin typeface="宋体"/>
+                <a:ea typeface="宋体"/>
+                <a:cs typeface="宋体"/>
               </a:rPr>
               <a:t> / 13</a:t>
             </a:r>
@@ -6427,8 +6735,9 @@
                 <a:solidFill>
                   <a:srgbClr val="B33030"/>
                 </a:solidFill>
-                <a:latin typeface="微软雅黑"/>
-                <a:ea typeface="微软雅黑"/>
+                <a:latin typeface="宋体"/>
+                <a:ea typeface="宋体"/>
+                <a:cs typeface="宋体"/>
               </a:rPr>
               <a:t>63%</a:t>
             </a:r>
@@ -6470,8 +6779,9 @@
                 <a:solidFill>
                   <a:srgbClr val="595959"/>
                 </a:solidFill>
-                <a:latin typeface="微软雅黑"/>
-                <a:ea typeface="微软雅黑"/>
+                <a:latin typeface="宋体"/>
+                <a:ea typeface="宋体"/>
+                <a:cs typeface="宋体"/>
               </a:rPr>
               <a:t>名义 90% 区间的实际覆盖率（316 个测试点）</a:t>
             </a:r>
@@ -6560,8 +6870,9 @@
                 <a:solidFill>
                   <a:srgbClr val="1F3864"/>
                 </a:solidFill>
-                <a:latin typeface="微软雅黑"/>
-                <a:ea typeface="微软雅黑"/>
+                <a:latin typeface="宋体"/>
+                <a:ea typeface="宋体"/>
+                <a:cs typeface="宋体"/>
               </a:rPr>
               <a:t>10% / 99%</a:t>
             </a:r>
@@ -6603,8 +6914,9 @@
                 <a:solidFill>
                   <a:srgbClr val="595959"/>
                 </a:solidFill>
-                <a:latin typeface="微软雅黑"/>
-                <a:ea typeface="微软雅黑"/>
+                <a:latin typeface="宋体"/>
+                <a:ea typeface="宋体"/>
+                <a:cs typeface="宋体"/>
               </a:rPr>
               <a:t>逐块覆盖率最差 / 最好（极差 89 个百分点）</a:t>
             </a:r>
@@ -6642,15 +6954,78 @@
               </a:spcAft>
             </a:pPr>
             <a:r>
-              <a:rPr sz="1050" b="1">
+              <a:rPr sz="1050" b="1" dirty="0">
                 <a:solidFill>
                   <a:srgbClr val="E07B27"/>
                 </a:solidFill>
-                <a:latin typeface="微软雅黑"/>
-                <a:ea typeface="微软雅黑"/>
-              </a:rPr>
-              <a:t>▪ 驱动因素是偏差：点预测中位偏差逐块差 22.5 倍，区间宽度只差 1.15 倍，区间宽度与预测精度相互独立</a:t>
-            </a:r>
+                <a:latin typeface="宋体"/>
+                <a:ea typeface="宋体"/>
+                <a:cs typeface="宋体"/>
+              </a:rPr>
+              <a:t>▪ </a:t>
+            </a:r>
+            <a:r>
+              <a:rPr sz="1050" b="1" dirty="0" err="1">
+                <a:solidFill>
+                  <a:srgbClr val="E07B27"/>
+                </a:solidFill>
+                <a:latin typeface="宋体"/>
+                <a:ea typeface="宋体"/>
+                <a:cs typeface="宋体"/>
+              </a:rPr>
+              <a:t>驱动因素是偏差：点预测中位偏差逐块差</a:t>
+            </a:r>
+            <a:r>
+              <a:rPr sz="1050" b="1" dirty="0">
+                <a:solidFill>
+                  <a:srgbClr val="E07B27"/>
+                </a:solidFill>
+                <a:latin typeface="宋体"/>
+                <a:ea typeface="宋体"/>
+                <a:cs typeface="宋体"/>
+              </a:rPr>
+              <a:t> 22.5 </a:t>
+            </a:r>
+            <a:r>
+              <a:rPr sz="1050" b="1" dirty="0" err="1">
+                <a:solidFill>
+                  <a:srgbClr val="E07B27"/>
+                </a:solidFill>
+                <a:latin typeface="宋体"/>
+                <a:ea typeface="宋体"/>
+                <a:cs typeface="宋体"/>
+              </a:rPr>
+              <a:t>倍，区间宽度只差</a:t>
+            </a:r>
+            <a:r>
+              <a:rPr sz="1050" b="1" dirty="0">
+                <a:solidFill>
+                  <a:srgbClr val="E07B27"/>
+                </a:solidFill>
+                <a:latin typeface="宋体"/>
+                <a:ea typeface="宋体"/>
+                <a:cs typeface="宋体"/>
+              </a:rPr>
+              <a:t> 1.15 </a:t>
+            </a:r>
+            <a:r>
+              <a:rPr sz="1050" b="1" dirty="0" err="1">
+                <a:solidFill>
+                  <a:srgbClr val="E07B27"/>
+                </a:solidFill>
+                <a:latin typeface="宋体"/>
+                <a:ea typeface="宋体"/>
+                <a:cs typeface="宋体"/>
+              </a:rPr>
+              <a:t>倍，区间宽度与预测精度相互独立</a:t>
+            </a:r>
+            <a:endParaRPr sz="1050" b="1" dirty="0">
+              <a:solidFill>
+                <a:srgbClr val="E07B27"/>
+              </a:solidFill>
+              <a:latin typeface="微软雅黑"/>
+              <a:ea typeface="微软雅黑"/>
+            </a:endParaRPr>
           </a:p>
           <a:p>
             <a:pPr algn="l">
@@ -6662,34 +7037,59 @@
               </a:spcAft>
             </a:pPr>
             <a:r>
-              <a:rPr sz="1050" b="1">
+              <a:rPr sz="1050" b="1" dirty="0">
                 <a:solidFill>
                   <a:srgbClr val="E07B27"/>
                 </a:solidFill>
-                <a:latin typeface="微软雅黑"/>
-                <a:ea typeface="微软雅黑"/>
+                <a:latin typeface="宋体"/>
+                <a:ea typeface="宋体"/>
+                <a:cs typeface="宋体"/>
               </a:rPr>
               <a:t>▪ </a:t>
             </a:r>
             <a:r>
-              <a:rPr sz="1200" b="1">
+              <a:rPr sz="1200" b="1" dirty="0">
                 <a:solidFill>
                   <a:srgbClr val="1F3864"/>
                 </a:solidFill>
-                <a:latin typeface="微软雅黑"/>
-                <a:ea typeface="微软雅黑"/>
+                <a:latin typeface="宋体"/>
+                <a:ea typeface="宋体"/>
+                <a:cs typeface="宋体"/>
               </a:rPr>
               <a:t>有效样本量受自相关折减：</a:t>
             </a:r>
             <a:r>
-              <a:rPr sz="1100" b="0">
+              <a:rPr sz="1100" b="0" dirty="0">
                 <a:solidFill>
                   <a:srgbClr val="262626"/>
                 </a:solidFill>
-                <a:latin typeface="微软雅黑"/>
-                <a:ea typeface="微软雅黑"/>
-              </a:rPr>
-              <a:t>4 条序列高度自相关，有效样本约 109，块间差异在噪声范围内</a:t>
+                <a:latin typeface="宋体"/>
+                <a:ea typeface="宋体"/>
+                <a:cs typeface="宋体"/>
+              </a:rPr>
+              <a:t>4 </a:t>
+            </a:r>
+            <a:r>
+              <a:rPr sz="1100" b="0" dirty="0" err="1">
+                <a:solidFill>
+                  <a:srgbClr val="262626"/>
+                </a:solidFill>
+                <a:latin typeface="宋体"/>
+                <a:ea typeface="宋体"/>
+                <a:cs typeface="宋体"/>
+              </a:rPr>
+              <a:t>条序列高度自相关，有效样本约</a:t>
+            </a:r>
+            <a:r>
+              <a:rPr sz="1100" b="0" dirty="0">
+                <a:solidFill>
+                  <a:srgbClr val="262626"/>
+                </a:solidFill>
+                <a:latin typeface="宋体"/>
+                <a:ea typeface="宋体"/>
+                <a:cs typeface="宋体"/>
+              </a:rPr>
+              <a:t> 109，块间差异在噪声范围内</a:t>
             </a:r>
           </a:p>
           <a:p>
@@ -6702,34 +7102,92 @@
               </a:spcAft>
             </a:pPr>
             <a:r>
-              <a:rPr sz="1050" b="1">
+              <a:rPr sz="1050" b="1" dirty="0">
                 <a:solidFill>
                   <a:srgbClr val="E07B27"/>
                 </a:solidFill>
-                <a:latin typeface="微软雅黑"/>
-                <a:ea typeface="微软雅黑"/>
+                <a:latin typeface="宋体"/>
+                <a:ea typeface="宋体"/>
+                <a:cs typeface="宋体"/>
               </a:rPr>
               <a:t>▪ </a:t>
             </a:r>
             <a:r>
-              <a:rPr sz="1200" b="1">
+              <a:rPr sz="1200" b="1" dirty="0" err="1">
                 <a:solidFill>
                   <a:srgbClr val="1F3864"/>
                 </a:solidFill>
-                <a:latin typeface="微软雅黑"/>
-                <a:ea typeface="微软雅黑"/>
+                <a:latin typeface="宋体"/>
+                <a:ea typeface="宋体"/>
+                <a:cs typeface="宋体"/>
               </a:rPr>
               <a:t>结论随切分点摆动：</a:t>
             </a:r>
             <a:r>
-              <a:rPr sz="1100" b="0">
+              <a:rPr sz="1100" b="0" dirty="0" err="1">
                 <a:solidFill>
                   <a:srgbClr val="262626"/>
                 </a:solidFill>
-                <a:latin typeface="微软雅黑"/>
-                <a:ea typeface="微软雅黑"/>
-              </a:rPr>
-              <a:t>M = 60 / 80 / 100 下合并覆盖率为 34% / 63% / 67%，引用必须带 M</a:t>
+                <a:latin typeface="宋体"/>
+                <a:ea typeface="宋体"/>
+                <a:cs typeface="宋体"/>
+              </a:rPr>
+              <a:t>M</a:t>
+            </a:r>
+            <a:r>
+              <a:rPr sz="1100" b="0" dirty="0">
+                <a:solidFill>
+                  <a:srgbClr val="262626"/>
+                </a:solidFill>
+                <a:latin typeface="宋体"/>
+                <a:ea typeface="宋体"/>
+                <a:cs typeface="宋体"/>
+              </a:rPr>
+              <a:t> = 60 / 80 / 100 </a:t>
+            </a:r>
+            <a:r>
+              <a:rPr sz="1100" b="0" dirty="0" err="1">
+                <a:solidFill>
+                  <a:srgbClr val="262626"/>
+                </a:solidFill>
+                <a:latin typeface="宋体"/>
+                <a:ea typeface="宋体"/>
+                <a:cs typeface="宋体"/>
+              </a:rPr>
+              <a:t>下合并覆盖率为</a:t>
+            </a:r>
+            <a:r>
+              <a:rPr sz="1100" b="0" dirty="0">
+                <a:solidFill>
+                  <a:srgbClr val="262626"/>
+                </a:solidFill>
+                <a:latin typeface="宋体"/>
+                <a:ea typeface="宋体"/>
+                <a:cs typeface="宋体"/>
+              </a:rPr>
+              <a:t> 34% / 63% / 67%，</a:t>
+            </a:r>
+            <a:r>
+              <a:rPr sz="1100" b="0" dirty="0" err="1">
+                <a:solidFill>
+                  <a:srgbClr val="262626"/>
+                </a:solidFill>
+                <a:latin typeface="宋体"/>
+                <a:ea typeface="宋体"/>
+                <a:cs typeface="宋体"/>
+              </a:rPr>
+              <a:t>引用必须带</a:t>
+            </a:r>
+            <a:r>
+              <a:rPr sz="1100" b="0" dirty="0">
+                <a:solidFill>
+                  <a:srgbClr val="262626"/>
+                </a:solidFill>
+                <a:latin typeface="宋体"/>
+                <a:ea typeface="宋体"/>
+                <a:cs typeface="宋体"/>
+              </a:rPr>
+              <a:t> M</a:t>
             </a:r>
           </a:p>
           <a:p>
@@ -6742,35 +7200,89 @@
               </a:spcAft>
             </a:pPr>
             <a:r>
-              <a:rPr sz="1050" b="1">
+              <a:rPr sz="1050" b="1" dirty="0">
                 <a:solidFill>
                   <a:srgbClr val="E07B27"/>
                 </a:solidFill>
-                <a:latin typeface="微软雅黑"/>
-                <a:ea typeface="微软雅黑"/>
+                <a:latin typeface="宋体"/>
+                <a:ea typeface="宋体"/>
+                <a:cs typeface="宋体"/>
               </a:rPr>
               <a:t>▪ </a:t>
             </a:r>
             <a:r>
-              <a:rPr sz="1200" b="1">
+              <a:rPr sz="1200" b="1" dirty="0" err="1">
                 <a:solidFill>
                   <a:srgbClr val="1F3864"/>
                 </a:solidFill>
-                <a:latin typeface="微软雅黑"/>
-                <a:ea typeface="微软雅黑"/>
-              </a:rPr>
-              <a:t>补到 90% 需放宽 2.8 倍：</a:t>
-            </a:r>
-            <a:r>
-              <a:rPr sz="1100" b="0">
+                <a:latin typeface="宋体"/>
+                <a:ea typeface="宋体"/>
+                <a:cs typeface="宋体"/>
+              </a:rPr>
+              <a:t>补到</a:t>
+            </a:r>
+            <a:r>
+              <a:rPr sz="1200" b="1" dirty="0">
+                <a:solidFill>
+                  <a:srgbClr val="1F3864"/>
+                </a:solidFill>
+                <a:latin typeface="宋体"/>
+                <a:ea typeface="宋体"/>
+                <a:cs typeface="宋体"/>
+              </a:rPr>
+              <a:t> 90% </a:t>
+            </a:r>
+            <a:r>
+              <a:rPr sz="1200" b="1" dirty="0" err="1">
+                <a:solidFill>
+                  <a:srgbClr val="1F3864"/>
+                </a:solidFill>
+                <a:latin typeface="宋体"/>
+                <a:ea typeface="宋体"/>
+                <a:cs typeface="宋体"/>
+              </a:rPr>
+              <a:t>需放宽</a:t>
+            </a:r>
+            <a:r>
+              <a:rPr sz="1200" b="1" dirty="0">
+                <a:solidFill>
+                  <a:srgbClr val="1F3864"/>
+                </a:solidFill>
+                <a:latin typeface="宋体"/>
+                <a:ea typeface="宋体"/>
+                <a:cs typeface="宋体"/>
+              </a:rPr>
+              <a:t> 2.8 </a:t>
+            </a:r>
+            <a:r>
+              <a:rPr sz="1200" b="1" dirty="0" err="1">
+                <a:solidFill>
+                  <a:srgbClr val="1F3864"/>
+                </a:solidFill>
+                <a:latin typeface="宋体"/>
+                <a:ea typeface="宋体"/>
+                <a:cs typeface="宋体"/>
+              </a:rPr>
+              <a:t>倍：</a:t>
+            </a:r>
+            <a:r>
+              <a:rPr sz="1100" b="0" dirty="0" err="1">
                 <a:solidFill>
                   <a:srgbClr val="262626"/>
                 </a:solidFill>
-                <a:latin typeface="微软雅黑"/>
-                <a:ea typeface="微软雅黑"/>
+                <a:latin typeface="宋体"/>
+                <a:ea typeface="宋体"/>
+                <a:cs typeface="宋体"/>
               </a:rPr>
               <a:t>测试集上的事后诊断量，不可直接部署</a:t>
             </a:r>
+            <a:endParaRPr sz="1100" b="0" dirty="0">
+              <a:solidFill>
+                <a:srgbClr val="262626"/>
+              </a:solidFill>
+              <a:latin typeface="微软雅黑"/>
+              <a:ea typeface="微软雅黑"/>
+            </a:endParaRPr>
           </a:p>
         </p:txBody>
       </p:sp>
@@ -7017,8 +7529,9 @@
                 <a:solidFill>
                   <a:srgbClr val="BFCDE6"/>
                 </a:solidFill>
-                <a:latin typeface="微软雅黑"/>
-                <a:ea typeface="微软雅黑"/>
+                <a:latin typeface="宋体"/>
+                <a:ea typeface="宋体"/>
+                <a:cs typeface="宋体"/>
               </a:rPr>
               <a:t>06 · 运维</a:t>
             </a:r>
@@ -7060,8 +7573,9 @@
                 <a:solidFill>
                   <a:srgbClr val="FFFFFF"/>
                 </a:solidFill>
-                <a:latin typeface="微软雅黑"/>
-                <a:ea typeface="微软雅黑"/>
+                <a:latin typeface="宋体"/>
+                <a:ea typeface="宋体"/>
+                <a:cs typeface="宋体"/>
               </a:rPr>
               <a:t>三条维护判据</a:t>
             </a:r>
@@ -7103,8 +7617,9 @@
                 <a:solidFill>
                   <a:srgbClr val="FFFFFF"/>
                 </a:solidFill>
-                <a:latin typeface="微软雅黑"/>
-                <a:ea typeface="微软雅黑"/>
+                <a:latin typeface="宋体"/>
+                <a:ea typeface="宋体"/>
+                <a:cs typeface="宋体"/>
               </a:rPr>
               <a:t>12</a:t>
             </a:r>
@@ -7113,8 +7628,9 @@
                 <a:solidFill>
                   <a:srgbClr val="9FB3D6"/>
                 </a:solidFill>
-                <a:latin typeface="微软雅黑"/>
-                <a:ea typeface="微软雅黑"/>
+                <a:latin typeface="宋体"/>
+                <a:ea typeface="宋体"/>
+                <a:cs typeface="宋体"/>
               </a:rPr>
               <a:t> / 13</a:t>
             </a:r>
@@ -7203,8 +7719,9 @@
                 <a:solidFill>
                   <a:srgbClr val="1F3864"/>
                 </a:solidFill>
-                <a:latin typeface="微软雅黑"/>
-                <a:ea typeface="微软雅黑"/>
+                <a:latin typeface="宋体"/>
+                <a:ea typeface="宋体"/>
+                <a:cs typeface="宋体"/>
               </a:rPr>
               <a:t>S1 更换时刻</a:t>
             </a:r>
@@ -7242,14 +7759,26 @@
               </a:spcAft>
             </a:pPr>
             <a:r>
-              <a:rPr sz="1050" b="0">
+              <a:rPr sz="1050" b="0" dirty="0" err="1">
                 <a:solidFill>
                   <a:srgbClr val="262626"/>
                 </a:solidFill>
-                <a:latin typeface="微软雅黑"/>
-                <a:ea typeface="微软雅黑"/>
-              </a:rPr>
-              <a:t>等于更严阈值 1.45 Ah 下的实测穿越点减去模型与数据裕度；该穿越点在完整序列上读出，属回测口径，在线部署须以预测穿越点替代，此时不晚于失效的构造保证不再成立</a:t>
+                <a:latin typeface="宋体"/>
+                <a:ea typeface="宋体"/>
+                <a:cs typeface="宋体"/>
+              </a:rPr>
+              <a:t>等于更严阈值</a:t>
+            </a:r>
+            <a:r>
+              <a:rPr sz="1050" b="0" dirty="0">
+                <a:solidFill>
+                  <a:srgbClr val="262626"/>
+                </a:solidFill>
+                <a:latin typeface="宋体"/>
+                <a:ea typeface="宋体"/>
+                <a:cs typeface="宋体"/>
+              </a:rPr>
+              <a:t> 1.45 Ah 下的实测穿越点减去模型与数据裕度；该穿越点在完整序列上读出，属回测口径，在线部署须以预测穿越点替代，此时不晚于失效的构造保证不再成立</a:t>
             </a:r>
           </a:p>
         </p:txBody>
@@ -7262,7 +7791,7 @@
         </p:nvSpPr>
         <p:spPr>
           <a:xfrm>
-            <a:off x="7543800" y="2542032"/>
+            <a:off x="6646154" y="2582106"/>
             <a:ext cx="4114800" cy="1024128"/>
           </a:xfrm>
           <a:prstGeom prst="roundRect">
@@ -7336,8 +7865,9 @@
                 <a:solidFill>
                   <a:srgbClr val="1F3864"/>
                 </a:solidFill>
-                <a:latin typeface="微软雅黑"/>
-                <a:ea typeface="微软雅黑"/>
+                <a:latin typeface="宋体"/>
+                <a:ea typeface="宋体"/>
+                <a:cs typeface="宋体"/>
               </a:rPr>
               <a:t>S2 采集时长</a:t>
             </a:r>
@@ -7375,15 +7905,67 @@
               </a:spcAft>
             </a:pPr>
             <a:r>
-              <a:rPr sz="1050" b="0">
+              <a:rPr sz="1050" b="0" dirty="0" err="1">
                 <a:solidFill>
                   <a:srgbClr val="262626"/>
                 </a:solidFill>
-                <a:latin typeface="微软雅黑"/>
-                <a:ea typeface="微软雅黑"/>
-              </a:rPr>
-              <a:t>观测到预测稳定时刻（第 50–100 循环）再报寿命，可省 68–98 循环的数据量</a:t>
-            </a:r>
+                <a:latin typeface="宋体"/>
+                <a:ea typeface="宋体"/>
+                <a:cs typeface="宋体"/>
+              </a:rPr>
+              <a:t>观测到预测稳定时刻（第</a:t>
+            </a:r>
+            <a:r>
+              <a:rPr sz="1050" b="0" dirty="0">
+                <a:solidFill>
+                  <a:srgbClr val="262626"/>
+                </a:solidFill>
+                <a:latin typeface="宋体"/>
+                <a:ea typeface="宋体"/>
+                <a:cs typeface="宋体"/>
+              </a:rPr>
+              <a:t> 50–100 </a:t>
+            </a:r>
+            <a:r>
+              <a:rPr sz="1050" b="0" dirty="0" err="1">
+                <a:solidFill>
+                  <a:srgbClr val="262626"/>
+                </a:solidFill>
+                <a:latin typeface="宋体"/>
+                <a:ea typeface="宋体"/>
+                <a:cs typeface="宋体"/>
+              </a:rPr>
+              <a:t>循环）再报寿命，可省</a:t>
+            </a:r>
+            <a:r>
+              <a:rPr sz="1050" b="0" dirty="0">
+                <a:solidFill>
+                  <a:srgbClr val="262626"/>
+                </a:solidFill>
+                <a:latin typeface="宋体"/>
+                <a:ea typeface="宋体"/>
+                <a:cs typeface="宋体"/>
+              </a:rPr>
+              <a:t> 68–98 </a:t>
+            </a:r>
+            <a:r>
+              <a:rPr sz="1050" b="0" dirty="0" err="1">
+                <a:solidFill>
+                  <a:srgbClr val="262626"/>
+                </a:solidFill>
+                <a:latin typeface="宋体"/>
+                <a:ea typeface="宋体"/>
+                <a:cs typeface="宋体"/>
+              </a:rPr>
+              <a:t>循环的数据量</a:t>
+            </a:r>
+            <a:endParaRPr sz="1050" b="0" dirty="0">
+              <a:solidFill>
+                <a:srgbClr val="262626"/>
+              </a:solidFill>
+              <a:latin typeface="微软雅黑"/>
+              <a:ea typeface="微软雅黑"/>
+            </a:endParaRPr>
           </a:p>
         </p:txBody>
       </p:sp>
@@ -7395,7 +7977,7 @@
         </p:nvSpPr>
         <p:spPr>
           <a:xfrm>
-            <a:off x="7543800" y="3712464"/>
+            <a:off x="6646154" y="3714796"/>
             <a:ext cx="4114800" cy="1024128"/>
           </a:xfrm>
           <a:prstGeom prst="roundRect">
@@ -7469,8 +8051,9 @@
                 <a:solidFill>
                   <a:srgbClr val="1F3864"/>
                 </a:solidFill>
-                <a:latin typeface="微软雅黑"/>
-                <a:ea typeface="微软雅黑"/>
+                <a:latin typeface="宋体"/>
+                <a:ea typeface="宋体"/>
+                <a:cs typeface="宋体"/>
               </a:rPr>
               <a:t>S3 阈值口径</a:t>
             </a:r>
@@ -7508,15 +8091,67 @@
               </a:spcAft>
             </a:pPr>
             <a:r>
-              <a:rPr sz="1050" b="0">
+              <a:rPr sz="1050" b="0" dirty="0" err="1">
                 <a:solidFill>
                   <a:srgbClr val="262626"/>
                 </a:solidFill>
-                <a:latin typeface="微软雅黑"/>
-                <a:ea typeface="微软雅黑"/>
-              </a:rPr>
-              <a:t>先把 τ 与窗口写进规范：报排序可以不带 τ，报绝对寿命必须带</a:t>
-            </a:r>
+                <a:latin typeface="宋体"/>
+                <a:ea typeface="宋体"/>
+                <a:cs typeface="宋体"/>
+              </a:rPr>
+              <a:t>先把</a:t>
+            </a:r>
+            <a:r>
+              <a:rPr sz="1050" b="0" dirty="0">
+                <a:solidFill>
+                  <a:srgbClr val="262626"/>
+                </a:solidFill>
+                <a:latin typeface="宋体"/>
+                <a:ea typeface="宋体"/>
+                <a:cs typeface="宋体"/>
+              </a:rPr>
+              <a:t> τ </a:t>
+            </a:r>
+            <a:r>
+              <a:rPr sz="1050" b="0" dirty="0" err="1">
+                <a:solidFill>
+                  <a:srgbClr val="262626"/>
+                </a:solidFill>
+                <a:latin typeface="宋体"/>
+                <a:ea typeface="宋体"/>
+                <a:cs typeface="宋体"/>
+              </a:rPr>
+              <a:t>与窗口写进规范：报排序可以不带</a:t>
+            </a:r>
+            <a:r>
+              <a:rPr sz="1050" b="0" dirty="0">
+                <a:solidFill>
+                  <a:srgbClr val="262626"/>
+                </a:solidFill>
+                <a:latin typeface="宋体"/>
+                <a:ea typeface="宋体"/>
+                <a:cs typeface="宋体"/>
+              </a:rPr>
+              <a:t> </a:t>
+            </a:r>
+            <a:r>
+              <a:rPr sz="1050" b="0" dirty="0" err="1">
+                <a:solidFill>
+                  <a:srgbClr val="262626"/>
+                </a:solidFill>
+                <a:latin typeface="宋体"/>
+                <a:ea typeface="宋体"/>
+                <a:cs typeface="宋体"/>
+              </a:rPr>
+              <a:t>τ，报绝对寿命必须带</a:t>
+            </a:r>
+            <a:endParaRPr sz="1050" b="0" dirty="0">
+              <a:solidFill>
+                <a:srgbClr val="262626"/>
+              </a:solidFill>
+              <a:latin typeface="微软雅黑"/>
+              <a:ea typeface="微软雅黑"/>
+            </a:endParaRPr>
           </a:p>
         </p:txBody>
       </p:sp>
@@ -7528,7 +8163,7 @@
         </p:nvSpPr>
         <p:spPr>
           <a:xfrm>
-            <a:off x="7543800" y="5029200"/>
+            <a:off x="6646154" y="5029200"/>
             <a:ext cx="4114800" cy="868680"/>
           </a:xfrm>
           <a:prstGeom prst="roundRect">
@@ -7598,14 +8233,37 @@
               </a:spcAft>
             </a:pPr>
             <a:r>
-              <a:rPr sz="1250" b="1">
+              <a:rPr sz="1250" b="1" dirty="0">
                 <a:solidFill>
                   <a:srgbClr val="B33030"/>
                 </a:solidFill>
-                <a:latin typeface="微软雅黑"/>
-                <a:ea typeface="微软雅黑"/>
-              </a:rPr>
-              <a:t>例外：B0006 到达预测稳态时刻时已晚于建议更换点，其在线剩余寿命为负；对该个体不等待区间收敛，按早期观测直接安排更换。</a:t>
+                <a:latin typeface="宋体"/>
+                <a:ea typeface="宋体"/>
+                <a:cs typeface="宋体"/>
+              </a:rPr>
+              <a:t>例外：B0006 </a:t>
+            </a:r>
+            <a:r>
+              <a:rPr sz="1250" b="1" dirty="0" err="1">
+                <a:solidFill>
+                  <a:srgbClr val="B33030"/>
+                </a:solidFill>
+                <a:latin typeface="宋体"/>
+                <a:ea typeface="宋体"/>
+                <a:cs typeface="宋体"/>
+              </a:rPr>
+              <a:t>到达预测稳态时刻时已晚于建议更换点，其在线剩余寿命为负；对该个体不等待区间收敛，按早期观测直接安排更换</a:t>
+            </a:r>
+            <a:r>
+              <a:rPr sz="1250" b="1" dirty="0">
+                <a:solidFill>
+                  <a:srgbClr val="B33030"/>
+                </a:solidFill>
+                <a:latin typeface="宋体"/>
+                <a:ea typeface="宋体"/>
+                <a:cs typeface="宋体"/>
+              </a:rPr>
+              <a:t>。</a:t>
             </a:r>
           </a:p>
         </p:txBody>
@@ -7853,8 +8511,9 @@
                 <a:solidFill>
                   <a:srgbClr val="BFCDE6"/>
                 </a:solidFill>
-                <a:latin typeface="微软雅黑"/>
-                <a:ea typeface="微软雅黑"/>
+                <a:latin typeface="宋体"/>
+                <a:ea typeface="宋体"/>
+                <a:cs typeface="宋体"/>
               </a:rPr>
               <a:t>07 · 结论</a:t>
             </a:r>
@@ -7896,8 +8555,9 @@
                 <a:solidFill>
                   <a:srgbClr val="FFFFFF"/>
                 </a:solidFill>
-                <a:latin typeface="微软雅黑"/>
-                <a:ea typeface="微软雅黑"/>
+                <a:latin typeface="宋体"/>
+                <a:ea typeface="宋体"/>
+                <a:cs typeface="宋体"/>
               </a:rPr>
               <a:t>结论</a:t>
             </a:r>
@@ -7939,8 +8599,9 @@
                 <a:solidFill>
                   <a:srgbClr val="FFFFFF"/>
                 </a:solidFill>
-                <a:latin typeface="微软雅黑"/>
-                <a:ea typeface="微软雅黑"/>
+                <a:latin typeface="宋体"/>
+                <a:ea typeface="宋体"/>
+                <a:cs typeface="宋体"/>
               </a:rPr>
               <a:t>13</a:t>
             </a:r>
@@ -7949,8 +8610,9 @@
                 <a:solidFill>
                   <a:srgbClr val="9FB3D6"/>
                 </a:solidFill>
-                <a:latin typeface="微软雅黑"/>
-                <a:ea typeface="微软雅黑"/>
+                <a:latin typeface="宋体"/>
+                <a:ea typeface="宋体"/>
+                <a:cs typeface="宋体"/>
               </a:rPr>
               <a:t> / 13</a:t>
             </a:r>
@@ -8039,8 +8701,9 @@
                 <a:solidFill>
                   <a:srgbClr val="E07B27"/>
                 </a:solidFill>
-                <a:latin typeface="微软雅黑"/>
-                <a:ea typeface="微软雅黑"/>
+                <a:latin typeface="宋体"/>
+                <a:ea typeface="宋体"/>
+                <a:cs typeface="宋体"/>
               </a:rPr>
               <a:t>①</a:t>
             </a:r>
@@ -8078,15 +8741,23 @@
               </a:spcAft>
             </a:pPr>
             <a:r>
-              <a:rPr sz="1350" b="1">
+              <a:rPr sz="1350" b="1" dirty="0" err="1">
                 <a:solidFill>
                   <a:srgbClr val="1F3864"/>
                 </a:solidFill>
-                <a:latin typeface="微软雅黑"/>
-                <a:ea typeface="微软雅黑"/>
+                <a:latin typeface="宋体"/>
+                <a:ea typeface="宋体"/>
+                <a:cs typeface="宋体"/>
               </a:rPr>
               <a:t>寿命是依赖阈值口径的统计量</a:t>
             </a:r>
+            <a:endParaRPr sz="1350" b="1" dirty="0">
+              <a:solidFill>
+                <a:srgbClr val="1F3864"/>
+              </a:solidFill>
+              <a:latin typeface="微软雅黑"/>
+              <a:ea typeface="微软雅黑"/>
+            </a:endParaRPr>
           </a:p>
         </p:txBody>
       </p:sp>
@@ -8125,8 +8796,9 @@
                 <a:solidFill>
                   <a:srgbClr val="595959"/>
                 </a:solidFill>
-                <a:latin typeface="微软雅黑"/>
-                <a:ea typeface="微软雅黑"/>
+                <a:latin typeface="宋体"/>
+                <a:ea typeface="宋体"/>
+                <a:cs typeface="宋体"/>
               </a:rPr>
               <a:t>阈值 ±0.05 Ah → 读数差 30–40 循环；序关系在 80 个阈值上不变</a:t>
             </a:r>
@@ -8215,8 +8887,9 @@
                 <a:solidFill>
                   <a:srgbClr val="E07B27"/>
                 </a:solidFill>
-                <a:latin typeface="微软雅黑"/>
-                <a:ea typeface="微软雅黑"/>
+                <a:latin typeface="宋体"/>
+                <a:ea typeface="宋体"/>
+                <a:cs typeface="宋体"/>
               </a:rPr>
               <a:t>②</a:t>
             </a:r>
@@ -8254,15 +8927,23 @@
               </a:spcAft>
             </a:pPr>
             <a:r>
-              <a:rPr sz="1350" b="1">
+              <a:rPr sz="1350" b="1" dirty="0" err="1">
                 <a:solidFill>
                   <a:srgbClr val="1F3864"/>
                 </a:solidFill>
-                <a:latin typeface="微软雅黑"/>
-                <a:ea typeface="微软雅黑"/>
+                <a:latin typeface="宋体"/>
+                <a:ea typeface="宋体"/>
+                <a:cs typeface="宋体"/>
               </a:rPr>
               <a:t>高训练精度不构成外推能力的证据</a:t>
             </a:r>
+            <a:endParaRPr sz="1350" b="1" dirty="0">
+              <a:solidFill>
+                <a:srgbClr val="1F3864"/>
+              </a:solidFill>
+              <a:latin typeface="微软雅黑"/>
+              <a:ea typeface="微软雅黑"/>
+            </a:endParaRPr>
           </a:p>
         </p:txBody>
       </p:sp>
@@ -8301,8 +8982,9 @@
                 <a:solidFill>
                   <a:srgbClr val="595959"/>
                 </a:solidFill>
-                <a:latin typeface="微软雅黑"/>
-                <a:ea typeface="微软雅黑"/>
+                <a:latin typeface="宋体"/>
+                <a:ea typeface="宋体"/>
+                <a:cs typeface="宋体"/>
               </a:rPr>
               <a:t>随机森林训练 R² 0.997、测试全负，树模型函数类不包含趋势成分</a:t>
             </a:r>
@@ -8391,8 +9073,9 @@
                 <a:solidFill>
                   <a:srgbClr val="E07B27"/>
                 </a:solidFill>
-                <a:latin typeface="微软雅黑"/>
-                <a:ea typeface="微软雅黑"/>
+                <a:latin typeface="宋体"/>
+                <a:ea typeface="宋体"/>
+                <a:cs typeface="宋体"/>
               </a:rPr>
               <a:t>③</a:t>
             </a:r>
@@ -8430,15 +9113,23 @@
               </a:spcAft>
             </a:pPr>
             <a:r>
-              <a:rPr sz="1350" b="1">
+              <a:rPr sz="1350" b="1" dirty="0" err="1">
                 <a:solidFill>
                   <a:srgbClr val="1F3864"/>
                 </a:solidFill>
-                <a:latin typeface="微软雅黑"/>
-                <a:ea typeface="微软雅黑"/>
+                <a:latin typeface="宋体"/>
+                <a:ea typeface="宋体"/>
+                <a:cs typeface="宋体"/>
               </a:rPr>
               <a:t>定义层与模型形式层不确定性不小于数据层</a:t>
             </a:r>
+            <a:endParaRPr sz="1350" b="1" dirty="0">
+              <a:solidFill>
+                <a:srgbClr val="1F3864"/>
+              </a:solidFill>
+              <a:latin typeface="微软雅黑"/>
+              <a:ea typeface="微软雅黑"/>
+            </a:endParaRPr>
           </a:p>
         </p:txBody>
       </p:sp>
@@ -8477,8 +9168,9 @@
                 <a:solidFill>
                   <a:srgbClr val="595959"/>
                 </a:solidFill>
-                <a:latin typeface="微软雅黑"/>
-                <a:ea typeface="微软雅黑"/>
+                <a:latin typeface="宋体"/>
+                <a:ea typeface="宋体"/>
+                <a:cs typeface="宋体"/>
               </a:rPr>
               <a:t>定义层 / 模型形式层 / 数据层 = 11–20 / 0–22 / 6–20 循环，同量级</a:t>
             </a:r>
@@ -8567,8 +9259,9 @@
                 <a:solidFill>
                   <a:srgbClr val="E07B27"/>
                 </a:solidFill>
-                <a:latin typeface="微软雅黑"/>
-                <a:ea typeface="微软雅黑"/>
+                <a:latin typeface="宋体"/>
+                <a:ea typeface="宋体"/>
+                <a:cs typeface="宋体"/>
               </a:rPr>
               <a:t>④</a:t>
             </a:r>
@@ -8606,15 +9299,23 @@
               </a:spcAft>
             </a:pPr>
             <a:r>
-              <a:rPr sz="1350" b="1">
+              <a:rPr sz="1350" b="1" dirty="0" err="1">
                 <a:solidFill>
                   <a:srgbClr val="1F3864"/>
                 </a:solidFill>
-                <a:latin typeface="微软雅黑"/>
-                <a:ea typeface="微软雅黑"/>
+                <a:latin typeface="宋体"/>
+                <a:ea typeface="宋体"/>
+                <a:cs typeface="宋体"/>
               </a:rPr>
               <a:t>区间宽度与预测精度相互独立</a:t>
             </a:r>
+            <a:endParaRPr sz="1350" b="1" dirty="0">
+              <a:solidFill>
+                <a:srgbClr val="1F3864"/>
+              </a:solidFill>
+              <a:latin typeface="微软雅黑"/>
+              <a:ea typeface="微软雅黑"/>
+            </a:endParaRPr>
           </a:p>
         </p:txBody>
       </p:sp>
@@ -8653,8 +9354,9 @@
                 <a:solidFill>
                   <a:srgbClr val="595959"/>
                 </a:solidFill>
-                <a:latin typeface="微软雅黑"/>
-                <a:ea typeface="微软雅黑"/>
+                <a:latin typeface="宋体"/>
+                <a:ea typeface="宋体"/>
+                <a:cs typeface="宋体"/>
               </a:rPr>
               <a:t>名义 90% 实际覆盖 63%，缺口由点预测偏差驱动；区间收敛不构成预测正确的充分条件</a:t>
             </a:r>
@@ -8743,8 +9445,9 @@
                 <a:solidFill>
                   <a:srgbClr val="E07B27"/>
                 </a:solidFill>
-                <a:latin typeface="微软雅黑"/>
-                <a:ea typeface="微软雅黑"/>
+                <a:latin typeface="宋体"/>
+                <a:ea typeface="宋体"/>
+                <a:cs typeface="宋体"/>
               </a:rPr>
               <a:t>⑤</a:t>
             </a:r>
@@ -8782,15 +9485,23 @@
               </a:spcAft>
             </a:pPr>
             <a:r>
-              <a:rPr sz="1350" b="1">
+              <a:rPr sz="1350" b="1" dirty="0" err="1">
                 <a:solidFill>
                   <a:srgbClr val="1F3864"/>
                 </a:solidFill>
-                <a:latin typeface="微软雅黑"/>
-                <a:ea typeface="微软雅黑"/>
+                <a:latin typeface="宋体"/>
+                <a:ea typeface="宋体"/>
+                <a:cs typeface="宋体"/>
               </a:rPr>
               <a:t>维护判据须将口径约定与不确定性分离报告</a:t>
             </a:r>
+            <a:endParaRPr sz="1350" b="1" dirty="0">
+              <a:solidFill>
+                <a:srgbClr val="1F3864"/>
+              </a:solidFill>
+              <a:latin typeface="微软雅黑"/>
+              <a:ea typeface="微软雅黑"/>
+            </a:endParaRPr>
           </a:p>
         </p:txBody>
       </p:sp>
@@ -8825,15 +9536,89 @@
               </a:spcAft>
             </a:pPr>
             <a:r>
-              <a:rPr sz="1100" b="0">
+              <a:rPr sz="1100" b="0" dirty="0" err="1">
                 <a:solidFill>
                   <a:srgbClr val="595959"/>
                 </a:solidFill>
-                <a:latin typeface="微软雅黑"/>
-                <a:ea typeface="微软雅黑"/>
-              </a:rPr>
-              <a:t>更换时刻 = 更严阈值穿越点 − 裕度；代价 26.3%–41.6% 寿命</a:t>
-            </a:r>
+                <a:latin typeface="宋体"/>
+                <a:ea typeface="宋体"/>
+                <a:cs typeface="宋体"/>
+              </a:rPr>
+              <a:t>更换时刻</a:t>
+            </a:r>
+            <a:r>
+              <a:rPr sz="1100" b="0" dirty="0">
+                <a:solidFill>
+                  <a:srgbClr val="595959"/>
+                </a:solidFill>
+                <a:latin typeface="宋体"/>
+                <a:ea typeface="宋体"/>
+                <a:cs typeface="宋体"/>
+              </a:rPr>
+              <a:t> = </a:t>
+            </a:r>
+            <a:r>
+              <a:rPr sz="1100" b="0" dirty="0" err="1">
+                <a:solidFill>
+                  <a:srgbClr val="595959"/>
+                </a:solidFill>
+                <a:latin typeface="宋体"/>
+                <a:ea typeface="宋体"/>
+                <a:cs typeface="宋体"/>
+              </a:rPr>
+              <a:t>更严阈值穿越点</a:t>
+            </a:r>
+            <a:r>
+              <a:rPr sz="1100" b="0" dirty="0">
+                <a:solidFill>
+                  <a:srgbClr val="595959"/>
+                </a:solidFill>
+                <a:latin typeface="宋体"/>
+                <a:ea typeface="宋体"/>
+                <a:cs typeface="宋体"/>
+              </a:rPr>
+              <a:t> − </a:t>
+            </a:r>
+            <a:r>
+              <a:rPr sz="1100" b="0" dirty="0" err="1">
+                <a:solidFill>
+                  <a:srgbClr val="595959"/>
+                </a:solidFill>
+                <a:latin typeface="宋体"/>
+                <a:ea typeface="宋体"/>
+                <a:cs typeface="宋体"/>
+              </a:rPr>
+              <a:t>裕度；代价</a:t>
+            </a:r>
+            <a:r>
+              <a:rPr sz="1100" b="0" dirty="0">
+                <a:solidFill>
+                  <a:srgbClr val="595959"/>
+                </a:solidFill>
+                <a:latin typeface="宋体"/>
+                <a:ea typeface="宋体"/>
+                <a:cs typeface="宋体"/>
+              </a:rPr>
+              <a:t> 26.3%–41.6% </a:t>
+            </a:r>
+            <a:r>
+              <a:rPr sz="1100" b="0" dirty="0" err="1">
+                <a:solidFill>
+                  <a:srgbClr val="595959"/>
+                </a:solidFill>
+                <a:latin typeface="宋体"/>
+                <a:ea typeface="宋体"/>
+                <a:cs typeface="宋体"/>
+              </a:rPr>
+              <a:t>寿命</a:t>
+            </a:r>
+            <a:endParaRPr sz="1100" b="0" dirty="0">
+              <a:solidFill>
+                <a:srgbClr val="595959"/>
+              </a:solidFill>
+              <a:latin typeface="微软雅黑"/>
+              <a:ea typeface="微软雅黑"/>
+            </a:endParaRPr>
           </a:p>
         </p:txBody>
       </p:sp>
@@ -8919,8 +9704,9 @@
                 <a:solidFill>
                   <a:srgbClr val="E07B27"/>
                 </a:solidFill>
-                <a:latin typeface="微软雅黑"/>
-                <a:ea typeface="微软雅黑"/>
+                <a:latin typeface="宋体"/>
+                <a:ea typeface="宋体"/>
+                <a:cs typeface="宋体"/>
               </a:rPr>
               <a:t>全部结果一条命令重建：</a:t>
             </a:r>
@@ -8929,8 +9715,9 @@
                 <a:solidFill>
                   <a:srgbClr val="FFFFFF"/>
                 </a:solidFill>
-                <a:latin typeface="微软雅黑"/>
-                <a:ea typeface="微软雅黑"/>
+                <a:latin typeface="宋体"/>
+                <a:ea typeface="宋体"/>
+                <a:cs typeface="宋体"/>
               </a:rPr>
               <a:t>python scripts/run_all.py --check（17 步 · 40 个产物逐字节一致 · 42 条变异测试 + 43 条病态输入全过）</a:t>
             </a:r>
@@ -9132,8 +9919,9 @@
                 <a:solidFill>
                   <a:srgbClr val="BFCDE6"/>
                 </a:solidFill>
-                <a:latin typeface="微软雅黑"/>
-                <a:ea typeface="微软雅黑"/>
+                <a:latin typeface="宋体"/>
+                <a:ea typeface="宋体"/>
+                <a:cs typeface="宋体"/>
               </a:rPr>
               <a:t>备用 A　·　备用页</a:t>
             </a:r>
@@ -9175,8 +9963,9 @@
                 <a:solidFill>
                   <a:srgbClr val="FFFFFF"/>
                 </a:solidFill>
-                <a:latin typeface="微软雅黑"/>
-                <a:ea typeface="微软雅黑"/>
+                <a:latin typeface="宋体"/>
+                <a:ea typeface="宋体"/>
+                <a:cs typeface="宋体"/>
               </a:rPr>
               <a:t>EOL 阈值敏感性全表与口径换算</a:t>
             </a:r>
@@ -9218,8 +10007,9 @@
                 <a:solidFill>
                   <a:srgbClr val="9FB3D6"/>
                 </a:solidFill>
-                <a:latin typeface="微软雅黑"/>
-                <a:ea typeface="微软雅黑"/>
+                <a:latin typeface="宋体"/>
+                <a:ea typeface="宋体"/>
+                <a:cs typeface="宋体"/>
               </a:rPr>
               <a:t>备用 </a:t>
             </a:r>
@@ -9228,8 +10018,9 @@
                 <a:solidFill>
                   <a:srgbClr val="FFFFFF"/>
                 </a:solidFill>
-                <a:latin typeface="微软雅黑"/>
-                <a:ea typeface="微软雅黑"/>
+                <a:latin typeface="宋体"/>
+                <a:ea typeface="宋体"/>
+                <a:cs typeface="宋体"/>
               </a:rPr>
               <a:t>A</a:t>
             </a:r>
@@ -9302,8 +10093,9 @@
                           <a:solidFill>
                             <a:srgbClr val="FFFFFF"/>
                           </a:solidFill>
-                          <a:latin typeface="微软雅黑"/>
-                          <a:ea typeface="微软雅黑"/>
+                          <a:latin typeface="宋体"/>
+                          <a:ea typeface="宋体"/>
+                          <a:cs typeface="宋体"/>
                         </a:rPr>
                         <a:t>阈值口径</a:t>
                       </a:r>
@@ -9325,8 +10117,9 @@
                           <a:solidFill>
                             <a:srgbClr val="FFFFFF"/>
                           </a:solidFill>
-                          <a:latin typeface="微软雅黑"/>
-                          <a:ea typeface="微软雅黑"/>
+                          <a:latin typeface="宋体"/>
+                          <a:ea typeface="宋体"/>
+                          <a:cs typeface="宋体"/>
                         </a:rPr>
                         <a:t>B0005</a:t>
                       </a:r>
@@ -9348,8 +10141,9 @@
                           <a:solidFill>
                             <a:srgbClr val="FFFFFF"/>
                           </a:solidFill>
-                          <a:latin typeface="微软雅黑"/>
-                          <a:ea typeface="微软雅黑"/>
+                          <a:latin typeface="宋体"/>
+                          <a:ea typeface="宋体"/>
+                          <a:cs typeface="宋体"/>
                         </a:rPr>
                         <a:t>B0006</a:t>
                       </a:r>
@@ -9371,8 +10165,9 @@
                           <a:solidFill>
                             <a:srgbClr val="FFFFFF"/>
                           </a:solidFill>
-                          <a:latin typeface="微软雅黑"/>
-                          <a:ea typeface="微软雅黑"/>
+                          <a:latin typeface="宋体"/>
+                          <a:ea typeface="宋体"/>
+                          <a:cs typeface="宋体"/>
                         </a:rPr>
                         <a:t>B0007</a:t>
                       </a:r>
@@ -9394,8 +10189,9 @@
                           <a:solidFill>
                             <a:srgbClr val="FFFFFF"/>
                           </a:solidFill>
-                          <a:latin typeface="微软雅黑"/>
-                          <a:ea typeface="微软雅黑"/>
+                          <a:latin typeface="宋体"/>
+                          <a:ea typeface="宋体"/>
+                          <a:cs typeface="宋体"/>
                         </a:rPr>
                         <a:t>B0018</a:t>
                       </a:r>
@@ -9424,8 +10220,9 @@
                           <a:solidFill>
                             <a:srgbClr val="262626"/>
                           </a:solidFill>
-                          <a:latin typeface="微软雅黑"/>
-                          <a:ea typeface="微软雅黑"/>
+                          <a:latin typeface="宋体"/>
+                          <a:ea typeface="宋体"/>
+                          <a:cs typeface="宋体"/>
                         </a:rPr>
                         <a:t>τ = 1.60 Ah（额定 80%）</a:t>
                       </a:r>
@@ -9447,8 +10244,9 @@
                           <a:solidFill>
                             <a:srgbClr val="262626"/>
                           </a:solidFill>
-                          <a:latin typeface="微软雅黑"/>
-                          <a:ea typeface="微软雅黑"/>
+                          <a:latin typeface="宋体"/>
+                          <a:ea typeface="宋体"/>
+                          <a:cs typeface="宋体"/>
                         </a:rPr>
                         <a:t>75</a:t>
                       </a:r>
@@ -9470,8 +10268,9 @@
                           <a:solidFill>
                             <a:srgbClr val="262626"/>
                           </a:solidFill>
-                          <a:latin typeface="微软雅黑"/>
-                          <a:ea typeface="微软雅黑"/>
+                          <a:latin typeface="宋体"/>
+                          <a:ea typeface="宋体"/>
+                          <a:cs typeface="宋体"/>
                         </a:rPr>
                         <a:t>63</a:t>
                       </a:r>
@@ -9493,8 +10292,9 @@
                           <a:solidFill>
                             <a:srgbClr val="262626"/>
                           </a:solidFill>
-                          <a:latin typeface="微软雅黑"/>
-                          <a:ea typeface="微软雅黑"/>
+                          <a:latin typeface="宋体"/>
+                          <a:ea typeface="宋体"/>
+                          <a:cs typeface="宋体"/>
                         </a:rPr>
                         <a:t>86</a:t>
                       </a:r>
@@ -9516,8 +10316,9 @@
                           <a:solidFill>
                             <a:srgbClr val="262626"/>
                           </a:solidFill>
-                          <a:latin typeface="微软雅黑"/>
-                          <a:ea typeface="微软雅黑"/>
+                          <a:latin typeface="宋体"/>
+                          <a:ea typeface="宋体"/>
+                          <a:cs typeface="宋体"/>
                         </a:rPr>
                         <a:t>45</a:t>
                       </a:r>
@@ -9546,8 +10347,9 @@
                           <a:solidFill>
                             <a:srgbClr val="262626"/>
                           </a:solidFill>
-                          <a:latin typeface="微软雅黑"/>
-                          <a:ea typeface="微软雅黑"/>
+                          <a:latin typeface="宋体"/>
+                          <a:ea typeface="宋体"/>
+                          <a:cs typeface="宋体"/>
                         </a:rPr>
                         <a:t>τ = 1.40 Ah（额定 70%，主线）</a:t>
                       </a:r>
@@ -9569,8 +10371,9 @@
                           <a:solidFill>
                             <a:srgbClr val="262626"/>
                           </a:solidFill>
-                          <a:latin typeface="微软雅黑"/>
-                          <a:ea typeface="微软雅黑"/>
+                          <a:latin typeface="宋体"/>
+                          <a:ea typeface="宋体"/>
+                          <a:cs typeface="宋体"/>
                         </a:rPr>
                         <a:t>125</a:t>
                       </a:r>
@@ -9592,8 +10395,9 @@
                           <a:solidFill>
                             <a:srgbClr val="262626"/>
                           </a:solidFill>
-                          <a:latin typeface="微软雅黑"/>
-                          <a:ea typeface="微软雅黑"/>
+                          <a:latin typeface="宋体"/>
+                          <a:ea typeface="宋体"/>
+                          <a:cs typeface="宋体"/>
                         </a:rPr>
                         <a:t>109</a:t>
                       </a:r>
@@ -9615,8 +10419,9 @@
                           <a:solidFill>
                             <a:srgbClr val="262626"/>
                           </a:solidFill>
-                          <a:latin typeface="微软雅黑"/>
-                          <a:ea typeface="微软雅黑"/>
+                          <a:latin typeface="宋体"/>
+                          <a:ea typeface="宋体"/>
+                          <a:cs typeface="宋体"/>
                         </a:rPr>
                         <a:t>删失(&gt;168)</a:t>
                       </a:r>
@@ -9638,8 +10443,9 @@
                           <a:solidFill>
                             <a:srgbClr val="262626"/>
                           </a:solidFill>
-                          <a:latin typeface="微软雅黑"/>
-                          <a:ea typeface="微软雅黑"/>
+                          <a:latin typeface="宋体"/>
+                          <a:ea typeface="宋体"/>
+                          <a:cs typeface="宋体"/>
                         </a:rPr>
                         <a:t>97</a:t>
                       </a:r>
@@ -9668,8 +10474,9 @@
                           <a:solidFill>
                             <a:srgbClr val="262626"/>
                           </a:solidFill>
-                          <a:latin typeface="微软雅黑"/>
-                          <a:ea typeface="微软雅黑"/>
+                          <a:latin typeface="宋体"/>
+                          <a:ea typeface="宋体"/>
+                          <a:cs typeface="宋体"/>
                         </a:rPr>
                         <a:t>τ = 1.30 Ah（额定 65%）</a:t>
                       </a:r>
@@ -9691,8 +10498,9 @@
                           <a:solidFill>
                             <a:srgbClr val="262626"/>
                           </a:solidFill>
-                          <a:latin typeface="微软雅黑"/>
-                          <a:ea typeface="微软雅黑"/>
+                          <a:latin typeface="宋体"/>
+                          <a:ea typeface="宋体"/>
+                          <a:cs typeface="宋体"/>
                         </a:rPr>
                         <a:t>162</a:t>
                       </a:r>
@@ -9714,8 +10522,9 @@
                           <a:solidFill>
                             <a:srgbClr val="262626"/>
                           </a:solidFill>
-                          <a:latin typeface="微软雅黑"/>
-                          <a:ea typeface="微软雅黑"/>
+                          <a:latin typeface="宋体"/>
+                          <a:ea typeface="宋体"/>
+                          <a:cs typeface="宋体"/>
                         </a:rPr>
                         <a:t>140</a:t>
                       </a:r>
@@ -9737,8 +10546,9 @@
                           <a:solidFill>
                             <a:srgbClr val="262626"/>
                           </a:solidFill>
-                          <a:latin typeface="微软雅黑"/>
-                          <a:ea typeface="微软雅黑"/>
+                          <a:latin typeface="宋体"/>
+                          <a:ea typeface="宋体"/>
+                          <a:cs typeface="宋体"/>
                         </a:rPr>
                         <a:t>删失(&gt;168)</a:t>
                       </a:r>
@@ -9760,8 +10570,9 @@
                           <a:solidFill>
                             <a:srgbClr val="262626"/>
                           </a:solidFill>
-                          <a:latin typeface="微软雅黑"/>
-                          <a:ea typeface="微软雅黑"/>
+                          <a:latin typeface="宋体"/>
+                          <a:ea typeface="宋体"/>
+                          <a:cs typeface="宋体"/>
                         </a:rPr>
                         <a:t>删失(&gt;132)</a:t>
                       </a:r>
@@ -9818,8 +10629,9 @@
                 <a:solidFill>
                   <a:srgbClr val="E07B27"/>
                 </a:solidFill>
-                <a:latin typeface="微软雅黑"/>
-                <a:ea typeface="微软雅黑"/>
+                <a:latin typeface="宋体"/>
+                <a:ea typeface="宋体"/>
+                <a:cs typeface="宋体"/>
               </a:rPr>
               <a:t>▪ </a:t>
             </a:r>
@@ -9828,8 +10640,9 @@
                 <a:solidFill>
                   <a:srgbClr val="1F3864"/>
                 </a:solidFill>
-                <a:latin typeface="微软雅黑"/>
-                <a:ea typeface="微软雅黑"/>
+                <a:latin typeface="宋体"/>
+                <a:ea typeface="宋体"/>
+                <a:cs typeface="宋体"/>
               </a:rPr>
               <a:t>口径换算：</a:t>
             </a:r>
@@ -9838,8 +10651,9 @@
                 <a:solidFill>
                   <a:srgbClr val="262626"/>
                 </a:solidFill>
-                <a:latin typeface="微软雅黑"/>
-                <a:ea typeface="微软雅黑"/>
+                <a:latin typeface="宋体"/>
+                <a:ea typeface="宋体"/>
+                <a:cs typeface="宋体"/>
               </a:rPr>
               <a:t>四种 EOL 定义下同一块电池寿命最大差 2.16 倍；计入删失下界至少 2.96 倍</a:t>
             </a:r>
@@ -9858,8 +10672,9 @@
                 <a:solidFill>
                   <a:srgbClr val="E07B27"/>
                 </a:solidFill>
-                <a:latin typeface="微软雅黑"/>
-                <a:ea typeface="微软雅黑"/>
+                <a:latin typeface="宋体"/>
+                <a:ea typeface="宋体"/>
+                <a:cs typeface="宋体"/>
               </a:rPr>
               <a:t>▪ </a:t>
             </a:r>
@@ -9868,8 +10683,9 @@
                 <a:solidFill>
                   <a:srgbClr val="1F3864"/>
                 </a:solidFill>
-                <a:latin typeface="微软雅黑"/>
-                <a:ea typeface="微软雅黑"/>
+                <a:latin typeface="宋体"/>
+                <a:ea typeface="宋体"/>
+                <a:cs typeface="宋体"/>
               </a:rPr>
               <a:t>B0007 的特殊性：</a:t>
             </a:r>
@@ -9878,8 +10694,9 @@
                 <a:solidFill>
                   <a:srgbClr val="262626"/>
                 </a:solidFill>
-                <a:latin typeface="微软雅黑"/>
-                <a:ea typeface="微软雅黑"/>
+                <a:latin typeface="宋体"/>
+                <a:ea typeface="宋体"/>
+                <a:cs typeface="宋体"/>
               </a:rPr>
               <a:t>有效窗口只有 0.0495 Ah，不能与另三块同尺比较</a:t>
             </a:r>
@@ -9898,8 +10715,9 @@
                 <a:solidFill>
                   <a:srgbClr val="E07B27"/>
                 </a:solidFill>
-                <a:latin typeface="微软雅黑"/>
-                <a:ea typeface="微软雅黑"/>
+                <a:latin typeface="宋体"/>
+                <a:ea typeface="宋体"/>
+                <a:cs typeface="宋体"/>
               </a:rPr>
               <a:t>▪ </a:t>
             </a:r>
@@ -9908,8 +10726,9 @@
                 <a:solidFill>
                   <a:srgbClr val="1F3864"/>
                 </a:solidFill>
-                <a:latin typeface="微软雅黑"/>
-                <a:ea typeface="微软雅黑"/>
+                <a:latin typeface="宋体"/>
+                <a:ea typeface="宋体"/>
+                <a:cs typeface="宋体"/>
               </a:rPr>
               <a:t>容量—寿命换算：</a:t>
             </a:r>
@@ -9918,8 +10737,9 @@
                 <a:solidFill>
                   <a:srgbClr val="262626"/>
                 </a:solidFill>
-                <a:latin typeface="微软雅黑"/>
-                <a:ea typeface="微软雅黑"/>
+                <a:latin typeface="宋体"/>
+                <a:ea typeface="宋体"/>
+                <a:cs typeface="宋体"/>
               </a:rPr>
               <a:t>|b| ≈ 0.003–0.007 Ah/循环 ⇒ 容量差 0.01 Ah ≈ 寿命差 1.4–3.3 循环</a:t>
             </a:r>
@@ -9961,8 +10781,9 @@
                 <a:solidFill>
                   <a:srgbClr val="E07B27"/>
                 </a:solidFill>
-                <a:latin typeface="微软雅黑"/>
-                <a:ea typeface="微软雅黑"/>
+                <a:latin typeface="宋体"/>
+                <a:ea typeface="宋体"/>
+                <a:cs typeface="宋体"/>
               </a:rPr>
               <a:t>备答要点：</a:t>
             </a:r>
@@ -9981,8 +10802,9 @@
                 <a:solidFill>
                   <a:srgbClr val="262626"/>
                 </a:solidFill>
-                <a:latin typeface="微软雅黑"/>
-                <a:ea typeface="微软雅黑"/>
+                <a:latin typeface="宋体"/>
+                <a:ea typeface="宋体"/>
+                <a:cs typeface="宋体"/>
               </a:rPr>
               <a:t>口径选择的依据：70% 为工程惯例（额定 80%/70% 均常见）；本报告不依赖单一选择，τ 全区间扫描加四种口径对照，排序结论在 80 个 τ 上不变。</a:t>
             </a:r>
@@ -10001,8 +10823,9 @@
                 <a:solidFill>
                   <a:srgbClr val="262626"/>
                 </a:solidFill>
-                <a:latin typeface="微软雅黑"/>
-                <a:ea typeface="微软雅黑"/>
+                <a:latin typeface="宋体"/>
+                <a:ea typeface="宋体"/>
+                <a:cs typeface="宋体"/>
               </a:rPr>
               <a:t>B0007 的处理：右删失，全程单独立口径，寿命记 &gt; 168，不与已失效个体混算误差。</a:t>
             </a:r>
@@ -10204,8 +11027,9 @@
                 <a:solidFill>
                   <a:srgbClr val="BFCDE6"/>
                 </a:solidFill>
-                <a:latin typeface="微软雅黑"/>
-                <a:ea typeface="微软雅黑"/>
+                <a:latin typeface="宋体"/>
+                <a:ea typeface="宋体"/>
+                <a:cs typeface="宋体"/>
               </a:rPr>
               <a:t>备用 B　·　备用页</a:t>
             </a:r>
@@ -10247,8 +11071,9 @@
                 <a:solidFill>
                   <a:srgbClr val="FFFFFF"/>
                 </a:solidFill>
-                <a:latin typeface="微软雅黑"/>
-                <a:ea typeface="微软雅黑"/>
+                <a:latin typeface="宋体"/>
+                <a:ea typeface="宋体"/>
+                <a:cs typeface="宋体"/>
               </a:rPr>
               <a:t>任务 B 的 LOBOCV 与零基准结果</a:t>
             </a:r>
@@ -10290,8 +11115,9 @@
                 <a:solidFill>
                   <a:srgbClr val="9FB3D6"/>
                 </a:solidFill>
-                <a:latin typeface="微软雅黑"/>
-                <a:ea typeface="微软雅黑"/>
+                <a:latin typeface="宋体"/>
+                <a:ea typeface="宋体"/>
+                <a:cs typeface="宋体"/>
               </a:rPr>
               <a:t>备用 </a:t>
             </a:r>
@@ -10300,8 +11126,9 @@
                 <a:solidFill>
                   <a:srgbClr val="FFFFFF"/>
                 </a:solidFill>
-                <a:latin typeface="微软雅黑"/>
-                <a:ea typeface="微软雅黑"/>
+                <a:latin typeface="宋体"/>
+                <a:ea typeface="宋体"/>
+                <a:cs typeface="宋体"/>
               </a:rPr>
               <a:t>B</a:t>
             </a:r>
@@ -10372,8 +11199,9 @@
                 <a:solidFill>
                   <a:srgbClr val="E07B27"/>
                 </a:solidFill>
-                <a:latin typeface="微软雅黑"/>
-                <a:ea typeface="微软雅黑"/>
+                <a:latin typeface="宋体"/>
+                <a:ea typeface="宋体"/>
+                <a:cs typeface="宋体"/>
               </a:rPr>
               <a:t>▪ </a:t>
             </a:r>
@@ -10382,8 +11210,9 @@
                 <a:solidFill>
                   <a:srgbClr val="1F3864"/>
                 </a:solidFill>
-                <a:latin typeface="微软雅黑"/>
-                <a:ea typeface="微软雅黑"/>
+                <a:latin typeface="宋体"/>
+                <a:ea typeface="宋体"/>
+                <a:cs typeface="宋体"/>
               </a:rPr>
               <a:t>设置：</a:t>
             </a:r>
@@ -10392,8 +11221,9 @@
                 <a:solidFill>
                   <a:srgbClr val="262626"/>
                 </a:solidFill>
-                <a:latin typeface="微软雅黑"/>
-                <a:ea typeface="微软雅黑"/>
+                <a:latin typeface="宋体"/>
+                <a:ea typeface="宋体"/>
+                <a:cs typeface="宋体"/>
               </a:rPr>
               <a:t>前 K = 50 循环提取 10 个特征；留一电池交叉验证，有标签个体 n = 3，每折训练 2 个点</a:t>
             </a:r>
@@ -10412,8 +11242,9 @@
                 <a:solidFill>
                   <a:srgbClr val="E07B27"/>
                 </a:solidFill>
-                <a:latin typeface="微软雅黑"/>
-                <a:ea typeface="微软雅黑"/>
+                <a:latin typeface="宋体"/>
+                <a:ea typeface="宋体"/>
+                <a:cs typeface="宋体"/>
               </a:rPr>
               <a:t>▪ 结果：零基准（训练均值）MAE = 14.7 循环；最好的单特征 26.4，全部特征模型均不及零基准</a:t>
             </a:r>
@@ -10432,8 +11263,9 @@
                 <a:solidFill>
                   <a:srgbClr val="E07B27"/>
                 </a:solidFill>
-                <a:latin typeface="微软雅黑"/>
-                <a:ea typeface="微软雅黑"/>
+                <a:latin typeface="宋体"/>
+                <a:ea typeface="宋体"/>
+                <a:cs typeface="宋体"/>
               </a:rPr>
               <a:t>▪ </a:t>
             </a:r>
@@ -10442,8 +11274,9 @@
                 <a:solidFill>
                   <a:srgbClr val="1F3864"/>
                 </a:solidFill>
-                <a:latin typeface="微软雅黑"/>
-                <a:ea typeface="微软雅黑"/>
+                <a:latin typeface="宋体"/>
+                <a:ea typeface="宋体"/>
+                <a:cs typeface="宋体"/>
               </a:rPr>
               <a:t>最坏一折：</a:t>
             </a:r>
@@ -10452,8 +11285,9 @@
                 <a:solidFill>
                   <a:srgbClr val="262626"/>
                 </a:solidFill>
-                <a:latin typeface="微软雅黑"/>
-                <a:ea typeface="微软雅黑"/>
+                <a:latin typeface="宋体"/>
+                <a:ea typeface="宋体"/>
+                <a:cs typeface="宋体"/>
               </a:rPr>
               <a:t>用首循环容量预测 B0006 得 3463 循环（真值 109）：两个训练点特征只差 0.0015，斜率被放大 667 倍</a:t>
             </a:r>
@@ -10472,8 +11306,9 @@
                 <a:solidFill>
                   <a:srgbClr val="E07B27"/>
                 </a:solidFill>
-                <a:latin typeface="微软雅黑"/>
-                <a:ea typeface="微软雅黑"/>
+                <a:latin typeface="宋体"/>
+                <a:ea typeface="宋体"/>
+                <a:cs typeface="宋体"/>
               </a:rPr>
               <a:t>▪ </a:t>
             </a:r>
@@ -10482,8 +11317,9 @@
                 <a:solidFill>
                   <a:srgbClr val="1F3864"/>
                 </a:solidFill>
-                <a:latin typeface="微软雅黑"/>
-                <a:ea typeface="微软雅黑"/>
+                <a:latin typeface="宋体"/>
+                <a:ea typeface="宋体"/>
+                <a:cs typeface="宋体"/>
               </a:rPr>
               <a:t>防泄漏证据：</a:t>
             </a:r>
@@ -10492,8 +11328,9 @@
                 <a:solidFill>
                   <a:srgbClr val="262626"/>
                 </a:solidFill>
-                <a:latin typeface="微软雅黑"/>
-                <a:ea typeface="微软雅黑"/>
+                <a:latin typeface="宋体"/>
+                <a:ea typeface="宋体"/>
+                <a:cs typeface="宋体"/>
               </a:rPr>
               <a:t>扰动臂 + 删行臂两条正实验逐格判等，三条负控制（未来值 / 未来行数 / 未来标签）全部被检出</a:t>
             </a:r>
@@ -10512,8 +11349,9 @@
                 <a:solidFill>
                   <a:srgbClr val="E07B27"/>
                 </a:solidFill>
-                <a:latin typeface="微软雅黑"/>
-                <a:ea typeface="微软雅黑"/>
+                <a:latin typeface="宋体"/>
+                <a:ea typeface="宋体"/>
+                <a:cs typeface="宋体"/>
               </a:rPr>
               <a:t>▪ </a:t>
             </a:r>
@@ -10522,8 +11360,9 @@
                 <a:solidFill>
                   <a:srgbClr val="1F3864"/>
                 </a:solidFill>
-                <a:latin typeface="微软雅黑"/>
-                <a:ea typeface="微软雅黑"/>
+                <a:latin typeface="宋体"/>
+                <a:ea typeface="宋体"/>
+                <a:cs typeface="宋体"/>
               </a:rPr>
               <a:t>正确读法：</a:t>
             </a:r>
@@ -10532,8 +11371,9 @@
                 <a:solidFill>
                   <a:srgbClr val="262626"/>
                 </a:solidFill>
-                <a:latin typeface="微软雅黑"/>
-                <a:ea typeface="微软雅黑"/>
+                <a:latin typeface="宋体"/>
+                <a:ea typeface="宋体"/>
+                <a:cs typeface="宋体"/>
               </a:rPr>
               <a:t>并非机器学习方法无效，而是 3 个有标签个体不足以支撑跨个体学习</a:t>
             </a:r>
@@ -10735,8 +11575,9 @@
                 <a:solidFill>
                   <a:srgbClr val="BFCDE6"/>
                 </a:solidFill>
-                <a:latin typeface="微软雅黑"/>
-                <a:ea typeface="微软雅黑"/>
+                <a:latin typeface="宋体"/>
+                <a:ea typeface="宋体"/>
+                <a:cs typeface="宋体"/>
               </a:rPr>
               <a:t>备用 C　·　备用页</a:t>
             </a:r>
@@ -10778,8 +11619,9 @@
                 <a:solidFill>
                   <a:srgbClr val="FFFFFF"/>
                 </a:solidFill>
-                <a:latin typeface="微软雅黑"/>
-                <a:ea typeface="微软雅黑"/>
+                <a:latin typeface="宋体"/>
+                <a:ea typeface="宋体"/>
+                <a:cs typeface="宋体"/>
               </a:rPr>
               <a:t>区间校准逐块明细与有效样本量</a:t>
             </a:r>
@@ -10821,8 +11663,9 @@
                 <a:solidFill>
                   <a:srgbClr val="9FB3D6"/>
                 </a:solidFill>
-                <a:latin typeface="微软雅黑"/>
-                <a:ea typeface="微软雅黑"/>
+                <a:latin typeface="宋体"/>
+                <a:ea typeface="宋体"/>
+                <a:cs typeface="宋体"/>
               </a:rPr>
               <a:t>备用 </a:t>
             </a:r>
@@ -10831,8 +11674,9 @@
                 <a:solidFill>
                   <a:srgbClr val="FFFFFF"/>
                 </a:solidFill>
-                <a:latin typeface="微软雅黑"/>
-                <a:ea typeface="微软雅黑"/>
+                <a:latin typeface="宋体"/>
+                <a:ea typeface="宋体"/>
+                <a:cs typeface="宋体"/>
               </a:rPr>
               <a:t>C</a:t>
             </a:r>
@@ -10905,8 +11749,9 @@
                           <a:solidFill>
                             <a:srgbClr val="FFFFFF"/>
                           </a:solidFill>
-                          <a:latin typeface="微软雅黑"/>
-                          <a:ea typeface="微软雅黑"/>
+                          <a:latin typeface="宋体"/>
+                          <a:ea typeface="宋体"/>
+                          <a:cs typeface="宋体"/>
                         </a:rPr>
                         <a:t>90% 档逐块</a:t>
                       </a:r>
@@ -10928,8 +11773,9 @@
                           <a:solidFill>
                             <a:srgbClr val="FFFFFF"/>
                           </a:solidFill>
-                          <a:latin typeface="微软雅黑"/>
-                          <a:ea typeface="微软雅黑"/>
+                          <a:latin typeface="宋体"/>
+                          <a:ea typeface="宋体"/>
+                          <a:cs typeface="宋体"/>
                         </a:rPr>
                         <a:t>B0005</a:t>
                       </a:r>
@@ -10951,8 +11797,9 @@
                           <a:solidFill>
                             <a:srgbClr val="FFFFFF"/>
                           </a:solidFill>
-                          <a:latin typeface="微软雅黑"/>
-                          <a:ea typeface="微软雅黑"/>
+                          <a:latin typeface="宋体"/>
+                          <a:ea typeface="宋体"/>
+                          <a:cs typeface="宋体"/>
                         </a:rPr>
                         <a:t>B0006</a:t>
                       </a:r>
@@ -10974,8 +11821,9 @@
                           <a:solidFill>
                             <a:srgbClr val="FFFFFF"/>
                           </a:solidFill>
-                          <a:latin typeface="微软雅黑"/>
-                          <a:ea typeface="微软雅黑"/>
+                          <a:latin typeface="宋体"/>
+                          <a:ea typeface="宋体"/>
+                          <a:cs typeface="宋体"/>
                         </a:rPr>
                         <a:t>B0007</a:t>
                       </a:r>
@@ -10997,8 +11845,9 @@
                           <a:solidFill>
                             <a:srgbClr val="FFFFFF"/>
                           </a:solidFill>
-                          <a:latin typeface="微软雅黑"/>
-                          <a:ea typeface="微软雅黑"/>
+                          <a:latin typeface="宋体"/>
+                          <a:ea typeface="宋体"/>
+                          <a:cs typeface="宋体"/>
                         </a:rPr>
                         <a:t>B0018</a:t>
                       </a:r>
@@ -11027,8 +11876,9 @@
                           <a:solidFill>
                             <a:srgbClr val="262626"/>
                           </a:solidFill>
-                          <a:latin typeface="微软雅黑"/>
-                          <a:ea typeface="微软雅黑"/>
+                          <a:latin typeface="宋体"/>
+                          <a:ea typeface="宋体"/>
+                          <a:cs typeface="宋体"/>
                         </a:rPr>
                         <a:t>PICP（实际覆盖率）</a:t>
                       </a:r>
@@ -11050,8 +11900,9 @@
                           <a:solidFill>
                             <a:srgbClr val="262626"/>
                           </a:solidFill>
-                          <a:latin typeface="微软雅黑"/>
-                          <a:ea typeface="微软雅黑"/>
+                          <a:latin typeface="宋体"/>
+                          <a:ea typeface="宋体"/>
+                          <a:cs typeface="宋体"/>
                         </a:rPr>
                         <a:t>84.1%</a:t>
                       </a:r>
@@ -11073,8 +11924,9 @@
                           <a:solidFill>
                             <a:srgbClr val="262626"/>
                           </a:solidFill>
-                          <a:latin typeface="微软雅黑"/>
-                          <a:ea typeface="微软雅黑"/>
+                          <a:latin typeface="宋体"/>
+                          <a:ea typeface="宋体"/>
+                          <a:cs typeface="宋体"/>
                         </a:rPr>
                         <a:t>10.2%</a:t>
                       </a:r>
@@ -11096,8 +11948,9 @@
                           <a:solidFill>
                             <a:srgbClr val="262626"/>
                           </a:solidFill>
-                          <a:latin typeface="微软雅黑"/>
-                          <a:ea typeface="微软雅黑"/>
+                          <a:latin typeface="宋体"/>
+                          <a:ea typeface="宋体"/>
+                          <a:cs typeface="宋体"/>
                         </a:rPr>
                         <a:t>98.9%</a:t>
                       </a:r>
@@ -11119,8 +11972,9 @@
                           <a:solidFill>
                             <a:srgbClr val="262626"/>
                           </a:solidFill>
-                          <a:latin typeface="微软雅黑"/>
-                          <a:ea typeface="微软雅黑"/>
+                          <a:latin typeface="宋体"/>
+                          <a:ea typeface="宋体"/>
+                          <a:cs typeface="宋体"/>
                         </a:rPr>
                         <a:t>53.8%</a:t>
                       </a:r>
@@ -11149,8 +12003,9 @@
                           <a:solidFill>
                             <a:srgbClr val="262626"/>
                           </a:solidFill>
-                          <a:latin typeface="微软雅黑"/>
-                          <a:ea typeface="微软雅黑"/>
+                          <a:latin typeface="宋体"/>
+                          <a:ea typeface="宋体"/>
+                          <a:cs typeface="宋体"/>
                         </a:rPr>
                         <a:t>MPIW（Ah）</a:t>
                       </a:r>
@@ -11172,8 +12027,9 @@
                           <a:solidFill>
                             <a:srgbClr val="262626"/>
                           </a:solidFill>
-                          <a:latin typeface="微软雅黑"/>
-                          <a:ea typeface="微软雅黑"/>
+                          <a:latin typeface="宋体"/>
+                          <a:ea typeface="宋体"/>
+                          <a:cs typeface="宋体"/>
                         </a:rPr>
                         <a:t>0.1446</a:t>
                       </a:r>
@@ -11195,8 +12051,9 @@
                           <a:solidFill>
                             <a:srgbClr val="262626"/>
                           </a:solidFill>
-                          <a:latin typeface="微软雅黑"/>
-                          <a:ea typeface="微软雅黑"/>
+                          <a:latin typeface="宋体"/>
+                          <a:ea typeface="宋体"/>
+                          <a:cs typeface="宋体"/>
                         </a:rPr>
                         <a:t>0.1482</a:t>
                       </a:r>
@@ -11218,8 +12075,9 @@
                           <a:solidFill>
                             <a:srgbClr val="262626"/>
                           </a:solidFill>
-                          <a:latin typeface="微软雅黑"/>
-                          <a:ea typeface="微软雅黑"/>
+                          <a:latin typeface="宋体"/>
+                          <a:ea typeface="宋体"/>
+                          <a:cs typeface="宋体"/>
                         </a:rPr>
                         <a:t>0.1369</a:t>
                       </a:r>
@@ -11241,8 +12099,9 @@
                           <a:solidFill>
                             <a:srgbClr val="262626"/>
                           </a:solidFill>
-                          <a:latin typeface="微软雅黑"/>
-                          <a:ea typeface="微软雅黑"/>
+                          <a:latin typeface="宋体"/>
+                          <a:ea typeface="宋体"/>
+                          <a:cs typeface="宋体"/>
                         </a:rPr>
                         <a:t>0.1286</a:t>
                       </a:r>
@@ -11271,8 +12130,9 @@
                           <a:solidFill>
                             <a:srgbClr val="262626"/>
                           </a:solidFill>
-                          <a:latin typeface="微软雅黑"/>
-                          <a:ea typeface="微软雅黑"/>
+                          <a:latin typeface="宋体"/>
+                          <a:ea typeface="宋体"/>
+                          <a:cs typeface="宋体"/>
                         </a:rPr>
                         <a:t>中位偏差（Ah）</a:t>
                       </a:r>
@@ -11294,8 +12154,9 @@
                           <a:solidFill>
                             <a:srgbClr val="262626"/>
                           </a:solidFill>
-                          <a:latin typeface="微软雅黑"/>
-                          <a:ea typeface="微软雅黑"/>
+                          <a:latin typeface="宋体"/>
+                          <a:ea typeface="宋体"/>
+                          <a:cs typeface="宋体"/>
                         </a:rPr>
                         <a:t>0.0564</a:t>
                       </a:r>
@@ -11317,8 +12178,9 @@
                           <a:solidFill>
                             <a:srgbClr val="262626"/>
                           </a:solidFill>
-                          <a:latin typeface="微软雅黑"/>
-                          <a:ea typeface="微软雅黑"/>
+                          <a:latin typeface="宋体"/>
+                          <a:ea typeface="宋体"/>
+                          <a:cs typeface="宋体"/>
                         </a:rPr>
                         <a:t>0.1732</a:t>
                       </a:r>
@@ -11340,8 +12202,9 @@
                           <a:solidFill>
                             <a:srgbClr val="262626"/>
                           </a:solidFill>
-                          <a:latin typeface="微软雅黑"/>
-                          <a:ea typeface="微软雅黑"/>
+                          <a:latin typeface="宋体"/>
+                          <a:ea typeface="宋体"/>
+                          <a:cs typeface="宋体"/>
                         </a:rPr>
                         <a:t>0.0077</a:t>
                       </a:r>
@@ -11363,8 +12226,9 @@
                           <a:solidFill>
                             <a:srgbClr val="262626"/>
                           </a:solidFill>
-                          <a:latin typeface="微软雅黑"/>
-                          <a:ea typeface="微软雅黑"/>
+                          <a:latin typeface="宋体"/>
+                          <a:ea typeface="宋体"/>
+                          <a:cs typeface="宋体"/>
                         </a:rPr>
                         <a:t>0.0574</a:t>
                       </a:r>
@@ -11393,8 +12257,9 @@
                           <a:solidFill>
                             <a:srgbClr val="262626"/>
                           </a:solidFill>
-                          <a:latin typeface="微软雅黑"/>
-                          <a:ea typeface="微软雅黑"/>
+                          <a:latin typeface="宋体"/>
+                          <a:ea typeface="宋体"/>
+                          <a:cs typeface="宋体"/>
                         </a:rPr>
                         <a:t>有效样本量（AR1 近似）</a:t>
                       </a:r>
@@ -11416,8 +12281,9 @@
                           <a:solidFill>
                             <a:srgbClr val="262626"/>
                           </a:solidFill>
-                          <a:latin typeface="微软雅黑"/>
-                          <a:ea typeface="微软雅黑"/>
+                          <a:latin typeface="宋体"/>
+                          <a:ea typeface="宋体"/>
+                          <a:cs typeface="宋体"/>
                         </a:rPr>
                         <a:t>12.9</a:t>
                       </a:r>
@@ -11439,8 +12305,9 @@
                           <a:solidFill>
                             <a:srgbClr val="262626"/>
                           </a:solidFill>
-                          <a:latin typeface="微软雅黑"/>
-                          <a:ea typeface="微软雅黑"/>
+                          <a:latin typeface="宋体"/>
+                          <a:ea typeface="宋体"/>
+                          <a:cs typeface="宋体"/>
                         </a:rPr>
                         <a:t>2.9</a:t>
                       </a:r>
@@ -11462,8 +12329,9 @@
                           <a:solidFill>
                             <a:srgbClr val="262626"/>
                           </a:solidFill>
-                          <a:latin typeface="微软雅黑"/>
-                          <a:ea typeface="微软雅黑"/>
+                          <a:latin typeface="宋体"/>
+                          <a:ea typeface="宋体"/>
+                          <a:cs typeface="宋体"/>
                         </a:rPr>
                         <a:t>90.1</a:t>
                       </a:r>
@@ -11485,8 +12353,9 @@
                           <a:solidFill>
                             <a:srgbClr val="262626"/>
                           </a:solidFill>
-                          <a:latin typeface="微软雅黑"/>
-                          <a:ea typeface="微软雅黑"/>
+                          <a:latin typeface="宋体"/>
+                          <a:ea typeface="宋体"/>
+                          <a:cs typeface="宋体"/>
                         </a:rPr>
                         <a:t>3.2</a:t>
                       </a:r>
@@ -11543,8 +12412,9 @@
                 <a:solidFill>
                   <a:srgbClr val="E07B27"/>
                 </a:solidFill>
-                <a:latin typeface="微软雅黑"/>
-                <a:ea typeface="微软雅黑"/>
+                <a:latin typeface="宋体"/>
+                <a:ea typeface="宋体"/>
+                <a:cs typeface="宋体"/>
               </a:rPr>
               <a:t>▪ </a:t>
             </a:r>
@@ -11553,8 +12423,9 @@
                 <a:solidFill>
                   <a:srgbClr val="1F3864"/>
                 </a:solidFill>
-                <a:latin typeface="微软雅黑"/>
-                <a:ea typeface="微软雅黑"/>
+                <a:latin typeface="宋体"/>
+                <a:ea typeface="宋体"/>
+                <a:cs typeface="宋体"/>
               </a:rPr>
               <a:t>316 个点 ≠ 316 个独立样本：</a:t>
             </a:r>
@@ -11563,8 +12434,9 @@
                 <a:solidFill>
                   <a:srgbClr val="262626"/>
                 </a:solidFill>
-                <a:latin typeface="微软雅黑"/>
-                <a:ea typeface="微软雅黑"/>
+                <a:latin typeface="宋体"/>
+                <a:ea typeface="宋体"/>
+                <a:cs typeface="宋体"/>
               </a:rPr>
               <a:t>4 条序列 lag-1 自相关最高 0.937，合并有效样本约 109</a:t>
             </a:r>
@@ -11583,8 +12455,9 @@
                 <a:solidFill>
                   <a:srgbClr val="E07B27"/>
                 </a:solidFill>
-                <a:latin typeface="微软雅黑"/>
-                <a:ea typeface="微软雅黑"/>
+                <a:latin typeface="宋体"/>
+                <a:ea typeface="宋体"/>
+                <a:cs typeface="宋体"/>
               </a:rPr>
               <a:t>▪ 剔除任一块：合并 PICP@90 在 48.7%–82.9% 之间摆动，块间差异不应解释为个体固有差异</a:t>
             </a:r>
@@ -11603,8 +12476,9 @@
                 <a:solidFill>
                   <a:srgbClr val="E07B27"/>
                 </a:solidFill>
-                <a:latin typeface="微软雅黑"/>
-                <a:ea typeface="微软雅黑"/>
+                <a:latin typeface="宋体"/>
+                <a:ea typeface="宋体"/>
+                <a:cs typeface="宋体"/>
               </a:rPr>
               <a:t>▪ </a:t>
             </a:r>
@@ -11613,8 +12487,9 @@
                 <a:solidFill>
                   <a:srgbClr val="1F3864"/>
                 </a:solidFill>
-                <a:latin typeface="微软雅黑"/>
-                <a:ea typeface="微软雅黑"/>
+                <a:latin typeface="宋体"/>
+                <a:ea typeface="宋体"/>
+                <a:cs typeface="宋体"/>
               </a:rPr>
               <a:t>M 依赖性：</a:t>
             </a:r>
@@ -11623,8 +12498,9 @@
                 <a:solidFill>
                   <a:srgbClr val="262626"/>
                 </a:solidFill>
-                <a:latin typeface="微软雅黑"/>
-                <a:ea typeface="微软雅黑"/>
+                <a:latin typeface="宋体"/>
+                <a:ea typeface="宋体"/>
+                <a:cs typeface="宋体"/>
               </a:rPr>
               <a:t>M = 60 / 80 / 100 下合并 PICP@90 = 34% / 63% / 67%</a:t>
             </a:r>
@@ -11666,8 +12542,9 @@
                 <a:solidFill>
                   <a:srgbClr val="E07B27"/>
                 </a:solidFill>
-                <a:latin typeface="微软雅黑"/>
-                <a:ea typeface="微软雅黑"/>
+                <a:latin typeface="宋体"/>
+                <a:ea typeface="宋体"/>
+                <a:cs typeface="宋体"/>
               </a:rPr>
               <a:t>备答要点：</a:t>
             </a:r>
@@ -11686,8 +12563,9 @@
                 <a:solidFill>
                   <a:srgbClr val="262626"/>
                 </a:solidFill>
-                <a:latin typeface="微软雅黑"/>
-                <a:ea typeface="微软雅黑"/>
+                <a:latin typeface="宋体"/>
+                <a:ea typeface="宋体"/>
+                <a:cs typeface="宋体"/>
               </a:rPr>
               <a:t>区间不主动放宽的理由：放宽区间可改善覆盖率读数，但会掩盖不确定性；本报告选择如实暴露缺口并归因于点预测偏差。</a:t>
             </a:r>
@@ -11706,8 +12584,9 @@
                 <a:solidFill>
                   <a:srgbClr val="262626"/>
                 </a:solidFill>
-                <a:latin typeface="微软雅黑"/>
-                <a:ea typeface="微软雅黑"/>
+                <a:latin typeface="宋体"/>
+                <a:ea typeface="宋体"/>
+                <a:cs typeface="宋体"/>
               </a:rPr>
               <a:t>2.8 倍放宽因子的性质：测试集上的事后诊断量而非校准方案，以测试真值调节区间，不可部署。</a:t>
             </a:r>
@@ -11909,8 +12788,9 @@
                 <a:solidFill>
                   <a:srgbClr val="BFCDE6"/>
                 </a:solidFill>
-                <a:latin typeface="微软雅黑"/>
-                <a:ea typeface="微软雅黑"/>
+                <a:latin typeface="宋体"/>
+                <a:ea typeface="宋体"/>
+                <a:cs typeface="宋体"/>
               </a:rPr>
               <a:t>备用 D　·　备用页</a:t>
             </a:r>
@@ -11952,8 +12832,9 @@
                 <a:solidFill>
                   <a:srgbClr val="FFFFFF"/>
                 </a:solidFill>
-                <a:latin typeface="微软雅黑"/>
-                <a:ea typeface="微软雅黑"/>
+                <a:latin typeface="宋体"/>
+                <a:ea typeface="宋体"/>
+                <a:cs typeface="宋体"/>
               </a:rPr>
               <a:t>复现、测试与仓库</a:t>
             </a:r>
@@ -11995,8 +12876,9 @@
                 <a:solidFill>
                   <a:srgbClr val="9FB3D6"/>
                 </a:solidFill>
-                <a:latin typeface="微软雅黑"/>
-                <a:ea typeface="微软雅黑"/>
+                <a:latin typeface="宋体"/>
+                <a:ea typeface="宋体"/>
+                <a:cs typeface="宋体"/>
               </a:rPr>
               <a:t>备用 </a:t>
             </a:r>
@@ -12005,8 +12887,9 @@
                 <a:solidFill>
                   <a:srgbClr val="FFFFFF"/>
                 </a:solidFill>
-                <a:latin typeface="微软雅黑"/>
-                <a:ea typeface="微软雅黑"/>
+                <a:latin typeface="宋体"/>
+                <a:ea typeface="宋体"/>
+                <a:cs typeface="宋体"/>
               </a:rPr>
               <a:t>D</a:t>
             </a:r>
@@ -12095,8 +12978,9 @@
                 <a:solidFill>
                   <a:srgbClr val="FFFFFF"/>
                 </a:solidFill>
-                <a:latin typeface="微软雅黑"/>
-                <a:ea typeface="微软雅黑"/>
+                <a:latin typeface="宋体"/>
+                <a:ea typeface="宋体"/>
+                <a:cs typeface="宋体"/>
               </a:rPr>
               <a:t>$ python scripts/run_all.py --check</a:t>
             </a:r>
@@ -12115,8 +12999,9 @@
                 <a:solidFill>
                   <a:srgbClr val="D8E2F2"/>
                 </a:solidFill>
-                <a:latin typeface="微软雅黑"/>
-                <a:ea typeface="微软雅黑"/>
+                <a:latin typeface="宋体"/>
+                <a:ea typeface="宋体"/>
+                <a:cs typeface="宋体"/>
               </a:rPr>
               <a:t>17 步管线约 90 秒；与 MANIFEST.sha256 对账，40 个产物逐字节一致（干净副本中实测通过）</a:t>
             </a:r>
@@ -12135,8 +13020,9 @@
                 <a:solidFill>
                   <a:srgbClr val="FFFFFF"/>
                 </a:solidFill>
-                <a:latin typeface="微软雅黑"/>
-                <a:ea typeface="微软雅黑"/>
+                <a:latin typeface="宋体"/>
+                <a:ea typeface="宋体"/>
+                <a:cs typeface="宋体"/>
               </a:rPr>
               <a:t>$ python scripts/mutation_test.py</a:t>
             </a:r>
@@ -12155,8 +13041,9 @@
                 <a:solidFill>
                   <a:srgbClr val="D8E2F2"/>
                 </a:solidFill>
-                <a:latin typeface="微软雅黑"/>
-                <a:ea typeface="微软雅黑"/>
+                <a:latin typeface="宋体"/>
+                <a:ea typeface="宋体"/>
+                <a:cs typeface="宋体"/>
               </a:rPr>
               <a:t>42 条注入错误必须全部被抓，以验证断言的判别力</a:t>
             </a:r>
@@ -12198,8 +13085,9 @@
                 <a:solidFill>
                   <a:srgbClr val="E07B27"/>
                 </a:solidFill>
-                <a:latin typeface="微软雅黑"/>
-                <a:ea typeface="微软雅黑"/>
+                <a:latin typeface="宋体"/>
+                <a:ea typeface="宋体"/>
+                <a:cs typeface="宋体"/>
               </a:rPr>
               <a:t>▪ </a:t>
             </a:r>
@@ -12208,8 +13096,9 @@
                 <a:solidFill>
                   <a:srgbClr val="1F3864"/>
                 </a:solidFill>
-                <a:latin typeface="微软雅黑"/>
-                <a:ea typeface="微软雅黑"/>
+                <a:latin typeface="宋体"/>
+                <a:ea typeface="宋体"/>
+                <a:cs typeface="宋体"/>
               </a:rPr>
               <a:t>仓库：</a:t>
             </a:r>
@@ -12218,8 +13107,9 @@
                 <a:solidFill>
                   <a:srgbClr val="262626"/>
                 </a:solidFill>
-                <a:latin typeface="微软雅黑"/>
-                <a:ea typeface="微软雅黑"/>
+                <a:latin typeface="宋体"/>
+                <a:ea typeface="宋体"/>
+                <a:cs typeface="宋体"/>
               </a:rPr>
               <a:t>github.com/Tony-Stank-shift/battery-health-and-lifespan-prediction（Git 管理，分工与提交记录一一对应）</a:t>
             </a:r>
@@ -12238,8 +13128,9 @@
                 <a:solidFill>
                   <a:srgbClr val="E07B27"/>
                 </a:solidFill>
-                <a:latin typeface="微软雅黑"/>
-                <a:ea typeface="微软雅黑"/>
+                <a:latin typeface="宋体"/>
+                <a:ea typeface="宋体"/>
+                <a:cs typeface="宋体"/>
               </a:rPr>
               <a:t>▪ </a:t>
             </a:r>
@@ -12248,8 +13139,9 @@
                 <a:solidFill>
                   <a:srgbClr val="1F3864"/>
                 </a:solidFill>
-                <a:latin typeface="微软雅黑"/>
-                <a:ea typeface="微软雅黑"/>
+                <a:latin typeface="宋体"/>
+                <a:ea typeface="宋体"/>
+                <a:cs typeface="宋体"/>
               </a:rPr>
               <a:t>病态输入测试 43 条：</a:t>
             </a:r>
@@ -12258,8 +13150,9 @@
                 <a:solidFill>
                   <a:srgbClr val="262626"/>
                 </a:solidFill>
-                <a:latin typeface="微软雅黑"/>
-                <a:ea typeface="微软雅黑"/>
+                <a:latin typeface="宋体"/>
+                <a:ea typeface="宋体"/>
+                <a:cs typeface="宋体"/>
               </a:rPr>
               <a:t>NaN / 常数序列 / 单点 / 空表……不许静默给错答案</a:t>
             </a:r>
@@ -12278,8 +13171,9 @@
                 <a:solidFill>
                   <a:srgbClr val="E07B27"/>
                 </a:solidFill>
-                <a:latin typeface="微软雅黑"/>
-                <a:ea typeface="微软雅黑"/>
+                <a:latin typeface="宋体"/>
+                <a:ea typeface="宋体"/>
+                <a:cs typeface="宋体"/>
               </a:rPr>
               <a:t>▪ </a:t>
             </a:r>
@@ -12288,8 +13182,9 @@
                 <a:solidFill>
                   <a:srgbClr val="1F3864"/>
                 </a:solidFill>
-                <a:latin typeface="微软雅黑"/>
-                <a:ea typeface="微软雅黑"/>
+                <a:latin typeface="宋体"/>
+                <a:ea typeface="宋体"/>
+                <a:cs typeface="宋体"/>
               </a:rPr>
               <a:t>数据体检断言 11 条：</a:t>
             </a:r>
@@ -12298,8 +13193,9 @@
                 <a:solidFill>
                   <a:srgbClr val="262626"/>
                 </a:solidFill>
-                <a:latin typeface="微软雅黑"/>
-                <a:ea typeface="微软雅黑"/>
+                <a:latin typeface="宋体"/>
+                <a:ea typeface="宋体"/>
+                <a:cs typeface="宋体"/>
               </a:rPr>
               <a:t>写死关键常量，课程方更新数据会立刻报警（特性，不是 bug）</a:t>
             </a:r>
@@ -12318,8 +13214,9 @@
                 <a:solidFill>
                   <a:srgbClr val="E07B27"/>
                 </a:solidFill>
-                <a:latin typeface="微软雅黑"/>
-                <a:ea typeface="微软雅黑"/>
+                <a:latin typeface="宋体"/>
+                <a:ea typeface="宋体"/>
+                <a:cs typeface="宋体"/>
               </a:rPr>
               <a:t>▪ </a:t>
             </a:r>
@@ -12328,8 +13225,9 @@
                 <a:solidFill>
                   <a:srgbClr val="1F3864"/>
                 </a:solidFill>
-                <a:latin typeface="微软雅黑"/>
-                <a:ea typeface="微软雅黑"/>
+                <a:latin typeface="宋体"/>
+                <a:ea typeface="宋体"/>
+                <a:cs typeface="宋体"/>
               </a:rPr>
               <a:t>管线 17 步：</a:t>
             </a:r>
@@ -12338,8 +13236,9 @@
                 <a:solidFill>
                   <a:srgbClr val="262626"/>
                 </a:solidFill>
-                <a:latin typeface="微软雅黑"/>
-                <a:ea typeface="微软雅黑"/>
+                <a:latin typeface="宋体"/>
+                <a:ea typeface="宋体"/>
+                <a:cs typeface="宋体"/>
               </a:rPr>
               <a:t>数据体检 → 清洗 → 退化分析 → 再生分解 → 阈值敏感性 → 特征与泄漏证明 → 评测口径 → 四个模型 → 对比 → 三层不确定性 → 预警 → 放大 → 校准 → 策略</a:t>
             </a:r>
@@ -12541,8 +13440,9 @@
                 <a:solidFill>
                   <a:srgbClr val="BFCDE6"/>
                 </a:solidFill>
-                <a:latin typeface="微软雅黑"/>
-                <a:ea typeface="微软雅黑"/>
+                <a:latin typeface="宋体"/>
+                <a:ea typeface="宋体"/>
+                <a:cs typeface="宋体"/>
               </a:rPr>
               <a:t>01 · 问题与数据</a:t>
             </a:r>
@@ -12584,8 +13484,9 @@
                 <a:solidFill>
                   <a:srgbClr val="FFFFFF"/>
                 </a:solidFill>
-                <a:latin typeface="微软雅黑"/>
-                <a:ea typeface="微软雅黑"/>
+                <a:latin typeface="宋体"/>
+                <a:ea typeface="宋体"/>
+                <a:cs typeface="宋体"/>
               </a:rPr>
               <a:t>容量退化曲线与实测寿命分布</a:t>
             </a:r>
@@ -12627,8 +13528,9 @@
                 <a:solidFill>
                   <a:srgbClr val="FFFFFF"/>
                 </a:solidFill>
-                <a:latin typeface="微软雅黑"/>
-                <a:ea typeface="微软雅黑"/>
+                <a:latin typeface="宋体"/>
+                <a:ea typeface="宋体"/>
+                <a:cs typeface="宋体"/>
               </a:rPr>
               <a:t>02</a:t>
             </a:r>
@@ -12637,8 +13539,9 @@
                 <a:solidFill>
                   <a:srgbClr val="9FB3D6"/>
                 </a:solidFill>
-                <a:latin typeface="微软雅黑"/>
-                <a:ea typeface="微软雅黑"/>
+                <a:latin typeface="宋体"/>
+                <a:ea typeface="宋体"/>
+                <a:cs typeface="宋体"/>
               </a:rPr>
               <a:t> / 13</a:t>
             </a:r>
@@ -12654,7 +13557,7 @@
           <p:nvPr/>
         </p:nvPicPr>
         <p:blipFill>
-          <a:blip r:embed="rId3"/>
+          <a:blip r:embed="rId5"/>
           <a:stretch>
             <a:fillRect/>
           </a:stretch>
@@ -12709,8 +13612,9 @@
                 <a:solidFill>
                   <a:srgbClr val="E07B27"/>
                 </a:solidFill>
-                <a:latin typeface="微软雅黑"/>
-                <a:ea typeface="微软雅黑"/>
+                <a:latin typeface="宋体"/>
+                <a:ea typeface="宋体"/>
+                <a:cs typeface="宋体"/>
               </a:rPr>
               <a:t>▪ </a:t>
             </a:r>
@@ -12719,8 +13623,9 @@
                 <a:solidFill>
                   <a:srgbClr val="1F3864"/>
                 </a:solidFill>
-                <a:latin typeface="微软雅黑"/>
-                <a:ea typeface="微软雅黑"/>
+                <a:latin typeface="宋体"/>
+                <a:ea typeface="宋体"/>
+                <a:cs typeface="宋体"/>
               </a:rPr>
               <a:t>NASA PCoE 老化实验：</a:t>
             </a:r>
@@ -12729,8 +13634,9 @@
                 <a:solidFill>
                   <a:srgbClr val="262626"/>
                 </a:solidFill>
-                <a:latin typeface="微软雅黑"/>
-                <a:ea typeface="微软雅黑"/>
+                <a:latin typeface="宋体"/>
+                <a:ea typeface="宋体"/>
+                <a:cs typeface="宋体"/>
               </a:rPr>
               <a:t>4 块锂离子电池、逐循环放电容量、恒温 24 ℃</a:t>
             </a:r>
@@ -12749,8 +13655,9 @@
                 <a:solidFill>
                   <a:srgbClr val="E07B27"/>
                 </a:solidFill>
-                <a:latin typeface="微软雅黑"/>
-                <a:ea typeface="微软雅黑"/>
+                <a:latin typeface="宋体"/>
+                <a:ea typeface="宋体"/>
+                <a:cs typeface="宋体"/>
               </a:rPr>
               <a:t>▪ </a:t>
             </a:r>
@@ -12759,8 +13666,9 @@
                 <a:solidFill>
                   <a:srgbClr val="1F3864"/>
                 </a:solidFill>
-                <a:latin typeface="微软雅黑"/>
-                <a:ea typeface="微软雅黑"/>
+                <a:latin typeface="宋体"/>
+                <a:ea typeface="宋体"/>
+                <a:cs typeface="宋体"/>
               </a:rPr>
               <a:t>EOL 判据：</a:t>
             </a:r>
@@ -12769,8 +13677,9 @@
                 <a:solidFill>
                   <a:srgbClr val="262626"/>
                 </a:solidFill>
-                <a:latin typeface="微软雅黑"/>
-                <a:ea typeface="微软雅黑"/>
+                <a:latin typeface="宋体"/>
+                <a:ea typeface="宋体"/>
+                <a:cs typeface="宋体"/>
               </a:rPr>
               <a:t>容量首次 ≤ 1.4 Ah（额定的 70%）</a:t>
             </a:r>
@@ -12789,8 +13698,9 @@
                 <a:solidFill>
                   <a:srgbClr val="E07B27"/>
                 </a:solidFill>
-                <a:latin typeface="微软雅黑"/>
-                <a:ea typeface="微软雅黑"/>
+                <a:latin typeface="宋体"/>
+                <a:ea typeface="宋体"/>
+                <a:cs typeface="宋体"/>
               </a:rPr>
               <a:t>▪ </a:t>
             </a:r>
@@ -12799,8 +13709,9 @@
                 <a:solidFill>
                   <a:srgbClr val="1F3864"/>
                 </a:solidFill>
-                <a:latin typeface="微软雅黑"/>
-                <a:ea typeface="微软雅黑"/>
+                <a:latin typeface="宋体"/>
+                <a:ea typeface="宋体"/>
+                <a:cs typeface="宋体"/>
               </a:rPr>
               <a:t>实测寿命：</a:t>
             </a:r>
@@ -12809,8 +13720,9 @@
                 <a:solidFill>
                   <a:srgbClr val="262626"/>
                 </a:solidFill>
-                <a:latin typeface="微软雅黑"/>
-                <a:ea typeface="微软雅黑"/>
+                <a:latin typeface="宋体"/>
+                <a:ea typeface="宋体"/>
+                <a:cs typeface="宋体"/>
               </a:rPr>
               <a:t>B0005 = 125，B0006 = 109，B0018 = 97 循环</a:t>
             </a:r>
@@ -12829,8 +13741,9 @@
                 <a:solidFill>
                   <a:srgbClr val="E07B27"/>
                 </a:solidFill>
-                <a:latin typeface="微软雅黑"/>
-                <a:ea typeface="微软雅黑"/>
+                <a:latin typeface="宋体"/>
+                <a:ea typeface="宋体"/>
+                <a:cs typeface="宋体"/>
               </a:rPr>
               <a:t>▪ </a:t>
             </a:r>
@@ -12839,8 +13752,9 @@
                 <a:solidFill>
                   <a:srgbClr val="1F3864"/>
                 </a:solidFill>
-                <a:latin typeface="微软雅黑"/>
-                <a:ea typeface="微软雅黑"/>
+                <a:latin typeface="宋体"/>
+                <a:ea typeface="宋体"/>
+                <a:cs typeface="宋体"/>
               </a:rPr>
               <a:t>B0007：</a:t>
             </a:r>
@@ -12849,8 +13763,9 @@
                 <a:solidFill>
                   <a:srgbClr val="262626"/>
                 </a:solidFill>
-                <a:latin typeface="微软雅黑"/>
-                <a:ea typeface="微软雅黑"/>
+                <a:latin typeface="宋体"/>
+                <a:ea typeface="宋体"/>
+                <a:cs typeface="宋体"/>
               </a:rPr>
               <a:t>观测 168 循环未跌破阈值，右删失，寿命 &gt; 168</a:t>
             </a:r>
@@ -12869,8 +13784,9 @@
                 <a:solidFill>
                   <a:srgbClr val="E07B27"/>
                 </a:solidFill>
-                <a:latin typeface="微软雅黑"/>
-                <a:ea typeface="微软雅黑"/>
+                <a:latin typeface="宋体"/>
+                <a:ea typeface="宋体"/>
+                <a:cs typeface="宋体"/>
               </a:rPr>
               <a:t>▪ </a:t>
             </a:r>
@@ -12879,8 +13795,9 @@
                 <a:solidFill>
                   <a:srgbClr val="1F3864"/>
                 </a:solidFill>
-                <a:latin typeface="微软雅黑"/>
-                <a:ea typeface="微软雅黑"/>
+                <a:latin typeface="宋体"/>
+                <a:ea typeface="宋体"/>
+                <a:cs typeface="宋体"/>
               </a:rPr>
               <a:t>曲线不光滑：</a:t>
             </a:r>
@@ -12889,8 +13806,9 @@
                 <a:solidFill>
                   <a:srgbClr val="262626"/>
                 </a:solidFill>
-                <a:latin typeface="微软雅黑"/>
-                <a:ea typeface="微软雅黑"/>
+                <a:latin typeface="宋体"/>
+                <a:ea typeface="宋体"/>
+                <a:cs typeface="宋体"/>
               </a:rPr>
               <a:t>存在容量再生式回升，最大单步 +0.1519 Ah</a:t>
             </a:r>
@@ -12902,6 +13820,101 @@
   <p:clrMapOvr>
     <a:masterClrMapping/>
   </p:clrMapOvr>
+  <mc:AlternateContent xmlns:mc="http://schemas.openxmlformats.org/markup-compatibility/2006">
+    <mc:Choice xmlns:p14="http://schemas.microsoft.com/office/powerpoint/2010/main" Requires="p14">
+      <p:transition spd="slow" p14:dur="2000" advTm="924"/>
+    </mc:Choice>
+    <mc:Fallback>
+      <p:transition spd="slow" advTm="924"/>
+    </mc:Fallback>
+  </mc:AlternateContent>
+  <p:timing>
+    <p:tnLst>
+      <p:par>
+        <p:cTn id="1" dur="indefinite" restart="never" nodeType="tmRoot">
+          <p:childTnLst>
+            <p:seq concurrent="1" nextAc="seek">
+              <p:cTn id="2" dur="indefinite" nodeType="mainSeq">
+                <p:childTnLst>
+                  <p:par>
+                    <p:cTn id="3" fill="hold">
+                      <p:stCondLst>
+                        <p:cond delay="indefinite"/>
+                        <p:cond evt="onBegin" delay="0">
+                          <p:tn val="2"/>
+                        </p:cond>
+                      </p:stCondLst>
+                      <p:childTnLst>
+                        <p:par>
+                          <p:cTn id="4" fill="hold">
+                            <p:stCondLst>
+                              <p:cond delay="0"/>
+                            </p:stCondLst>
+                            <p:childTnLst>
+                              <p:par>
+                                <p:cTn id="5" presetID="1" presetClass="mediacall" presetSubtype="0" fill="hold" nodeType="afterEffect">
+                                  <p:stCondLst>
+                                    <p:cond delay="0"/>
+                                  </p:stCondLst>
+                                  <p:childTnLst>
+                                    <p:cmd type="call" cmd="playFrom(0.0)">
+                                      <p:cBhvr>
+                                        <p:cTn id="6" dur="1" fill="hold"/>
+                                        <p:tgtEl>
+                                          <p:spTgt spid="10"/>
+                                        </p:tgtEl>
+                                      </p:cBhvr>
+                                    </p:cmd>
+                                  </p:childTnLst>
+                                </p:cTn>
+                              </p:par>
+                            </p:childTnLst>
+                          </p:cTn>
+                        </p:par>
+                      </p:childTnLst>
+                    </p:cTn>
+                  </p:par>
+                </p:childTnLst>
+              </p:cTn>
+              <p:prevCondLst>
+                <p:cond evt="onPrev" delay="0">
+                  <p:tgtEl>
+                    <p:sldTgt/>
+                  </p:tgtEl>
+                </p:cond>
+              </p:prevCondLst>
+              <p:nextCondLst>
+                <p:cond evt="onNext" delay="0">
+                  <p:tgtEl>
+                    <p:sldTgt/>
+                  </p:tgtEl>
+                </p:cond>
+              </p:nextCondLst>
+            </p:seq>
+            <p:audio isNarration="1">
+              <p:cMediaNode vol="80000" showWhenStopped="0">
+                <p:cTn id="7" fill="hold" display="0">
+                  <p:stCondLst>
+                    <p:cond delay="indefinite"/>
+                  </p:stCondLst>
+                  <p:endCondLst>
+                    <p:cond evt="onStopAudio" delay="0">
+                      <p:tgtEl>
+                        <p:sldTgt/>
+                      </p:tgtEl>
+                    </p:cond>
+                  </p:endCondLst>
+                </p:cTn>
+                <p:tgtEl>
+                  <p:spTgt spid="10"/>
+                </p:tgtEl>
+              </p:cMediaNode>
+            </p:audio>
+          </p:childTnLst>
+        </p:cTn>
+      </p:par>
+    </p:tnLst>
+  </p:timing>
 </p:sld>
 </file>
 
@@ -13092,8 +14105,9 @@
                 <a:solidFill>
                   <a:srgbClr val="BFCDE6"/>
                 </a:solidFill>
-                <a:latin typeface="微软雅黑"/>
-                <a:ea typeface="微软雅黑"/>
+                <a:latin typeface="宋体"/>
+                <a:ea typeface="宋体"/>
+                <a:cs typeface="宋体"/>
               </a:rPr>
               <a:t>01 · 问题与数据</a:t>
             </a:r>
@@ -13135,8 +14149,9 @@
                 <a:solidFill>
                   <a:srgbClr val="FFFFFF"/>
                 </a:solidFill>
-                <a:latin typeface="微软雅黑"/>
-                <a:ea typeface="微软雅黑"/>
+                <a:latin typeface="宋体"/>
+                <a:ea typeface="宋体"/>
+                <a:cs typeface="宋体"/>
               </a:rPr>
               <a:t>六类数据陷阱的处理决策</a:t>
             </a:r>
@@ -13178,8 +14193,9 @@
                 <a:solidFill>
                   <a:srgbClr val="FFFFFF"/>
                 </a:solidFill>
-                <a:latin typeface="微软雅黑"/>
-                <a:ea typeface="微软雅黑"/>
+                <a:latin typeface="宋体"/>
+                <a:ea typeface="宋体"/>
+                <a:cs typeface="宋体"/>
               </a:rPr>
               <a:t>03</a:t>
             </a:r>
@@ -13188,8 +14204,9 @@
                 <a:solidFill>
                   <a:srgbClr val="9FB3D6"/>
                 </a:solidFill>
-                <a:latin typeface="微软雅黑"/>
-                <a:ea typeface="微软雅黑"/>
+                <a:latin typeface="宋体"/>
+                <a:ea typeface="宋体"/>
+                <a:cs typeface="宋体"/>
               </a:rPr>
               <a:t> / 13</a:t>
             </a:r>
@@ -13323,8 +14340,9 @@
                 <a:solidFill>
                   <a:srgbClr val="1F3864"/>
                 </a:solidFill>
-                <a:latin typeface="微软雅黑"/>
-                <a:ea typeface="微软雅黑"/>
+                <a:latin typeface="宋体"/>
+                <a:ea typeface="宋体"/>
+                <a:cs typeface="宋体"/>
               </a:rPr>
               <a:t>陷阱 1｜温度列零方差</a:t>
             </a:r>
@@ -13366,8 +14384,9 @@
                 <a:solidFill>
                   <a:srgbClr val="262626"/>
                 </a:solidFill>
-                <a:latin typeface="微软雅黑"/>
-                <a:ea typeface="微软雅黑"/>
+                <a:latin typeface="宋体"/>
+                <a:ea typeface="宋体"/>
+                <a:cs typeface="宋体"/>
               </a:rPr>
               <a:t>636 行全为 24.0 ℃，保留但禁止作特征，温度维度不可分析</a:t>
             </a:r>
@@ -13501,8 +14520,9 @@
                 <a:solidFill>
                   <a:srgbClr val="1F3864"/>
                 </a:solidFill>
-                <a:latin typeface="微软雅黑"/>
-                <a:ea typeface="微软雅黑"/>
+                <a:latin typeface="宋体"/>
+                <a:ea typeface="宋体"/>
+                <a:cs typeface="宋体"/>
               </a:rPr>
               <a:t>陷阱 2｜容量超额定</a:t>
             </a:r>
@@ -13540,15 +14560,56 @@
               </a:spcAft>
             </a:pPr>
             <a:r>
-              <a:rPr sz="1150" b="0">
+              <a:rPr sz="1150" b="0" dirty="0">
                 <a:solidFill>
                   <a:srgbClr val="262626"/>
                 </a:solidFill>
-                <a:latin typeface="微软雅黑"/>
-                <a:ea typeface="微软雅黑"/>
-              </a:rPr>
-              <a:t>B0006 前 7 循环 &gt; 2.0 Ah，保留原值并加标记列，截断将改变衰减斜率</a:t>
-            </a:r>
+                <a:latin typeface="宋体"/>
+                <a:ea typeface="宋体"/>
+                <a:cs typeface="宋体"/>
+              </a:rPr>
+              <a:t>B0006 前 7 </a:t>
+            </a:r>
+            <a:r>
+              <a:rPr sz="1150" b="0" dirty="0" err="1">
+                <a:solidFill>
+                  <a:srgbClr val="262626"/>
+                </a:solidFill>
+                <a:latin typeface="宋体"/>
+                <a:ea typeface="宋体"/>
+                <a:cs typeface="宋体"/>
+              </a:rPr>
+              <a:t>循环</a:t>
+            </a:r>
+            <a:r>
+              <a:rPr sz="1150" b="0" dirty="0">
+                <a:solidFill>
+                  <a:srgbClr val="262626"/>
+                </a:solidFill>
+                <a:latin typeface="宋体"/>
+                <a:ea typeface="宋体"/>
+                <a:cs typeface="宋体"/>
+              </a:rPr>
+              <a:t> &gt; 2.0 </a:t>
+            </a:r>
+            <a:r>
+              <a:rPr sz="1150" b="0" dirty="0" err="1">
+                <a:solidFill>
+                  <a:srgbClr val="262626"/>
+                </a:solidFill>
+                <a:latin typeface="宋体"/>
+                <a:ea typeface="宋体"/>
+                <a:cs typeface="宋体"/>
+              </a:rPr>
+              <a:t>Ah，保留原值并加标记列，截断将改变衰减斜率</a:t>
+            </a:r>
+            <a:endParaRPr sz="1150" b="0" dirty="0">
+              <a:solidFill>
+                <a:srgbClr val="262626"/>
+              </a:solidFill>
+              <a:latin typeface="微软雅黑"/>
+              <a:ea typeface="微软雅黑"/>
+            </a:endParaRPr>
           </a:p>
         </p:txBody>
       </p:sp>
@@ -13679,8 +14740,9 @@
                 <a:solidFill>
                   <a:srgbClr val="1F3864"/>
                 </a:solidFill>
-                <a:latin typeface="微软雅黑"/>
-                <a:ea typeface="微软雅黑"/>
+                <a:latin typeface="宋体"/>
+                <a:ea typeface="宋体"/>
+                <a:cs typeface="宋体"/>
               </a:rPr>
               <a:t>陷阱 3｜容量再生</a:t>
             </a:r>
@@ -13722,8 +14784,9 @@
                 <a:solidFill>
                   <a:srgbClr val="262626"/>
                 </a:solidFill>
-                <a:latin typeface="微软雅黑"/>
-                <a:ea typeface="微软雅黑"/>
+                <a:latin typeface="宋体"/>
+                <a:ea typeface="宋体"/>
+                <a:cs typeface="宋体"/>
               </a:rPr>
               <a:t>12 个电池与循环组合回升超过 0.05 Ah，不做平滑处理，建模阶段以趋势加残差结构显式表达</a:t>
             </a:r>
@@ -13857,8 +14920,9 @@
                 <a:solidFill>
                   <a:srgbClr val="1F3864"/>
                 </a:solidFill>
-                <a:latin typeface="微软雅黑"/>
-                <a:ea typeface="微软雅黑"/>
+                <a:latin typeface="宋体"/>
+                <a:ea typeface="宋体"/>
+                <a:cs typeface="宋体"/>
               </a:rPr>
               <a:t>陷阱 4｜右删失</a:t>
             </a:r>
@@ -13900,8 +14964,9 @@
                 <a:solidFill>
                   <a:srgbClr val="262626"/>
                 </a:solidFill>
-                <a:latin typeface="微软雅黑"/>
-                <a:ea typeface="微软雅黑"/>
+                <a:latin typeface="宋体"/>
+                <a:ea typeface="宋体"/>
+                <a:cs typeface="宋体"/>
               </a:rPr>
               <a:t>B0007 观测 168 循环未达阈值，寿命记为大于 168，即右删失；误记为 168 将系统性低估寿命</a:t>
             </a:r>
@@ -14035,8 +15100,9 @@
                 <a:solidFill>
                   <a:srgbClr val="1F3864"/>
                 </a:solidFill>
-                <a:latin typeface="微软雅黑"/>
-                <a:ea typeface="微软雅黑"/>
+                <a:latin typeface="宋体"/>
+                <a:ea typeface="宋体"/>
+                <a:cs typeface="宋体"/>
               </a:rPr>
               <a:t>陷阱 5｜统计离群点</a:t>
             </a:r>
@@ -14078,8 +15144,9 @@
                 <a:solidFill>
                   <a:srgbClr val="262626"/>
                 </a:solidFill>
-                <a:latin typeface="微软雅黑"/>
-                <a:ea typeface="微软雅黑"/>
+                <a:latin typeface="宋体"/>
+                <a:ea typeface="宋体"/>
+                <a:cs typeface="宋体"/>
               </a:rPr>
               <a:t>3σ 与 IQR </a:t>
             </a:r>
@@ -14088,8 +15155,9 @@
                 <a:solidFill>
                   <a:srgbClr val="262626"/>
                 </a:solidFill>
-                <a:latin typeface="微软雅黑"/>
-                <a:ea typeface="微软雅黑"/>
+                <a:latin typeface="宋体"/>
+                <a:ea typeface="宋体"/>
+                <a:cs typeface="宋体"/>
               </a:rPr>
               <a:t>两种口径均未标出离群点，趋势数据不存在离群点</a:t>
             </a:r>
@@ -14226,14 +15294,26 @@
               </a:spcAft>
             </a:pPr>
             <a:r>
-              <a:rPr sz="1400" b="1">
+              <a:rPr sz="1400" b="1" dirty="0" err="1">
                 <a:solidFill>
                   <a:srgbClr val="E07B27"/>
                 </a:solidFill>
-                <a:latin typeface="微软雅黑"/>
-                <a:ea typeface="微软雅黑"/>
-              </a:rPr>
-              <a:t>陷阱 6｜特征泄漏</a:t>
+                <a:latin typeface="宋体"/>
+                <a:ea typeface="宋体"/>
+                <a:cs typeface="宋体"/>
+              </a:rPr>
+              <a:t>陷阱</a:t>
+            </a:r>
+            <a:r>
+              <a:rPr sz="1400" b="1" dirty="0">
+                <a:solidFill>
+                  <a:srgbClr val="E07B27"/>
+                </a:solidFill>
+                <a:latin typeface="宋体"/>
+                <a:ea typeface="宋体"/>
+                <a:cs typeface="宋体"/>
+              </a:rPr>
+              <a:t> 6｜特征泄漏</a:t>
             </a:r>
           </a:p>
         </p:txBody>
@@ -14273,8 +15353,9 @@
                 <a:solidFill>
                   <a:srgbClr val="262626"/>
                 </a:solidFill>
-                <a:latin typeface="微软雅黑"/>
-                <a:ea typeface="微软雅黑"/>
+                <a:latin typeface="宋体"/>
+                <a:ea typeface="宋体"/>
+                <a:cs typeface="宋体"/>
               </a:rPr>
               <a:t>cap/</a:t>
             </a:r>
@@ -14283,8 +15364,9 @@
                 <a:solidFill>
                   <a:srgbClr val="262626"/>
                 </a:solidFill>
-                <a:latin typeface="微软雅黑"/>
-                <a:ea typeface="微软雅黑"/>
+                <a:latin typeface="宋体"/>
+                <a:ea typeface="宋体"/>
+                <a:cs typeface="宋体"/>
               </a:rPr>
               <a:t>额定与</a:t>
             </a:r>
@@ -14293,8 +15375,9 @@
                 <a:solidFill>
                   <a:srgbClr val="262626"/>
                 </a:solidFill>
-                <a:latin typeface="微软雅黑"/>
-                <a:ea typeface="微软雅黑"/>
+                <a:latin typeface="宋体"/>
+                <a:ea typeface="宋体"/>
+                <a:cs typeface="宋体"/>
               </a:rPr>
               <a:t> cap/</a:t>
             </a:r>
@@ -14303,8 +15386,9 @@
                 <a:solidFill>
                   <a:srgbClr val="262626"/>
                 </a:solidFill>
-                <a:latin typeface="微软雅黑"/>
-                <a:ea typeface="微软雅黑"/>
+                <a:latin typeface="宋体"/>
+                <a:ea typeface="宋体"/>
+                <a:cs typeface="宋体"/>
               </a:rPr>
               <a:t>首循环为容量列的精确仿射变换，残差</a:t>
             </a:r>
@@ -14313,8 +15397,9 @@
                 <a:solidFill>
                   <a:srgbClr val="262626"/>
                 </a:solidFill>
-                <a:latin typeface="微软雅黑"/>
-                <a:ea typeface="微软雅黑"/>
+                <a:latin typeface="宋体"/>
+                <a:ea typeface="宋体"/>
+                <a:cs typeface="宋体"/>
               </a:rPr>
               <a:t> 2.2×10⁻¹⁶，</a:t>
             </a:r>
@@ -14323,8 +15408,9 @@
                 <a:solidFill>
                   <a:srgbClr val="262626"/>
                 </a:solidFill>
-                <a:latin typeface="微软雅黑"/>
-                <a:ea typeface="微软雅黑"/>
+                <a:latin typeface="宋体"/>
+                <a:ea typeface="宋体"/>
+                <a:cs typeface="宋体"/>
               </a:rPr>
               <a:t>用作特征将构成标签泄漏</a:t>
             </a:r>
@@ -14373,8 +15459,9 @@
                 <a:solidFill>
                   <a:srgbClr val="1F3864"/>
                 </a:solidFill>
-                <a:latin typeface="微软雅黑"/>
-                <a:ea typeface="微软雅黑"/>
+                <a:latin typeface="宋体"/>
+                <a:ea typeface="宋体"/>
+                <a:cs typeface="宋体"/>
               </a:rPr>
               <a:t>清理结果：636 行记录全部保留，未删除任何一条；全部决策由 11 条数据体检断言约束，数据更新将触发断言失败而非静默通过。</a:t>
             </a:r>
@@ -14386,6 +15473,101 @@
   <p:clrMapOvr>
     <a:masterClrMapping/>
   </p:clrMapOvr>
+  <mc:AlternateContent xmlns:mc="http://schemas.openxmlformats.org/markup-compatibility/2006">
+    <mc:Choice xmlns:p14="http://schemas.microsoft.com/office/powerpoint/2010/main" Requires="p14">
+      <p:transition spd="slow" p14:dur="2000" advTm="627"/>
+    </mc:Choice>
+    <mc:Fallback>
+      <p:transition spd="slow" advTm="627"/>
+    </mc:Fallback>
+  </mc:AlternateContent>
+  <p:timing>
+    <p:tnLst>
+      <p:par>
+        <p:cTn id="1" dur="indefinite" restart="never" nodeType="tmRoot">
+          <p:childTnLst>
+            <p:seq concurrent="1" nextAc="seek">
+              <p:cTn id="2" dur="indefinite" nodeType="mainSeq">
+                <p:childTnLst>
+                  <p:par>
+                    <p:cTn id="3" fill="hold">
+                      <p:stCondLst>
+                        <p:cond delay="indefinite"/>
+                        <p:cond evt="onBegin" delay="0">
+                          <p:tn val="2"/>
+                        </p:cond>
+                      </p:stCondLst>
+                      <p:childTnLst>
+                        <p:par>
+                          <p:cTn id="4" fill="hold">
+                            <p:stCondLst>
+                              <p:cond delay="0"/>
+                            </p:stCondLst>
+                            <p:childTnLst>
+                              <p:par>
+                                <p:cTn id="5" presetID="1" presetClass="mediacall" presetSubtype="0" fill="hold" nodeType="afterEffect">
+                                  <p:stCondLst>
+                                    <p:cond delay="0"/>
+                                  </p:stCondLst>
+                                  <p:childTnLst>
+                                    <p:cmd type="call" cmd="playFrom(0.0)">
+                                      <p:cBhvr>
+                                        <p:cTn id="6" dur="1" fill="hold"/>
+                                        <p:tgtEl>
+                                          <p:spTgt spid="33"/>
+                                        </p:tgtEl>
+                                      </p:cBhvr>
+                                    </p:cmd>
+                                  </p:childTnLst>
+                                </p:cTn>
+                              </p:par>
+                            </p:childTnLst>
+                          </p:cTn>
+                        </p:par>
+                      </p:childTnLst>
+                    </p:cTn>
+                  </p:par>
+                </p:childTnLst>
+              </p:cTn>
+              <p:prevCondLst>
+                <p:cond evt="onPrev" delay="0">
+                  <p:tgtEl>
+                    <p:sldTgt/>
+                  </p:tgtEl>
+                </p:cond>
+              </p:prevCondLst>
+              <p:nextCondLst>
+                <p:cond evt="onNext" delay="0">
+                  <p:tgtEl>
+                    <p:sldTgt/>
+                  </p:tgtEl>
+                </p:cond>
+              </p:nextCondLst>
+            </p:seq>
+            <p:audio isNarration="1">
+              <p:cMediaNode vol="80000" showWhenStopped="0">
+                <p:cTn id="7" fill="hold" display="0">
+                  <p:stCondLst>
+                    <p:cond delay="indefinite"/>
+                  </p:stCondLst>
+                  <p:endCondLst>
+                    <p:cond evt="onStopAudio" delay="0">
+                      <p:tgtEl>
+                        <p:sldTgt/>
+                      </p:tgtEl>
+                    </p:cond>
+                  </p:endCondLst>
+                </p:cTn>
+                <p:tgtEl>
+                  <p:spTgt spid="33"/>
+                </p:tgtEl>
+              </p:cMediaNode>
+            </p:audio>
+          </p:childTnLst>
+        </p:cTn>
+      </p:par>
+    </p:tnLst>
+  </p:timing>
 </p:sld>
 </file>
 
@@ -14576,8 +15758,9 @@
                 <a:solidFill>
                   <a:srgbClr val="BFCDE6"/>
                 </a:solidFill>
-                <a:latin typeface="微软雅黑"/>
-                <a:ea typeface="微软雅黑"/>
+                <a:latin typeface="宋体"/>
+                <a:ea typeface="宋体"/>
+                <a:cs typeface="宋体"/>
               </a:rPr>
               <a:t>02 · 退化规律</a:t>
             </a:r>
@@ -14619,8 +15802,9 @@
                 <a:solidFill>
                   <a:srgbClr val="FFFFFF"/>
                 </a:solidFill>
-                <a:latin typeface="微软雅黑"/>
-                <a:ea typeface="微软雅黑"/>
+                <a:latin typeface="宋体"/>
+                <a:ea typeface="宋体"/>
+                <a:cs typeface="宋体"/>
               </a:rPr>
               <a:t>个体差异量化与容量再生的共模成分</a:t>
             </a:r>
@@ -14662,8 +15846,9 @@
                 <a:solidFill>
                   <a:srgbClr val="FFFFFF"/>
                 </a:solidFill>
-                <a:latin typeface="微软雅黑"/>
-                <a:ea typeface="微软雅黑"/>
+                <a:latin typeface="宋体"/>
+                <a:ea typeface="宋体"/>
+                <a:cs typeface="宋体"/>
               </a:rPr>
               <a:t>04</a:t>
             </a:r>
@@ -14672,8 +15857,9 @@
                 <a:solidFill>
                   <a:srgbClr val="9FB3D6"/>
                 </a:solidFill>
-                <a:latin typeface="微软雅黑"/>
-                <a:ea typeface="微软雅黑"/>
+                <a:latin typeface="宋体"/>
+                <a:ea typeface="宋体"/>
+                <a:cs typeface="宋体"/>
               </a:rPr>
               <a:t> / 13</a:t>
             </a:r>
@@ -14715,8 +15901,9 @@
                 <a:solidFill>
                   <a:srgbClr val="595959"/>
                 </a:solidFill>
-                <a:latin typeface="微软雅黑"/>
-                <a:ea typeface="微软雅黑"/>
+                <a:latin typeface="宋体"/>
+                <a:ea typeface="宋体"/>
+                <a:cs typeface="宋体"/>
               </a:rPr>
               <a:t>注：归一化形状仅用于展示，不得用作特征</a:t>
             </a:r>
@@ -14725,8 +15912,9 @@
                 <a:solidFill>
                   <a:srgbClr val="595959"/>
                 </a:solidFill>
-                <a:latin typeface="微软雅黑"/>
-                <a:ea typeface="微软雅黑"/>
+                <a:latin typeface="宋体"/>
+                <a:ea typeface="宋体"/>
+                <a:cs typeface="宋体"/>
               </a:rPr>
               <a:t>。</a:t>
             </a:r>
@@ -14742,7 +15930,7 @@
           <p:nvPr/>
         </p:nvPicPr>
         <p:blipFill>
-          <a:blip r:embed="rId3"/>
+          <a:blip r:embed="rId5"/>
           <a:stretch>
             <a:fillRect/>
           </a:stretch>
@@ -14797,8 +15985,9 @@
                 <a:solidFill>
                   <a:srgbClr val="1F3864"/>
                 </a:solidFill>
-                <a:latin typeface="微软雅黑"/>
-                <a:ea typeface="微软雅黑"/>
+                <a:latin typeface="宋体"/>
+                <a:ea typeface="宋体"/>
+                <a:cs typeface="宋体"/>
               </a:rPr>
               <a:t>五维量化：</a:t>
             </a:r>
@@ -14807,8 +15996,9 @@
                 <a:solidFill>
                   <a:srgbClr val="262626"/>
                 </a:solidFill>
-                <a:latin typeface="微软雅黑"/>
-                <a:ea typeface="微软雅黑"/>
+                <a:latin typeface="宋体"/>
+                <a:ea typeface="宋体"/>
+                <a:cs typeface="宋体"/>
               </a:rPr>
               <a:t>水平</a:t>
             </a:r>
@@ -14817,8 +16007,9 @@
                 <a:solidFill>
                   <a:srgbClr val="262626"/>
                 </a:solidFill>
-                <a:latin typeface="微软雅黑"/>
-                <a:ea typeface="微软雅黑"/>
+                <a:latin typeface="宋体"/>
+                <a:ea typeface="宋体"/>
+                <a:cs typeface="宋体"/>
               </a:rPr>
               <a:t> / </a:t>
             </a:r>
@@ -14827,8 +16018,9 @@
                 <a:solidFill>
                   <a:srgbClr val="262626"/>
                 </a:solidFill>
-                <a:latin typeface="微软雅黑"/>
-                <a:ea typeface="微软雅黑"/>
+                <a:latin typeface="宋体"/>
+                <a:ea typeface="宋体"/>
+                <a:cs typeface="宋体"/>
               </a:rPr>
               <a:t>速率</a:t>
             </a:r>
@@ -14837,8 +16029,9 @@
                 <a:solidFill>
                   <a:srgbClr val="262626"/>
                 </a:solidFill>
-                <a:latin typeface="微软雅黑"/>
-                <a:ea typeface="微软雅黑"/>
+                <a:latin typeface="宋体"/>
+                <a:ea typeface="宋体"/>
+                <a:cs typeface="宋体"/>
               </a:rPr>
               <a:t> / </a:t>
             </a:r>
@@ -14847,8 +16040,9 @@
                 <a:solidFill>
                   <a:srgbClr val="262626"/>
                 </a:solidFill>
-                <a:latin typeface="微软雅黑"/>
-                <a:ea typeface="微软雅黑"/>
+                <a:latin typeface="宋体"/>
+                <a:ea typeface="宋体"/>
+                <a:cs typeface="宋体"/>
               </a:rPr>
               <a:t>形状</a:t>
             </a:r>
@@ -14857,8 +16051,9 @@
                 <a:solidFill>
                   <a:srgbClr val="262626"/>
                 </a:solidFill>
-                <a:latin typeface="微软雅黑"/>
-                <a:ea typeface="微软雅黑"/>
+                <a:latin typeface="宋体"/>
+                <a:ea typeface="宋体"/>
+                <a:cs typeface="宋体"/>
               </a:rPr>
               <a:t> / </a:t>
             </a:r>
@@ -14867,8 +16062,9 @@
                 <a:solidFill>
                   <a:srgbClr val="262626"/>
                 </a:solidFill>
-                <a:latin typeface="微软雅黑"/>
-                <a:ea typeface="微软雅黑"/>
+                <a:latin typeface="宋体"/>
+                <a:ea typeface="宋体"/>
+                <a:cs typeface="宋体"/>
               </a:rPr>
               <a:t>波动</a:t>
             </a:r>
@@ -14877,8 +16073,9 @@
                 <a:solidFill>
                   <a:srgbClr val="262626"/>
                 </a:solidFill>
-                <a:latin typeface="微软雅黑"/>
-                <a:ea typeface="微软雅黑"/>
+                <a:latin typeface="宋体"/>
+                <a:ea typeface="宋体"/>
+                <a:cs typeface="宋体"/>
               </a:rPr>
               <a:t> / </a:t>
             </a:r>
@@ -14887,8 +16084,9 @@
                 <a:solidFill>
                   <a:srgbClr val="262626"/>
                 </a:solidFill>
-                <a:latin typeface="微软雅黑"/>
-                <a:ea typeface="微软雅黑"/>
+                <a:latin typeface="宋体"/>
+                <a:ea typeface="宋体"/>
+                <a:cs typeface="宋体"/>
               </a:rPr>
               <a:t>寿命，逐维给数</a:t>
             </a:r>
@@ -14914,8 +16112,9 @@
                 <a:solidFill>
                   <a:srgbClr val="1F3864"/>
                 </a:solidFill>
-                <a:latin typeface="微软雅黑"/>
-                <a:ea typeface="微软雅黑"/>
+                <a:latin typeface="宋体"/>
+                <a:ea typeface="宋体"/>
+                <a:cs typeface="宋体"/>
               </a:rPr>
               <a:t>共模分解：</a:t>
             </a:r>
@@ -14924,8 +16123,9 @@
                 <a:solidFill>
                   <a:srgbClr val="262626"/>
                 </a:solidFill>
-                <a:latin typeface="微软雅黑"/>
-                <a:ea typeface="微软雅黑"/>
+                <a:latin typeface="宋体"/>
+                <a:ea typeface="宋体"/>
+                <a:cs typeface="宋体"/>
               </a:rPr>
               <a:t>同批三块电池的残差</a:t>
             </a:r>
@@ -14934,8 +16134,9 @@
                 <a:solidFill>
                   <a:srgbClr val="262626"/>
                 </a:solidFill>
-                <a:latin typeface="微软雅黑"/>
-                <a:ea typeface="微软雅黑"/>
+                <a:latin typeface="宋体"/>
+                <a:ea typeface="宋体"/>
+                <a:cs typeface="宋体"/>
               </a:rPr>
               <a:t> 82.4% </a:t>
             </a:r>
@@ -14944,8 +16145,9 @@
                 <a:solidFill>
                   <a:srgbClr val="262626"/>
                 </a:solidFill>
-                <a:latin typeface="微软雅黑"/>
-                <a:ea typeface="微软雅黑"/>
+                <a:latin typeface="宋体"/>
+                <a:ea typeface="宋体"/>
+                <a:cs typeface="宋体"/>
               </a:rPr>
               <a:t>来自共同成分（零基准</a:t>
             </a:r>
@@ -14954,8 +16156,9 @@
                 <a:solidFill>
                   <a:srgbClr val="262626"/>
                 </a:solidFill>
-                <a:latin typeface="微软雅黑"/>
-                <a:ea typeface="微软雅黑"/>
+                <a:latin typeface="宋体"/>
+                <a:ea typeface="宋体"/>
+                <a:cs typeface="宋体"/>
               </a:rPr>
               <a:t> 33.3%），</a:t>
             </a:r>
@@ -14964,8 +16167,9 @@
                 <a:solidFill>
                   <a:srgbClr val="262626"/>
                 </a:solidFill>
-                <a:latin typeface="微软雅黑"/>
-                <a:ea typeface="微软雅黑"/>
+                <a:latin typeface="宋体"/>
+                <a:ea typeface="宋体"/>
+                <a:cs typeface="宋体"/>
               </a:rPr>
               <a:t>三块在循环</a:t>
             </a:r>
@@ -14974,8 +16178,9 @@
                 <a:solidFill>
                   <a:srgbClr val="262626"/>
                 </a:solidFill>
-                <a:latin typeface="微软雅黑"/>
-                <a:ea typeface="微软雅黑"/>
+                <a:latin typeface="宋体"/>
+                <a:ea typeface="宋体"/>
+                <a:cs typeface="宋体"/>
               </a:rPr>
               <a:t> 90 </a:t>
             </a:r>
@@ -14984,8 +16189,9 @@
                 <a:solidFill>
                   <a:srgbClr val="262626"/>
                 </a:solidFill>
-                <a:latin typeface="微软雅黑"/>
-                <a:ea typeface="微软雅黑"/>
+                <a:latin typeface="宋体"/>
+                <a:ea typeface="宋体"/>
+                <a:cs typeface="宋体"/>
               </a:rPr>
               <a:t>同时出现各自最大回升</a:t>
             </a:r>
@@ -15011,8 +16217,9 @@
                 <a:solidFill>
                   <a:srgbClr val="1F3864"/>
                 </a:solidFill>
-                <a:latin typeface="微软雅黑"/>
-                <a:ea typeface="微软雅黑"/>
+                <a:latin typeface="宋体"/>
+                <a:ea typeface="宋体"/>
+                <a:cs typeface="宋体"/>
               </a:rPr>
               <a:t>结论：</a:t>
             </a:r>
@@ -15021,8 +16228,9 @@
                 <a:solidFill>
                   <a:srgbClr val="262626"/>
                 </a:solidFill>
-                <a:latin typeface="微软雅黑"/>
-                <a:ea typeface="微软雅黑"/>
+                <a:latin typeface="宋体"/>
+                <a:ea typeface="宋体"/>
+                <a:cs typeface="宋体"/>
               </a:rPr>
               <a:t>容量再生不构成个体独立的随机现象，共模成分计入数据层不确定性，不得以平滑方式消除</a:t>
             </a:r>
@@ -15045,7 +16253,7 @@
           <p:nvPr/>
         </p:nvPicPr>
         <p:blipFill>
-          <a:blip r:embed="rId4"/>
+          <a:blip r:embed="rId6"/>
           <a:stretch>
             <a:fillRect/>
           </a:stretch>
@@ -15069,7 +16277,7 @@
           <p:nvPr/>
         </p:nvPicPr>
         <p:blipFill>
-          <a:blip r:embed="rId5"/>
+          <a:blip r:embed="rId7"/>
           <a:stretch>
             <a:fillRect/>
           </a:stretch>
@@ -15089,6 +16297,101 @@
   <p:clrMapOvr>
     <a:masterClrMapping/>
   </p:clrMapOvr>
+  <mc:AlternateContent xmlns:mc="http://schemas.openxmlformats.org/markup-compatibility/2006">
+    <mc:Choice xmlns:p14="http://schemas.microsoft.com/office/powerpoint/2010/main" Requires="p14">
+      <p:transition spd="slow" p14:dur="2000" advTm="255"/>
+    </mc:Choice>
+    <mc:Fallback>
+      <p:transition spd="slow" advTm="255"/>
+    </mc:Fallback>
+  </mc:AlternateContent>
+  <p:timing>
+    <p:tnLst>
+      <p:par>
+        <p:cTn id="1" dur="indefinite" restart="never" nodeType="tmRoot">
+          <p:childTnLst>
+            <p:seq concurrent="1" nextAc="seek">
+              <p:cTn id="2" dur="indefinite" nodeType="mainSeq">
+                <p:childTnLst>
+                  <p:par>
+                    <p:cTn id="3" fill="hold">
+                      <p:stCondLst>
+                        <p:cond delay="indefinite"/>
+                        <p:cond evt="onBegin" delay="0">
+                          <p:tn val="2"/>
+                        </p:cond>
+                      </p:stCondLst>
+                      <p:childTnLst>
+                        <p:par>
+                          <p:cTn id="4" fill="hold">
+                            <p:stCondLst>
+                              <p:cond delay="0"/>
+                            </p:stCondLst>
+                            <p:childTnLst>
+                              <p:par>
+                                <p:cTn id="5" presetID="1" presetClass="mediacall" presetSubtype="0" fill="hold" nodeType="afterEffect">
+                                  <p:stCondLst>
+                                    <p:cond delay="0"/>
+                                  </p:stCondLst>
+                                  <p:childTnLst>
+                                    <p:cmd type="call" cmd="playFrom(0.0)">
+                                      <p:cBhvr>
+                                        <p:cTn id="6" dur="1" fill="hold"/>
+                                        <p:tgtEl>
+                                          <p:spTgt spid="8"/>
+                                        </p:tgtEl>
+                                      </p:cBhvr>
+                                    </p:cmd>
+                                  </p:childTnLst>
+                                </p:cTn>
+                              </p:par>
+                            </p:childTnLst>
+                          </p:cTn>
+                        </p:par>
+                      </p:childTnLst>
+                    </p:cTn>
+                  </p:par>
+                </p:childTnLst>
+              </p:cTn>
+              <p:prevCondLst>
+                <p:cond evt="onPrev" delay="0">
+                  <p:tgtEl>
+                    <p:sldTgt/>
+                  </p:tgtEl>
+                </p:cond>
+              </p:prevCondLst>
+              <p:nextCondLst>
+                <p:cond evt="onNext" delay="0">
+                  <p:tgtEl>
+                    <p:sldTgt/>
+                  </p:tgtEl>
+                </p:cond>
+              </p:nextCondLst>
+            </p:seq>
+            <p:audio isNarration="1">
+              <p:cMediaNode vol="80000" showWhenStopped="0">
+                <p:cTn id="7" fill="hold" display="0">
+                  <p:stCondLst>
+                    <p:cond delay="indefinite"/>
+                  </p:stCondLst>
+                  <p:endCondLst>
+                    <p:cond evt="onStopAudio" delay="0">
+                      <p:tgtEl>
+                        <p:sldTgt/>
+                      </p:tgtEl>
+                    </p:cond>
+                  </p:endCondLst>
+                </p:cTn>
+                <p:tgtEl>
+                  <p:spTgt spid="8"/>
+                </p:tgtEl>
+              </p:cMediaNode>
+            </p:audio>
+          </p:childTnLst>
+        </p:cTn>
+      </p:par>
+    </p:tnLst>
+  </p:timing>
 </p:sld>
 </file>
 
@@ -15279,8 +16582,9 @@
                 <a:solidFill>
                   <a:srgbClr val="BFCDE6"/>
                 </a:solidFill>
-                <a:latin typeface="微软雅黑"/>
-                <a:ea typeface="微软雅黑"/>
+                <a:latin typeface="宋体"/>
+                <a:ea typeface="宋体"/>
+                <a:cs typeface="宋体"/>
               </a:rPr>
               <a:t>02 · 退化规律</a:t>
             </a:r>
@@ -15322,8 +16626,9 @@
                 <a:solidFill>
                   <a:srgbClr val="FFFFFF"/>
                 </a:solidFill>
-                <a:latin typeface="微软雅黑"/>
-                <a:ea typeface="微软雅黑"/>
+                <a:latin typeface="宋体"/>
+                <a:ea typeface="宋体"/>
+                <a:cs typeface="宋体"/>
               </a:rPr>
               <a:t>寿命读数对阈值的敏感性</a:t>
             </a:r>
@@ -15365,8 +16670,9 @@
                 <a:solidFill>
                   <a:srgbClr val="FFFFFF"/>
                 </a:solidFill>
-                <a:latin typeface="微软雅黑"/>
-                <a:ea typeface="微软雅黑"/>
+                <a:latin typeface="宋体"/>
+                <a:ea typeface="宋体"/>
+                <a:cs typeface="宋体"/>
               </a:rPr>
               <a:t>05</a:t>
             </a:r>
@@ -15375,8 +16681,9 @@
                 <a:solidFill>
                   <a:srgbClr val="9FB3D6"/>
                 </a:solidFill>
-                <a:latin typeface="微软雅黑"/>
-                <a:ea typeface="微软雅黑"/>
+                <a:latin typeface="宋体"/>
+                <a:ea typeface="宋体"/>
+                <a:cs typeface="宋体"/>
               </a:rPr>
               <a:t> / 13</a:t>
             </a:r>
@@ -15392,7 +16699,7 @@
           <p:nvPr/>
         </p:nvPicPr>
         <p:blipFill>
-          <a:blip r:embed="rId3"/>
+          <a:blip r:embed="rId5"/>
           <a:stretch>
             <a:fillRect/>
           </a:stretch>
@@ -15443,35 +16750,78 @@
               </a:spcAft>
             </a:pPr>
             <a:r>
-              <a:rPr sz="1150" b="1">
+              <a:rPr sz="1150" b="1" dirty="0">
                 <a:solidFill>
                   <a:srgbClr val="E07B27"/>
                 </a:solidFill>
-                <a:latin typeface="微软雅黑"/>
-                <a:ea typeface="微软雅黑"/>
+                <a:latin typeface="宋体"/>
+                <a:ea typeface="宋体"/>
+                <a:cs typeface="宋体"/>
               </a:rPr>
               <a:t>▪ </a:t>
             </a:r>
             <a:r>
-              <a:rPr sz="1300" b="1">
+              <a:rPr sz="1300" b="1" dirty="0">
                 <a:solidFill>
                   <a:srgbClr val="1F3864"/>
                 </a:solidFill>
-                <a:latin typeface="微软雅黑"/>
-                <a:ea typeface="微软雅黑"/>
-              </a:rPr>
-              <a:t>±0.05 Ah 窗口：</a:t>
-            </a:r>
-            <a:r>
-              <a:rPr sz="1200" b="0">
+                <a:latin typeface="宋体"/>
+                <a:ea typeface="宋体"/>
+                <a:cs typeface="宋体"/>
+              </a:rPr>
+              <a:t>±0.05 Ah </a:t>
+            </a:r>
+            <a:r>
+              <a:rPr sz="1300" b="1" dirty="0" err="1">
+                <a:solidFill>
+                  <a:srgbClr val="1F3864"/>
+                </a:solidFill>
+                <a:latin typeface="宋体"/>
+                <a:ea typeface="宋体"/>
+                <a:cs typeface="宋体"/>
+              </a:rPr>
+              <a:t>窗口：</a:t>
+            </a:r>
+            <a:r>
+              <a:rPr sz="1200" b="0" dirty="0" err="1">
                 <a:solidFill>
                   <a:srgbClr val="262626"/>
                 </a:solidFill>
-                <a:latin typeface="微软雅黑"/>
-                <a:ea typeface="微软雅黑"/>
-              </a:rPr>
-              <a:t>寿命读数极差 30–40 循环</a:t>
-            </a:r>
+                <a:latin typeface="宋体"/>
+                <a:ea typeface="宋体"/>
+                <a:cs typeface="宋体"/>
+              </a:rPr>
+              <a:t>寿命读数极差</a:t>
+            </a:r>
+            <a:r>
+              <a:rPr sz="1200" b="0" dirty="0">
+                <a:solidFill>
+                  <a:srgbClr val="262626"/>
+                </a:solidFill>
+                <a:latin typeface="宋体"/>
+                <a:ea typeface="宋体"/>
+                <a:cs typeface="宋体"/>
+              </a:rPr>
+              <a:t> 30–40 </a:t>
+            </a:r>
+            <a:r>
+              <a:rPr sz="1200" b="0" dirty="0" err="1">
+                <a:solidFill>
+                  <a:srgbClr val="262626"/>
+                </a:solidFill>
+                <a:latin typeface="宋体"/>
+                <a:ea typeface="宋体"/>
+                <a:cs typeface="宋体"/>
+              </a:rPr>
+              <a:t>循环</a:t>
+            </a:r>
+            <a:endParaRPr sz="1200" b="0" dirty="0">
+              <a:solidFill>
+                <a:srgbClr val="262626"/>
+              </a:solidFill>
+              <a:latin typeface="微软雅黑"/>
+              <a:ea typeface="微软雅黑"/>
+            </a:endParaRPr>
           </a:p>
           <a:p>
             <a:pPr algn="l">
@@ -15483,34 +16833,81 @@
               </a:spcAft>
             </a:pPr>
             <a:r>
-              <a:rPr sz="1150" b="1">
+              <a:rPr sz="1150" b="1" dirty="0">
                 <a:solidFill>
                   <a:srgbClr val="E07B27"/>
                 </a:solidFill>
-                <a:latin typeface="微软雅黑"/>
-                <a:ea typeface="微软雅黑"/>
+                <a:latin typeface="宋体"/>
+                <a:ea typeface="宋体"/>
+                <a:cs typeface="宋体"/>
               </a:rPr>
               <a:t>▪ </a:t>
             </a:r>
             <a:r>
-              <a:rPr sz="1300" b="1">
+              <a:rPr sz="1300" b="1" dirty="0">
                 <a:solidFill>
                   <a:srgbClr val="1F3864"/>
                 </a:solidFill>
-                <a:latin typeface="微软雅黑"/>
-                <a:ea typeface="微软雅黑"/>
-              </a:rPr>
-              <a:t>换 EOL 口径：</a:t>
-            </a:r>
-            <a:r>
-              <a:rPr sz="1200" b="0">
+                <a:latin typeface="宋体"/>
+                <a:ea typeface="宋体"/>
+                <a:cs typeface="宋体"/>
+              </a:rPr>
+              <a:t>换 EOL </a:t>
+            </a:r>
+            <a:r>
+              <a:rPr sz="1300" b="1" dirty="0" err="1">
+                <a:solidFill>
+                  <a:srgbClr val="1F3864"/>
+                </a:solidFill>
+                <a:latin typeface="宋体"/>
+                <a:ea typeface="宋体"/>
+                <a:cs typeface="宋体"/>
+              </a:rPr>
+              <a:t>口径：</a:t>
+            </a:r>
+            <a:r>
+              <a:rPr sz="1200" b="0" dirty="0" err="1">
                 <a:solidFill>
                   <a:srgbClr val="262626"/>
                 </a:solidFill>
-                <a:latin typeface="微软雅黑"/>
-                <a:ea typeface="微软雅黑"/>
-              </a:rPr>
-              <a:t>同一块电池寿命最大相差 2.16 倍；计入删失下界至少 2.96 倍</a:t>
+                <a:latin typeface="宋体"/>
+                <a:ea typeface="宋体"/>
+                <a:cs typeface="宋体"/>
+              </a:rPr>
+              <a:t>同一块电池寿命最大相差</a:t>
+            </a:r>
+            <a:r>
+              <a:rPr sz="1200" b="0" dirty="0">
+                <a:solidFill>
+                  <a:srgbClr val="262626"/>
+                </a:solidFill>
+                <a:latin typeface="宋体"/>
+                <a:ea typeface="宋体"/>
+                <a:cs typeface="宋体"/>
+              </a:rPr>
+              <a:t> 2.16 </a:t>
+            </a:r>
+            <a:r>
+              <a:rPr sz="1200" b="0" dirty="0" err="1">
+                <a:solidFill>
+                  <a:srgbClr val="262626"/>
+                </a:solidFill>
+                <a:latin typeface="宋体"/>
+                <a:ea typeface="宋体"/>
+                <a:cs typeface="宋体"/>
+              </a:rPr>
+              <a:t>倍；计入删失下界至少</a:t>
+            </a:r>
+            <a:r>
+              <a:rPr sz="1200" b="0" dirty="0">
+                <a:solidFill>
+                  <a:srgbClr val="262626"/>
+                </a:solidFill>
+                <a:latin typeface="宋体"/>
+                <a:ea typeface="宋体"/>
+                <a:cs typeface="宋体"/>
+              </a:rPr>
+              <a:t> 2.96 倍</a:t>
             </a:r>
           </a:p>
           <a:p>
@@ -15523,34 +16920,59 @@
               </a:spcAft>
             </a:pPr>
             <a:r>
-              <a:rPr sz="1150" b="1">
+              <a:rPr sz="1150" b="1" dirty="0">
                 <a:solidFill>
                   <a:srgbClr val="E07B27"/>
                 </a:solidFill>
-                <a:latin typeface="微软雅黑"/>
-                <a:ea typeface="微软雅黑"/>
+                <a:latin typeface="宋体"/>
+                <a:ea typeface="宋体"/>
+                <a:cs typeface="宋体"/>
               </a:rPr>
               <a:t>▪ </a:t>
             </a:r>
             <a:r>
-              <a:rPr sz="1300" b="1">
+              <a:rPr sz="1300" b="1" dirty="0">
                 <a:solidFill>
                   <a:srgbClr val="1F3864"/>
                 </a:solidFill>
-                <a:latin typeface="微软雅黑"/>
-                <a:ea typeface="微软雅黑"/>
+                <a:latin typeface="宋体"/>
+                <a:ea typeface="宋体"/>
+                <a:cs typeface="宋体"/>
               </a:rPr>
               <a:t>排序稳定：</a:t>
             </a:r>
             <a:r>
-              <a:rPr sz="1200" b="0">
+              <a:rPr sz="1200" b="0" dirty="0">
                 <a:solidFill>
                   <a:srgbClr val="262626"/>
                 </a:solidFill>
-                <a:latin typeface="微软雅黑"/>
-                <a:ea typeface="微软雅黑"/>
-              </a:rPr>
-              <a:t>80 个阈值上恒为 B0018 &lt; B0006 &lt; B0005 &lt; B0007</a:t>
+                <a:latin typeface="宋体"/>
+                <a:ea typeface="宋体"/>
+                <a:cs typeface="宋体"/>
+              </a:rPr>
+              <a:t>80 </a:t>
+            </a:r>
+            <a:r>
+              <a:rPr sz="1200" b="0" dirty="0" err="1">
+                <a:solidFill>
+                  <a:srgbClr val="262626"/>
+                </a:solidFill>
+                <a:latin typeface="宋体"/>
+                <a:ea typeface="宋体"/>
+                <a:cs typeface="宋体"/>
+              </a:rPr>
+              <a:t>个阈值上恒为</a:t>
+            </a:r>
+            <a:r>
+              <a:rPr sz="1200" b="0" dirty="0">
+                <a:solidFill>
+                  <a:srgbClr val="262626"/>
+                </a:solidFill>
+                <a:latin typeface="宋体"/>
+                <a:ea typeface="宋体"/>
+                <a:cs typeface="宋体"/>
+              </a:rPr>
+              <a:t> B0018 &lt; B0006 &lt; B0005 &lt; B0007</a:t>
             </a:r>
           </a:p>
           <a:p>
@@ -15563,34 +16985,81 @@
               </a:spcAft>
             </a:pPr>
             <a:r>
-              <a:rPr sz="1150" b="1">
+              <a:rPr sz="1150" b="1" dirty="0">
                 <a:solidFill>
                   <a:srgbClr val="E07B27"/>
                 </a:solidFill>
-                <a:latin typeface="微软雅黑"/>
-                <a:ea typeface="微软雅黑"/>
+                <a:latin typeface="宋体"/>
+                <a:ea typeface="宋体"/>
+                <a:cs typeface="宋体"/>
               </a:rPr>
               <a:t>▪ </a:t>
             </a:r>
             <a:r>
-              <a:rPr sz="1300" b="1">
+              <a:rPr sz="1300" b="1" dirty="0">
                 <a:solidFill>
                   <a:srgbClr val="1F3864"/>
                 </a:solidFill>
-                <a:latin typeface="微软雅黑"/>
-                <a:ea typeface="微软雅黑"/>
-              </a:rPr>
-              <a:t>B0007 删失裕度极小：</a:t>
-            </a:r>
-            <a:r>
-              <a:rPr sz="1200" b="0">
+                <a:latin typeface="宋体"/>
+                <a:ea typeface="宋体"/>
+                <a:cs typeface="宋体"/>
+              </a:rPr>
+              <a:t>B0007 </a:t>
+            </a:r>
+            <a:r>
+              <a:rPr sz="1300" b="1" dirty="0" err="1">
+                <a:solidFill>
+                  <a:srgbClr val="1F3864"/>
+                </a:solidFill>
+                <a:latin typeface="宋体"/>
+                <a:ea typeface="宋体"/>
+                <a:cs typeface="宋体"/>
+              </a:rPr>
+              <a:t>删失裕度极小：</a:t>
+            </a:r>
+            <a:r>
+              <a:rPr sz="1200" b="0" dirty="0" err="1">
                 <a:solidFill>
                   <a:srgbClr val="262626"/>
                 </a:solidFill>
-                <a:latin typeface="微软雅黑"/>
-                <a:ea typeface="微软雅黑"/>
-              </a:rPr>
-              <a:t>最低容量距阈值仅 0.0005 Ah（额定的 0.025%）</a:t>
+                <a:latin typeface="宋体"/>
+                <a:ea typeface="宋体"/>
+                <a:cs typeface="宋体"/>
+              </a:rPr>
+              <a:t>最低容量距阈值仅</a:t>
+            </a:r>
+            <a:r>
+              <a:rPr sz="1200" b="0" dirty="0">
+                <a:solidFill>
+                  <a:srgbClr val="262626"/>
+                </a:solidFill>
+                <a:latin typeface="宋体"/>
+                <a:ea typeface="宋体"/>
+                <a:cs typeface="宋体"/>
+              </a:rPr>
+              <a:t> 0.0005 </a:t>
+            </a:r>
+            <a:r>
+              <a:rPr sz="1200" b="0" dirty="0" err="1">
+                <a:solidFill>
+                  <a:srgbClr val="262626"/>
+                </a:solidFill>
+                <a:latin typeface="宋体"/>
+                <a:ea typeface="宋体"/>
+                <a:cs typeface="宋体"/>
+              </a:rPr>
+              <a:t>Ah（额定的</a:t>
+            </a:r>
+            <a:r>
+              <a:rPr sz="1200" b="0" dirty="0">
+                <a:solidFill>
+                  <a:srgbClr val="262626"/>
+                </a:solidFill>
+                <a:latin typeface="宋体"/>
+                <a:ea typeface="宋体"/>
+                <a:cs typeface="宋体"/>
+              </a:rPr>
+              <a:t> 0.025%）</a:t>
             </a:r>
           </a:p>
         </p:txBody>
@@ -15677,8 +17146,9 @@
                 <a:solidFill>
                   <a:srgbClr val="E07B27"/>
                 </a:solidFill>
-                <a:latin typeface="微软雅黑"/>
-                <a:ea typeface="微软雅黑"/>
+                <a:latin typeface="宋体"/>
+                <a:ea typeface="宋体"/>
+                <a:cs typeface="宋体"/>
               </a:rPr>
               <a:t>方法论结论：</a:t>
             </a:r>
@@ -15697,8 +17167,9 @@
                 <a:solidFill>
                   <a:srgbClr val="262626"/>
                 </a:solidFill>
-                <a:latin typeface="微软雅黑"/>
-                <a:ea typeface="微软雅黑"/>
+                <a:latin typeface="宋体"/>
+                <a:ea typeface="宋体"/>
+                <a:cs typeface="宋体"/>
               </a:rPr>
               <a:t>寿命序关系的报告可不带阈值；寿命点估计的报告必须注明阈值与窗口口径。</a:t>
             </a:r>
@@ -15710,6 +17181,101 @@
   <p:clrMapOvr>
     <a:masterClrMapping/>
   </p:clrMapOvr>
+  <mc:AlternateContent xmlns:mc="http://schemas.openxmlformats.org/markup-compatibility/2006">
+    <mc:Choice xmlns:p14="http://schemas.microsoft.com/office/powerpoint/2010/main" Requires="p14">
+      <p:transition spd="slow" p14:dur="2000" advTm="199"/>
+    </mc:Choice>
+    <mc:Fallback>
+      <p:transition spd="slow" advTm="199"/>
+    </mc:Fallback>
+  </mc:AlternateContent>
+  <p:timing>
+    <p:tnLst>
+      <p:par>
+        <p:cTn id="1" dur="indefinite" restart="never" nodeType="tmRoot">
+          <p:childTnLst>
+            <p:seq concurrent="1" nextAc="seek">
+              <p:cTn id="2" dur="indefinite" nodeType="mainSeq">
+                <p:childTnLst>
+                  <p:par>
+                    <p:cTn id="3" fill="hold">
+                      <p:stCondLst>
+                        <p:cond delay="indefinite"/>
+                        <p:cond evt="onBegin" delay="0">
+                          <p:tn val="2"/>
+                        </p:cond>
+                      </p:stCondLst>
+                      <p:childTnLst>
+                        <p:par>
+                          <p:cTn id="4" fill="hold">
+                            <p:stCondLst>
+                              <p:cond delay="0"/>
+                            </p:stCondLst>
+                            <p:childTnLst>
+                              <p:par>
+                                <p:cTn id="5" presetID="1" presetClass="mediacall" presetSubtype="0" fill="hold" nodeType="afterEffect">
+                                  <p:stCondLst>
+                                    <p:cond delay="0"/>
+                                  </p:stCondLst>
+                                  <p:childTnLst>
+                                    <p:cmd type="call" cmd="playFrom(0.0)">
+                                      <p:cBhvr>
+                                        <p:cTn id="6" dur="1" fill="hold"/>
+                                        <p:tgtEl>
+                                          <p:spTgt spid="12"/>
+                                        </p:tgtEl>
+                                      </p:cBhvr>
+                                    </p:cmd>
+                                  </p:childTnLst>
+                                </p:cTn>
+                              </p:par>
+                            </p:childTnLst>
+                          </p:cTn>
+                        </p:par>
+                      </p:childTnLst>
+                    </p:cTn>
+                  </p:par>
+                </p:childTnLst>
+              </p:cTn>
+              <p:prevCondLst>
+                <p:cond evt="onPrev" delay="0">
+                  <p:tgtEl>
+                    <p:sldTgt/>
+                  </p:tgtEl>
+                </p:cond>
+              </p:prevCondLst>
+              <p:nextCondLst>
+                <p:cond evt="onNext" delay="0">
+                  <p:tgtEl>
+                    <p:sldTgt/>
+                  </p:tgtEl>
+                </p:cond>
+              </p:nextCondLst>
+            </p:seq>
+            <p:audio isNarration="1">
+              <p:cMediaNode vol="80000" showWhenStopped="0">
+                <p:cTn id="7" fill="hold" display="0">
+                  <p:stCondLst>
+                    <p:cond delay="indefinite"/>
+                  </p:stCondLst>
+                  <p:endCondLst>
+                    <p:cond evt="onStopAudio" delay="0">
+                      <p:tgtEl>
+                        <p:sldTgt/>
+                      </p:tgtEl>
+                    </p:cond>
+                  </p:endCondLst>
+                </p:cTn>
+                <p:tgtEl>
+                  <p:spTgt spid="12"/>
+                </p:tgtEl>
+              </p:cMediaNode>
+            </p:audio>
+          </p:childTnLst>
+        </p:cTn>
+      </p:par>
+    </p:tnLst>
+  </p:timing>
 </p:sld>
 </file>
 
@@ -15900,8 +17466,9 @@
                 <a:solidFill>
                   <a:srgbClr val="BFCDE6"/>
                 </a:solidFill>
-                <a:latin typeface="微软雅黑"/>
-                <a:ea typeface="微软雅黑"/>
+                <a:latin typeface="宋体"/>
+                <a:ea typeface="宋体"/>
+                <a:cs typeface="宋体"/>
               </a:rPr>
               <a:t>03 · 方法</a:t>
             </a:r>
@@ -15943,8 +17510,9 @@
                 <a:solidFill>
                   <a:srgbClr val="FFFFFF"/>
                 </a:solidFill>
-                <a:latin typeface="微软雅黑"/>
-                <a:ea typeface="微软雅黑"/>
+                <a:latin typeface="宋体"/>
+                <a:ea typeface="宋体"/>
+                <a:cs typeface="宋体"/>
               </a:rPr>
               <a:t>任务定义与评测口径</a:t>
             </a:r>
@@ -15986,8 +17554,9 @@
                 <a:solidFill>
                   <a:srgbClr val="FFFFFF"/>
                 </a:solidFill>
-                <a:latin typeface="微软雅黑"/>
-                <a:ea typeface="微软雅黑"/>
+                <a:latin typeface="宋体"/>
+                <a:ea typeface="宋体"/>
+                <a:cs typeface="宋体"/>
               </a:rPr>
               <a:t>06</a:t>
             </a:r>
@@ -15996,8 +17565,9 @@
                 <a:solidFill>
                   <a:srgbClr val="9FB3D6"/>
                 </a:solidFill>
-                <a:latin typeface="微软雅黑"/>
-                <a:ea typeface="微软雅黑"/>
+                <a:latin typeface="宋体"/>
+                <a:ea typeface="宋体"/>
+                <a:cs typeface="宋体"/>
               </a:rPr>
               <a:t> / 13</a:t>
             </a:r>
@@ -16133,8 +17703,9 @@
                 <a:solidFill>
                   <a:srgbClr val="FFFFFF"/>
                 </a:solidFill>
-                <a:latin typeface="微软雅黑"/>
-                <a:ea typeface="微软雅黑"/>
+                <a:latin typeface="宋体"/>
+                <a:ea typeface="宋体"/>
+                <a:cs typeface="宋体"/>
               </a:rPr>
               <a:t>任务</a:t>
             </a:r>
@@ -16143,8 +17714,9 @@
                 <a:solidFill>
                   <a:srgbClr val="FFFFFF"/>
                 </a:solidFill>
-                <a:latin typeface="微软雅黑"/>
-                <a:ea typeface="微软雅黑"/>
+                <a:latin typeface="宋体"/>
+                <a:ea typeface="宋体"/>
+                <a:cs typeface="宋体"/>
               </a:rPr>
               <a:t> </a:t>
             </a:r>
@@ -16153,8 +17725,9 @@
                 <a:solidFill>
                   <a:srgbClr val="FFFFFF"/>
                 </a:solidFill>
-                <a:latin typeface="微软雅黑"/>
-                <a:ea typeface="微软雅黑"/>
+                <a:latin typeface="宋体"/>
+                <a:ea typeface="宋体"/>
+                <a:cs typeface="宋体"/>
               </a:rPr>
               <a:t>A｜个体内轨迹外推</a:t>
             </a:r>
@@ -16203,8 +17776,9 @@
                 <a:solidFill>
                   <a:srgbClr val="E07B27"/>
                 </a:solidFill>
-                <a:latin typeface="微软雅黑"/>
-                <a:ea typeface="微软雅黑"/>
+                <a:latin typeface="宋体"/>
+                <a:ea typeface="宋体"/>
+                <a:cs typeface="宋体"/>
               </a:rPr>
               <a:t>▪ </a:t>
             </a:r>
@@ -16213,8 +17787,9 @@
                 <a:solidFill>
                   <a:srgbClr val="1F3864"/>
                 </a:solidFill>
-                <a:latin typeface="微软雅黑"/>
-                <a:ea typeface="微软雅黑"/>
+                <a:latin typeface="宋体"/>
+                <a:ea typeface="宋体"/>
+                <a:cs typeface="宋体"/>
               </a:rPr>
               <a:t>输入：</a:t>
             </a:r>
@@ -16223,8 +17798,9 @@
                 <a:solidFill>
                   <a:srgbClr val="262626"/>
                 </a:solidFill>
-                <a:latin typeface="微软雅黑"/>
-                <a:ea typeface="微软雅黑"/>
+                <a:latin typeface="宋体"/>
+                <a:ea typeface="宋体"/>
+                <a:cs typeface="宋体"/>
               </a:rPr>
               <a:t>一块电池自己的前 M = 80 个循环</a:t>
             </a:r>
@@ -16243,8 +17819,9 @@
                 <a:solidFill>
                   <a:srgbClr val="E07B27"/>
                 </a:solidFill>
-                <a:latin typeface="微软雅黑"/>
-                <a:ea typeface="微软雅黑"/>
+                <a:latin typeface="宋体"/>
+                <a:ea typeface="宋体"/>
+                <a:cs typeface="宋体"/>
               </a:rPr>
               <a:t>▪ </a:t>
             </a:r>
@@ -16253,8 +17830,9 @@
                 <a:solidFill>
                   <a:srgbClr val="1F3864"/>
                 </a:solidFill>
-                <a:latin typeface="微软雅黑"/>
-                <a:ea typeface="微软雅黑"/>
+                <a:latin typeface="宋体"/>
+                <a:ea typeface="宋体"/>
+                <a:cs typeface="宋体"/>
               </a:rPr>
               <a:t>输出：</a:t>
             </a:r>
@@ -16263,8 +17841,9 @@
                 <a:solidFill>
                   <a:srgbClr val="262626"/>
                 </a:solidFill>
-                <a:latin typeface="微软雅黑"/>
-                <a:ea typeface="微软雅黑"/>
+                <a:latin typeface="宋体"/>
+                <a:ea typeface="宋体"/>
+                <a:cs typeface="宋体"/>
               </a:rPr>
               <a:t>后段容量 + EOL（外推 52–88 循环）</a:t>
             </a:r>
@@ -16283,8 +17862,9 @@
                 <a:solidFill>
                   <a:srgbClr val="E07B27"/>
                 </a:solidFill>
-                <a:latin typeface="微软雅黑"/>
-                <a:ea typeface="微软雅黑"/>
+                <a:latin typeface="宋体"/>
+                <a:ea typeface="宋体"/>
+                <a:cs typeface="宋体"/>
               </a:rPr>
               <a:t>▪ </a:t>
             </a:r>
@@ -16293,8 +17873,9 @@
                 <a:solidFill>
                   <a:srgbClr val="1F3864"/>
                 </a:solidFill>
-                <a:latin typeface="微软雅黑"/>
-                <a:ea typeface="微软雅黑"/>
+                <a:latin typeface="宋体"/>
+                <a:ea typeface="宋体"/>
+                <a:cs typeface="宋体"/>
               </a:rPr>
               <a:t>模型：</a:t>
             </a:r>
@@ -16303,8 +17884,9 @@
                 <a:solidFill>
                   <a:srgbClr val="262626"/>
                 </a:solidFill>
-                <a:latin typeface="微软雅黑"/>
-                <a:ea typeface="微软雅黑"/>
+                <a:latin typeface="宋体"/>
+                <a:ea typeface="宋体"/>
+                <a:cs typeface="宋体"/>
               </a:rPr>
               <a:t>M1 线性 / M2 双指数 / M3 随机森林 / M4 趋势和 GPR</a:t>
             </a:r>
@@ -16323,8 +17905,9 @@
                 <a:solidFill>
                   <a:srgbClr val="E07B27"/>
                 </a:solidFill>
-                <a:latin typeface="微软雅黑"/>
-                <a:ea typeface="微软雅黑"/>
+                <a:latin typeface="宋体"/>
+                <a:ea typeface="宋体"/>
+                <a:cs typeface="宋体"/>
               </a:rPr>
               <a:t>▪ </a:t>
             </a:r>
@@ -16333,8 +17916,9 @@
                 <a:solidFill>
                   <a:srgbClr val="1F3864"/>
                 </a:solidFill>
-                <a:latin typeface="微软雅黑"/>
-                <a:ea typeface="微软雅黑"/>
+                <a:latin typeface="宋体"/>
+                <a:ea typeface="宋体"/>
+                <a:cs typeface="宋体"/>
               </a:rPr>
               <a:t>循环序号：</a:t>
             </a:r>
@@ -16343,8 +17927,9 @@
                 <a:solidFill>
                   <a:srgbClr val="262626"/>
                 </a:solidFill>
-                <a:latin typeface="微软雅黑"/>
-                <a:ea typeface="微软雅黑"/>
+                <a:latin typeface="宋体"/>
+                <a:ea typeface="宋体"/>
+                <a:cs typeface="宋体"/>
               </a:rPr>
               <a:t>作为时间轴（回归自变量）使用</a:t>
             </a:r>
@@ -16480,8 +18065,9 @@
                 <a:solidFill>
                   <a:srgbClr val="FFFFFF"/>
                 </a:solidFill>
-                <a:latin typeface="微软雅黑"/>
-                <a:ea typeface="微软雅黑"/>
+                <a:latin typeface="宋体"/>
+                <a:ea typeface="宋体"/>
+                <a:cs typeface="宋体"/>
               </a:rPr>
               <a:t>任务 B｜跨个体早期预测</a:t>
             </a:r>
@@ -16519,35 +18105,89 @@
               </a:spcAft>
             </a:pPr>
             <a:r>
-              <a:rPr sz="1200" b="1">
+              <a:rPr sz="1200" b="1" dirty="0">
                 <a:solidFill>
                   <a:srgbClr val="E07B27"/>
                 </a:solidFill>
-                <a:latin typeface="微软雅黑"/>
-                <a:ea typeface="微软雅黑"/>
+                <a:latin typeface="宋体"/>
+                <a:ea typeface="宋体"/>
+                <a:cs typeface="宋体"/>
               </a:rPr>
               <a:t>▪ </a:t>
             </a:r>
             <a:r>
-              <a:rPr sz="1250" b="1">
+              <a:rPr sz="1250" b="1" dirty="0" err="1">
                 <a:solidFill>
                   <a:srgbClr val="1F3864"/>
                 </a:solidFill>
-                <a:latin typeface="微软雅黑"/>
-                <a:ea typeface="微软雅黑"/>
+                <a:latin typeface="宋体"/>
+                <a:ea typeface="宋体"/>
+                <a:cs typeface="宋体"/>
               </a:rPr>
               <a:t>输入：</a:t>
             </a:r>
             <a:r>
-              <a:rPr sz="1200" b="0">
+              <a:rPr sz="1200" b="0" dirty="0" err="1">
                 <a:solidFill>
                   <a:srgbClr val="262626"/>
                 </a:solidFill>
-                <a:latin typeface="微软雅黑"/>
-                <a:ea typeface="微软雅黑"/>
-              </a:rPr>
-              <a:t>前 K = 50 循环提取的 10 个统计特征</a:t>
-            </a:r>
+                <a:latin typeface="宋体"/>
+                <a:ea typeface="宋体"/>
+                <a:cs typeface="宋体"/>
+              </a:rPr>
+              <a:t>前</a:t>
+            </a:r>
+            <a:r>
+              <a:rPr sz="1200" b="0" dirty="0">
+                <a:solidFill>
+                  <a:srgbClr val="262626"/>
+                </a:solidFill>
+                <a:latin typeface="宋体"/>
+                <a:ea typeface="宋体"/>
+                <a:cs typeface="宋体"/>
+              </a:rPr>
+              <a:t> K = 50 </a:t>
+            </a:r>
+            <a:r>
+              <a:rPr sz="1200" b="0" dirty="0" err="1">
+                <a:solidFill>
+                  <a:srgbClr val="262626"/>
+                </a:solidFill>
+                <a:latin typeface="宋体"/>
+                <a:ea typeface="宋体"/>
+                <a:cs typeface="宋体"/>
+              </a:rPr>
+              <a:t>循环提取的</a:t>
+            </a:r>
+            <a:r>
+              <a:rPr sz="1200" b="0" dirty="0">
+                <a:solidFill>
+                  <a:srgbClr val="262626"/>
+                </a:solidFill>
+                <a:latin typeface="宋体"/>
+                <a:ea typeface="宋体"/>
+                <a:cs typeface="宋体"/>
+              </a:rPr>
+              <a:t> 10 </a:t>
+            </a:r>
+            <a:r>
+              <a:rPr sz="1200" b="0" dirty="0" err="1">
+                <a:solidFill>
+                  <a:srgbClr val="262626"/>
+                </a:solidFill>
+                <a:latin typeface="宋体"/>
+                <a:ea typeface="宋体"/>
+                <a:cs typeface="宋体"/>
+              </a:rPr>
+              <a:t>个统计特征</a:t>
+            </a:r>
+            <a:endParaRPr sz="1200" b="0" dirty="0">
+              <a:solidFill>
+                <a:srgbClr val="262626"/>
+              </a:solidFill>
+              <a:latin typeface="微软雅黑"/>
+              <a:ea typeface="微软雅黑"/>
+            </a:endParaRPr>
           </a:p>
           <a:p>
             <a:pPr algn="l">
@@ -16559,35 +18199,45 @@
               </a:spcAft>
             </a:pPr>
             <a:r>
-              <a:rPr sz="1200" b="1">
+              <a:rPr sz="1200" b="1" dirty="0">
                 <a:solidFill>
                   <a:srgbClr val="E07B27"/>
                 </a:solidFill>
-                <a:latin typeface="微软雅黑"/>
-                <a:ea typeface="微软雅黑"/>
+                <a:latin typeface="宋体"/>
+                <a:ea typeface="宋体"/>
+                <a:cs typeface="宋体"/>
               </a:rPr>
               <a:t>▪ </a:t>
             </a:r>
             <a:r>
-              <a:rPr sz="1250" b="1">
+              <a:rPr sz="1250" b="1" dirty="0" err="1">
                 <a:solidFill>
                   <a:srgbClr val="1F3864"/>
                 </a:solidFill>
-                <a:latin typeface="微软雅黑"/>
-                <a:ea typeface="微软雅黑"/>
+                <a:latin typeface="宋体"/>
+                <a:ea typeface="宋体"/>
+                <a:cs typeface="宋体"/>
               </a:rPr>
               <a:t>输出：</a:t>
             </a:r>
             <a:r>
-              <a:rPr sz="1200" b="0">
+              <a:rPr sz="1200" b="0" dirty="0" err="1">
                 <a:solidFill>
                   <a:srgbClr val="262626"/>
                 </a:solidFill>
-                <a:latin typeface="微软雅黑"/>
-                <a:ea typeface="微软雅黑"/>
+                <a:latin typeface="宋体"/>
+                <a:ea typeface="宋体"/>
+                <a:cs typeface="宋体"/>
               </a:rPr>
               <a:t>一块没见过的电池的寿命</a:t>
             </a:r>
+            <a:endParaRPr sz="1200" b="0" dirty="0">
+              <a:solidFill>
+                <a:srgbClr val="262626"/>
+              </a:solidFill>
+              <a:latin typeface="微软雅黑"/>
+              <a:ea typeface="微软雅黑"/>
+            </a:endParaRPr>
           </a:p>
           <a:p>
             <a:pPr algn="l">
@@ -16599,34 +18249,48 @@
               </a:spcAft>
             </a:pPr>
             <a:r>
-              <a:rPr sz="1200" b="1">
+              <a:rPr sz="1200" b="1" dirty="0">
                 <a:solidFill>
                   <a:srgbClr val="E07B27"/>
                 </a:solidFill>
-                <a:latin typeface="微软雅黑"/>
-                <a:ea typeface="微软雅黑"/>
+                <a:latin typeface="宋体"/>
+                <a:ea typeface="宋体"/>
+                <a:cs typeface="宋体"/>
               </a:rPr>
               <a:t>▪ </a:t>
             </a:r>
             <a:r>
-              <a:rPr sz="1250" b="1">
+              <a:rPr sz="1250" b="1" dirty="0" err="1">
                 <a:solidFill>
                   <a:srgbClr val="1F3864"/>
                 </a:solidFill>
-                <a:latin typeface="微软雅黑"/>
-                <a:ea typeface="微软雅黑"/>
+                <a:latin typeface="宋体"/>
+                <a:ea typeface="宋体"/>
+                <a:cs typeface="宋体"/>
               </a:rPr>
               <a:t>验证：</a:t>
             </a:r>
             <a:r>
-              <a:rPr sz="1200" b="0">
+              <a:rPr sz="1200" b="0" dirty="0" err="1">
                 <a:solidFill>
                   <a:srgbClr val="262626"/>
                 </a:solidFill>
-                <a:latin typeface="微软雅黑"/>
-                <a:ea typeface="微软雅黑"/>
-              </a:rPr>
-              <a:t>留一电池交叉验证（LOBOCV）</a:t>
+                <a:latin typeface="宋体"/>
+                <a:ea typeface="宋体"/>
+                <a:cs typeface="宋体"/>
+              </a:rPr>
+              <a:t>留一电池交叉验证（LOBOCV</a:t>
+            </a:r>
+            <a:r>
+              <a:rPr sz="1200" b="0" dirty="0">
+                <a:solidFill>
+                  <a:srgbClr val="262626"/>
+                </a:solidFill>
+                <a:latin typeface="宋体"/>
+                <a:ea typeface="宋体"/>
+                <a:cs typeface="宋体"/>
+              </a:rPr>
+              <a:t>）</a:t>
             </a:r>
           </a:p>
           <a:p>
@@ -16639,35 +18303,45 @@
               </a:spcAft>
             </a:pPr>
             <a:r>
-              <a:rPr sz="1200" b="1">
+              <a:rPr sz="1200" b="1" dirty="0">
                 <a:solidFill>
                   <a:srgbClr val="E07B27"/>
                 </a:solidFill>
-                <a:latin typeface="微软雅黑"/>
-                <a:ea typeface="微软雅黑"/>
+                <a:latin typeface="宋体"/>
+                <a:ea typeface="宋体"/>
+                <a:cs typeface="宋体"/>
               </a:rPr>
               <a:t>▪ </a:t>
             </a:r>
             <a:r>
-              <a:rPr sz="1250" b="1">
+              <a:rPr sz="1250" b="1" dirty="0" err="1">
                 <a:solidFill>
                   <a:srgbClr val="1F3864"/>
                 </a:solidFill>
-                <a:latin typeface="微软雅黑"/>
-                <a:ea typeface="微软雅黑"/>
+                <a:latin typeface="宋体"/>
+                <a:ea typeface="宋体"/>
+                <a:cs typeface="宋体"/>
               </a:rPr>
               <a:t>循环序号：</a:t>
             </a:r>
             <a:r>
-              <a:rPr sz="1200" b="0">
+              <a:rPr sz="1200" b="0" dirty="0" err="1">
                 <a:solidFill>
                   <a:srgbClr val="262626"/>
                 </a:solidFill>
-                <a:latin typeface="微软雅黑"/>
-                <a:ea typeface="微软雅黑"/>
+                <a:latin typeface="宋体"/>
+                <a:ea typeface="宋体"/>
+                <a:cs typeface="宋体"/>
               </a:rPr>
               <a:t>标签泄漏特征，禁止使用</a:t>
             </a:r>
+            <a:endParaRPr sz="1200" b="0" dirty="0">
+              <a:solidFill>
+                <a:srgbClr val="262626"/>
+              </a:solidFill>
+              <a:latin typeface="微软雅黑"/>
+              <a:ea typeface="微软雅黑"/>
+            </a:endParaRPr>
           </a:p>
           <a:p>
             <a:pPr algn="l">
@@ -16679,15 +18353,56 @@
               </a:spcAft>
             </a:pPr>
             <a:r>
-              <a:rPr sz="1200" b="1">
+              <a:rPr sz="1200" b="1" dirty="0">
                 <a:solidFill>
                   <a:srgbClr val="E07B27"/>
                 </a:solidFill>
-                <a:latin typeface="微软雅黑"/>
-                <a:ea typeface="微软雅黑"/>
-              </a:rPr>
-              <a:t>▪ 结果：无一特征优于零基准，MAE 14.7 循环</a:t>
-            </a:r>
+                <a:latin typeface="宋体"/>
+                <a:ea typeface="宋体"/>
+                <a:cs typeface="宋体"/>
+              </a:rPr>
+              <a:t>▪ </a:t>
+            </a:r>
+            <a:r>
+              <a:rPr sz="1200" b="1" dirty="0" err="1">
+                <a:solidFill>
+                  <a:srgbClr val="E07B27"/>
+                </a:solidFill>
+                <a:latin typeface="宋体"/>
+                <a:ea typeface="宋体"/>
+                <a:cs typeface="宋体"/>
+              </a:rPr>
+              <a:t>结果：无一特征优于零基准，MAE</a:t>
+            </a:r>
+            <a:r>
+              <a:rPr sz="1200" b="1" dirty="0">
+                <a:solidFill>
+                  <a:srgbClr val="E07B27"/>
+                </a:solidFill>
+                <a:latin typeface="宋体"/>
+                <a:ea typeface="宋体"/>
+                <a:cs typeface="宋体"/>
+              </a:rPr>
+              <a:t> 14.7 </a:t>
+            </a:r>
+            <a:r>
+              <a:rPr sz="1200" b="1" dirty="0" err="1">
+                <a:solidFill>
+                  <a:srgbClr val="E07B27"/>
+                </a:solidFill>
+                <a:latin typeface="宋体"/>
+                <a:ea typeface="宋体"/>
+                <a:cs typeface="宋体"/>
+              </a:rPr>
+              <a:t>循环</a:t>
+            </a:r>
+            <a:endParaRPr sz="1200" b="1" dirty="0">
+              <a:solidFill>
+                <a:srgbClr val="E07B27"/>
+              </a:solidFill>
+              <a:latin typeface="微软雅黑"/>
+              <a:ea typeface="微软雅黑"/>
+            </a:endParaRPr>
           </a:p>
         </p:txBody>
       </p:sp>
@@ -16775,8 +18490,9 @@
                 <a:solidFill>
                   <a:srgbClr val="E07B27"/>
                 </a:solidFill>
-                <a:latin typeface="微软雅黑"/>
-                <a:ea typeface="微软雅黑"/>
+                <a:latin typeface="宋体"/>
+                <a:ea typeface="宋体"/>
+                <a:cs typeface="宋体"/>
               </a:rPr>
               <a:t>评测口径三条纪律：</a:t>
             </a:r>
@@ -16795,8 +18511,9 @@
                 <a:solidFill>
                   <a:srgbClr val="262626"/>
                 </a:solidFill>
-                <a:latin typeface="微软雅黑"/>
-                <a:ea typeface="微软雅黑"/>
+                <a:latin typeface="宋体"/>
+                <a:ea typeface="宋体"/>
+                <a:cs typeface="宋体"/>
               </a:rPr>
               <a:t>① 时序划分，不随机打乱；训练段指标不参与排名，记忆样本不代表外推能力；</a:t>
             </a:r>
@@ -16815,8 +18532,9 @@
                 <a:solidFill>
                   <a:srgbClr val="262626"/>
                 </a:solidFill>
-                <a:latin typeface="微软雅黑"/>
-                <a:ea typeface="微软雅黑"/>
+                <a:latin typeface="宋体"/>
+                <a:ea typeface="宋体"/>
+                <a:cs typeface="宋体"/>
               </a:rPr>
               <a:t>② 不以平均 R² 排名（分母是各自方差，跨电池平均不具备统计意义），改用两个独立判据：逐点符号检验 + 分块自助法置信区间（块长 1/3/5/10/20 × 2000 次重采样），两判据同时显著方可下结论；</a:t>
             </a:r>
@@ -16835,8 +18553,9 @@
                 <a:solidFill>
                   <a:srgbClr val="262626"/>
                 </a:solidFill>
-                <a:latin typeface="微软雅黑"/>
-                <a:ea typeface="微软雅黑"/>
+                <a:latin typeface="宋体"/>
+                <a:ea typeface="宋体"/>
+                <a:cs typeface="宋体"/>
               </a:rPr>
               <a:t>③ EOL 按三态分开报告：有值 / 真值删失 / 模型不越阈，混合统计将引入系统性错误。</a:t>
             </a:r>
@@ -16848,6 +18567,101 @@
   <p:clrMapOvr>
     <a:masterClrMapping/>
   </p:clrMapOvr>
+  <mc:AlternateContent xmlns:mc="http://schemas.openxmlformats.org/markup-compatibility/2006">
+    <mc:Choice xmlns:p14="http://schemas.microsoft.com/office/powerpoint/2010/main" Requires="p14">
+      <p:transition spd="slow" p14:dur="2000" advTm="216"/>
+    </mc:Choice>
+    <mc:Fallback>
+      <p:transition spd="slow" advTm="216"/>
+    </mc:Fallback>
+  </mc:AlternateContent>
+  <p:timing>
+    <p:tnLst>
+      <p:par>
+        <p:cTn id="1" dur="indefinite" restart="never" nodeType="tmRoot">
+          <p:childTnLst>
+            <p:seq concurrent="1" nextAc="seek">
+              <p:cTn id="2" dur="indefinite" nodeType="mainSeq">
+                <p:childTnLst>
+                  <p:par>
+                    <p:cTn id="3" fill="hold">
+                      <p:stCondLst>
+                        <p:cond delay="indefinite"/>
+                        <p:cond evt="onBegin" delay="0">
+                          <p:tn val="2"/>
+                        </p:cond>
+                      </p:stCondLst>
+                      <p:childTnLst>
+                        <p:par>
+                          <p:cTn id="4" fill="hold">
+                            <p:stCondLst>
+                              <p:cond delay="0"/>
+                            </p:stCondLst>
+                            <p:childTnLst>
+                              <p:par>
+                                <p:cTn id="5" presetID="1" presetClass="mediacall" presetSubtype="0" fill="hold" nodeType="afterEffect">
+                                  <p:stCondLst>
+                                    <p:cond delay="0"/>
+                                  </p:stCondLst>
+                                  <p:childTnLst>
+                                    <p:cmd type="call" cmd="playFrom(0.0)">
+                                      <p:cBhvr>
+                                        <p:cTn id="6" dur="1" fill="hold"/>
+                                        <p:tgtEl>
+                                          <p:spTgt spid="18"/>
+                                        </p:tgtEl>
+                                      </p:cBhvr>
+                                    </p:cmd>
+                                  </p:childTnLst>
+                                </p:cTn>
+                              </p:par>
+                            </p:childTnLst>
+                          </p:cTn>
+                        </p:par>
+                      </p:childTnLst>
+                    </p:cTn>
+                  </p:par>
+                </p:childTnLst>
+              </p:cTn>
+              <p:prevCondLst>
+                <p:cond evt="onPrev" delay="0">
+                  <p:tgtEl>
+                    <p:sldTgt/>
+                  </p:tgtEl>
+                </p:cond>
+              </p:prevCondLst>
+              <p:nextCondLst>
+                <p:cond evt="onNext" delay="0">
+                  <p:tgtEl>
+                    <p:sldTgt/>
+                  </p:tgtEl>
+                </p:cond>
+              </p:nextCondLst>
+            </p:seq>
+            <p:audio isNarration="1">
+              <p:cMediaNode vol="80000" showWhenStopped="0">
+                <p:cTn id="7" fill="hold" display="0">
+                  <p:stCondLst>
+                    <p:cond delay="indefinite"/>
+                  </p:stCondLst>
+                  <p:endCondLst>
+                    <p:cond evt="onStopAudio" delay="0">
+                      <p:tgtEl>
+                        <p:sldTgt/>
+                      </p:tgtEl>
+                    </p:cond>
+                  </p:endCondLst>
+                </p:cTn>
+                <p:tgtEl>
+                  <p:spTgt spid="18"/>
+                </p:tgtEl>
+              </p:cMediaNode>
+            </p:audio>
+          </p:childTnLst>
+        </p:cTn>
+      </p:par>
+    </p:tnLst>
+  </p:timing>
 </p:sld>
 </file>
 
@@ -17038,8 +18852,9 @@
                 <a:solidFill>
                   <a:srgbClr val="BFCDE6"/>
                 </a:solidFill>
-                <a:latin typeface="微软雅黑"/>
-                <a:ea typeface="微软雅黑"/>
+                <a:latin typeface="宋体"/>
+                <a:ea typeface="宋体"/>
+                <a:cs typeface="宋体"/>
               </a:rPr>
               <a:t>04 · 结果</a:t>
             </a:r>
@@ -17081,8 +18896,9 @@
                 <a:solidFill>
                   <a:srgbClr val="FFFFFF"/>
                 </a:solidFill>
-                <a:latin typeface="微软雅黑"/>
-                <a:ea typeface="微软雅黑"/>
+                <a:latin typeface="宋体"/>
+                <a:ea typeface="宋体"/>
+                <a:cs typeface="宋体"/>
               </a:rPr>
               <a:t>四模型对比与显著性判定</a:t>
             </a:r>
@@ -17124,8 +18940,9 @@
                 <a:solidFill>
                   <a:srgbClr val="FFFFFF"/>
                 </a:solidFill>
-                <a:latin typeface="微软雅黑"/>
-                <a:ea typeface="微软雅黑"/>
+                <a:latin typeface="宋体"/>
+                <a:ea typeface="宋体"/>
+                <a:cs typeface="宋体"/>
               </a:rPr>
               <a:t>07</a:t>
             </a:r>
@@ -17134,8 +18951,9 @@
                 <a:solidFill>
                   <a:srgbClr val="9FB3D6"/>
                 </a:solidFill>
-                <a:latin typeface="微软雅黑"/>
-                <a:ea typeface="微软雅黑"/>
+                <a:latin typeface="宋体"/>
+                <a:ea typeface="宋体"/>
+                <a:cs typeface="宋体"/>
               </a:rPr>
               <a:t> / 13</a:t>
             </a:r>
@@ -17177,8 +18995,9 @@
                 <a:solidFill>
                   <a:srgbClr val="E07B27"/>
                 </a:solidFill>
-                <a:latin typeface="微软雅黑"/>
-                <a:ea typeface="微软雅黑"/>
+                <a:latin typeface="宋体"/>
+                <a:ea typeface="宋体"/>
+                <a:cs typeface="宋体"/>
               </a:rPr>
               <a:t>▪ M4 vs M1：仅 B0005 两判据一致显著（86/88 </a:t>
             </a:r>
@@ -17187,8 +19006,9 @@
                 <a:solidFill>
                   <a:srgbClr val="E07B27"/>
                 </a:solidFill>
-                <a:latin typeface="微软雅黑"/>
-                <a:ea typeface="微软雅黑"/>
+                <a:latin typeface="宋体"/>
+                <a:ea typeface="宋体"/>
+                <a:cs typeface="宋体"/>
               </a:rPr>
               <a:t>点更近，p</a:t>
             </a:r>
@@ -17197,8 +19017,9 @@
                 <a:solidFill>
                   <a:srgbClr val="E07B27"/>
                 </a:solidFill>
-                <a:latin typeface="微软雅黑"/>
-                <a:ea typeface="微软雅黑"/>
+                <a:latin typeface="宋体"/>
+                <a:ea typeface="宋体"/>
+                <a:cs typeface="宋体"/>
               </a:rPr>
               <a:t> = 2.5×10⁻²³），</a:t>
             </a:r>
@@ -17207,8 +19028,9 @@
                 <a:solidFill>
                   <a:srgbClr val="E07B27"/>
                 </a:solidFill>
-                <a:latin typeface="微软雅黑"/>
-                <a:ea typeface="微软雅黑"/>
+                <a:latin typeface="宋体"/>
+                <a:ea typeface="宋体"/>
+                <a:cs typeface="宋体"/>
               </a:rPr>
               <a:t>其余可忽略或冲突，点预测精度无实质差异</a:t>
             </a:r>
@@ -17234,8 +19056,9 @@
                 <a:solidFill>
                   <a:srgbClr val="E07B27"/>
                 </a:solidFill>
-                <a:latin typeface="微软雅黑"/>
-                <a:ea typeface="微软雅黑"/>
+                <a:latin typeface="宋体"/>
+                <a:ea typeface="宋体"/>
+                <a:cs typeface="宋体"/>
               </a:rPr>
               <a:t>▪ </a:t>
             </a:r>
@@ -17244,8 +19067,9 @@
                 <a:solidFill>
                   <a:srgbClr val="1F3864"/>
                 </a:solidFill>
-                <a:latin typeface="微软雅黑"/>
-                <a:ea typeface="微软雅黑"/>
+                <a:latin typeface="宋体"/>
+                <a:ea typeface="宋体"/>
+                <a:cs typeface="宋体"/>
               </a:rPr>
               <a:t>M2 </a:t>
             </a:r>
@@ -17254,8 +19078,9 @@
                 <a:solidFill>
                   <a:srgbClr val="1F3864"/>
                 </a:solidFill>
-                <a:latin typeface="微软雅黑"/>
-                <a:ea typeface="微软雅黑"/>
+                <a:latin typeface="宋体"/>
+                <a:ea typeface="宋体"/>
+                <a:cs typeface="宋体"/>
               </a:rPr>
               <a:t>双指数：</a:t>
             </a:r>
@@ -17264,8 +19089,9 @@
                 <a:solidFill>
                   <a:srgbClr val="262626"/>
                 </a:solidFill>
-                <a:latin typeface="微软雅黑"/>
-                <a:ea typeface="微软雅黑"/>
+                <a:latin typeface="宋体"/>
+                <a:ea typeface="宋体"/>
+                <a:cs typeface="宋体"/>
               </a:rPr>
               <a:t>三块上显著更差；主因不是参数不可辨识（条件数</a:t>
             </a:r>
@@ -17274,8 +19100,9 @@
                 <a:solidFill>
                   <a:srgbClr val="262626"/>
                 </a:solidFill>
-                <a:latin typeface="微软雅黑"/>
-                <a:ea typeface="微软雅黑"/>
+                <a:latin typeface="宋体"/>
+                <a:ea typeface="宋体"/>
+                <a:cs typeface="宋体"/>
               </a:rPr>
               <a:t> 10¹¹–10¹²），</a:t>
             </a:r>
@@ -17284,8 +19111,9 @@
                 <a:solidFill>
                   <a:srgbClr val="262626"/>
                 </a:solidFill>
-                <a:latin typeface="微软雅黑"/>
-                <a:ea typeface="微软雅黑"/>
+                <a:latin typeface="宋体"/>
+                <a:ea typeface="宋体"/>
+                <a:cs typeface="宋体"/>
               </a:rPr>
               <a:t>而是末端系统性低估寿命</a:t>
             </a:r>
@@ -17311,8 +19139,9 @@
                 <a:solidFill>
                   <a:srgbClr val="E07B27"/>
                 </a:solidFill>
-                <a:latin typeface="微软雅黑"/>
-                <a:ea typeface="微软雅黑"/>
+                <a:latin typeface="宋体"/>
+                <a:ea typeface="宋体"/>
+                <a:cs typeface="宋体"/>
               </a:rPr>
               <a:t>▪ </a:t>
             </a:r>
@@ -17321,8 +19150,9 @@
                 <a:solidFill>
                   <a:srgbClr val="1F3864"/>
                 </a:solidFill>
-                <a:latin typeface="微软雅黑"/>
-                <a:ea typeface="微软雅黑"/>
+                <a:latin typeface="宋体"/>
+                <a:ea typeface="宋体"/>
+                <a:cs typeface="宋体"/>
               </a:rPr>
               <a:t>M3 </a:t>
             </a:r>
@@ -17331,8 +19161,9 @@
                 <a:solidFill>
                   <a:srgbClr val="1F3864"/>
                 </a:solidFill>
-                <a:latin typeface="微软雅黑"/>
-                <a:ea typeface="微软雅黑"/>
+                <a:latin typeface="宋体"/>
+                <a:ea typeface="宋体"/>
+                <a:cs typeface="宋体"/>
               </a:rPr>
               <a:t>随机森林：</a:t>
             </a:r>
@@ -17341,8 +19172,9 @@
                 <a:solidFill>
                   <a:srgbClr val="262626"/>
                 </a:solidFill>
-                <a:latin typeface="微软雅黑"/>
-                <a:ea typeface="微软雅黑"/>
+                <a:latin typeface="宋体"/>
+                <a:ea typeface="宋体"/>
+                <a:cs typeface="宋体"/>
               </a:rPr>
               <a:t>两块显著更差；EOL</a:t>
             </a:r>
@@ -17351,8 +19183,9 @@
                 <a:solidFill>
                   <a:srgbClr val="262626"/>
                 </a:solidFill>
-                <a:latin typeface="微软雅黑"/>
-                <a:ea typeface="微软雅黑"/>
+                <a:latin typeface="宋体"/>
+                <a:ea typeface="宋体"/>
+                <a:cs typeface="宋体"/>
               </a:rPr>
               <a:t> </a:t>
             </a:r>
@@ -17361,8 +19194,9 @@
                 <a:solidFill>
                   <a:srgbClr val="262626"/>
                 </a:solidFill>
-                <a:latin typeface="微软雅黑"/>
-                <a:ea typeface="微软雅黑"/>
+                <a:latin typeface="宋体"/>
+                <a:ea typeface="宋体"/>
+                <a:cs typeface="宋体"/>
               </a:rPr>
               <a:t>预测</a:t>
             </a:r>
@@ -17371,8 +19205,9 @@
                 <a:solidFill>
                   <a:srgbClr val="262626"/>
                 </a:solidFill>
-                <a:latin typeface="微软雅黑"/>
-                <a:ea typeface="微软雅黑"/>
+                <a:latin typeface="宋体"/>
+                <a:ea typeface="宋体"/>
+                <a:cs typeface="宋体"/>
               </a:rPr>
               <a:t> 4/4 </a:t>
             </a:r>
@@ -17381,8 +19216,9 @@
                 <a:solidFill>
                   <a:srgbClr val="262626"/>
                 </a:solidFill>
-                <a:latin typeface="微软雅黑"/>
-                <a:ea typeface="微软雅黑"/>
+                <a:latin typeface="宋体"/>
+                <a:ea typeface="宋体"/>
+                <a:cs typeface="宋体"/>
               </a:rPr>
               <a:t>不越阈</a:t>
             </a:r>
@@ -17408,8 +19244,9 @@
                 <a:solidFill>
                   <a:srgbClr val="E07B27"/>
                 </a:solidFill>
-                <a:latin typeface="微软雅黑"/>
-                <a:ea typeface="微软雅黑"/>
+                <a:latin typeface="宋体"/>
+                <a:ea typeface="宋体"/>
+                <a:cs typeface="宋体"/>
               </a:rPr>
               <a:t>▪ </a:t>
             </a:r>
@@ -17418,8 +19255,9 @@
                 <a:solidFill>
                   <a:srgbClr val="1F3864"/>
                 </a:solidFill>
-                <a:latin typeface="微软雅黑"/>
-                <a:ea typeface="微软雅黑"/>
+                <a:latin typeface="宋体"/>
+                <a:ea typeface="宋体"/>
+                <a:cs typeface="宋体"/>
               </a:rPr>
               <a:t>EOL 误差：</a:t>
             </a:r>
@@ -17428,8 +19266,9 @@
                 <a:solidFill>
                   <a:srgbClr val="262626"/>
                 </a:solidFill>
-                <a:latin typeface="微软雅黑"/>
-                <a:ea typeface="微软雅黑"/>
+                <a:latin typeface="宋体"/>
+                <a:ea typeface="宋体"/>
+                <a:cs typeface="宋体"/>
               </a:rPr>
               <a:t>M1 / M4 </a:t>
             </a:r>
@@ -17438,8 +19277,9 @@
                 <a:solidFill>
                   <a:srgbClr val="262626"/>
                 </a:solidFill>
-                <a:latin typeface="微软雅黑"/>
-                <a:ea typeface="微软雅黑"/>
+                <a:latin typeface="宋体"/>
+                <a:ea typeface="宋体"/>
+                <a:cs typeface="宋体"/>
               </a:rPr>
               <a:t>平均</a:t>
             </a:r>
@@ -17448,8 +19288,9 @@
                 <a:solidFill>
                   <a:srgbClr val="262626"/>
                 </a:solidFill>
-                <a:latin typeface="微软雅黑"/>
-                <a:ea typeface="微软雅黑"/>
+                <a:latin typeface="宋体"/>
+                <a:ea typeface="宋体"/>
+                <a:cs typeface="宋体"/>
               </a:rPr>
               <a:t> 12.0 循环，M2 </a:t>
             </a:r>
@@ -17458,8 +19299,9 @@
                 <a:solidFill>
                   <a:srgbClr val="262626"/>
                 </a:solidFill>
-                <a:latin typeface="微软雅黑"/>
-                <a:ea typeface="微软雅黑"/>
+                <a:latin typeface="宋体"/>
+                <a:ea typeface="宋体"/>
+                <a:cs typeface="宋体"/>
               </a:rPr>
               <a:t>平均</a:t>
             </a:r>
@@ -17468,8 +19310,9 @@
                 <a:solidFill>
                   <a:srgbClr val="262626"/>
                 </a:solidFill>
-                <a:latin typeface="微软雅黑"/>
-                <a:ea typeface="微软雅黑"/>
+                <a:latin typeface="宋体"/>
+                <a:ea typeface="宋体"/>
+                <a:cs typeface="宋体"/>
               </a:rPr>
               <a:t> 12.7 </a:t>
             </a:r>
@@ -17478,8 +19321,9 @@
                 <a:solidFill>
                   <a:srgbClr val="262626"/>
                 </a:solidFill>
-                <a:latin typeface="微软雅黑"/>
-                <a:ea typeface="微软雅黑"/>
+                <a:latin typeface="宋体"/>
+                <a:ea typeface="宋体"/>
+                <a:cs typeface="宋体"/>
               </a:rPr>
               <a:t>循环</a:t>
             </a:r>
@@ -17502,7 +19346,7 @@
         <p:spPr>
           <a:xfrm>
             <a:off x="7025335" y="3861600"/>
-            <a:ext cx="3749039" cy="777240"/>
+            <a:ext cx="3749039" cy="652551"/>
           </a:xfrm>
           <a:prstGeom prst="rect">
             <a:avLst/>
@@ -17528,8 +19372,9 @@
                 <a:solidFill>
                   <a:srgbClr val="E07B27"/>
                 </a:solidFill>
-                <a:latin typeface="微软雅黑"/>
-                <a:ea typeface="微软雅黑"/>
+                <a:latin typeface="宋体"/>
+                <a:ea typeface="宋体"/>
+                <a:cs typeface="宋体"/>
               </a:rPr>
               <a:t>结论</a:t>
             </a:r>
@@ -17538,8 +19383,9 @@
                 <a:solidFill>
                   <a:srgbClr val="E07B27"/>
                 </a:solidFill>
-                <a:latin typeface="微软雅黑"/>
-                <a:ea typeface="微软雅黑"/>
+                <a:latin typeface="宋体"/>
+                <a:ea typeface="宋体"/>
+                <a:cs typeface="宋体"/>
               </a:rPr>
               <a:t>：</a:t>
             </a:r>
@@ -17558,8 +19404,9 @@
                 <a:solidFill>
                   <a:srgbClr val="262626"/>
                 </a:solidFill>
-                <a:latin typeface="微软雅黑"/>
-                <a:ea typeface="微软雅黑"/>
+                <a:latin typeface="宋体"/>
+                <a:ea typeface="宋体"/>
+                <a:cs typeface="宋体"/>
               </a:rPr>
               <a:t>M4 </a:t>
             </a:r>
@@ -17568,8 +19415,9 @@
                 <a:solidFill>
                   <a:srgbClr val="262626"/>
                 </a:solidFill>
-                <a:latin typeface="微软雅黑"/>
-                <a:ea typeface="微软雅黑"/>
+                <a:latin typeface="宋体"/>
+                <a:ea typeface="宋体"/>
+                <a:cs typeface="宋体"/>
               </a:rPr>
               <a:t>的增量价值不在点预测精度，而在输出</a:t>
             </a:r>
@@ -17578,8 +19426,9 @@
                 <a:solidFill>
                   <a:srgbClr val="262626"/>
                 </a:solidFill>
-                <a:latin typeface="微软雅黑"/>
-                <a:ea typeface="微软雅黑"/>
+                <a:latin typeface="宋体"/>
+                <a:ea typeface="宋体"/>
+                <a:cs typeface="宋体"/>
               </a:rPr>
               <a:t> EOL </a:t>
             </a:r>
@@ -17588,8 +19437,9 @@
                 <a:solidFill>
                   <a:srgbClr val="262626"/>
                 </a:solidFill>
-                <a:latin typeface="微软雅黑"/>
-                <a:ea typeface="微软雅黑"/>
+                <a:latin typeface="宋体"/>
+                <a:ea typeface="宋体"/>
+                <a:cs typeface="宋体"/>
               </a:rPr>
               <a:t>后验分布与预测区间</a:t>
             </a:r>
@@ -17598,8 +19448,9 @@
                 <a:solidFill>
                   <a:srgbClr val="262626"/>
                 </a:solidFill>
-                <a:latin typeface="微软雅黑"/>
-                <a:ea typeface="微软雅黑"/>
+                <a:latin typeface="宋体"/>
+                <a:ea typeface="宋体"/>
+                <a:cs typeface="宋体"/>
               </a:rPr>
               <a:t>。</a:t>
             </a:r>
@@ -17615,7 +19466,7 @@
           <p:nvPr/>
         </p:nvPicPr>
         <p:blipFill>
-          <a:blip r:embed="rId3"/>
+          <a:blip r:embed="rId5"/>
           <a:stretch>
             <a:fillRect/>
           </a:stretch>
@@ -17639,7 +19490,7 @@
           <p:nvPr/>
         </p:nvPicPr>
         <p:blipFill>
-          <a:blip r:embed="rId4"/>
+          <a:blip r:embed="rId6"/>
           <a:stretch>
             <a:fillRect/>
           </a:stretch>
@@ -17659,6 +19510,101 @@
   <p:clrMapOvr>
     <a:masterClrMapping/>
   </p:clrMapOvr>
+  <mc:AlternateContent xmlns:mc="http://schemas.openxmlformats.org/markup-compatibility/2006">
+    <mc:Choice xmlns:p14="http://schemas.microsoft.com/office/powerpoint/2010/main" Requires="p14">
+      <p:transition spd="slow" p14:dur="2000" advTm="237"/>
+    </mc:Choice>
+    <mc:Fallback>
+      <p:transition spd="slow" advTm="237"/>
+    </mc:Fallback>
+  </mc:AlternateContent>
+  <p:timing>
+    <p:tnLst>
+      <p:par>
+        <p:cTn id="1" dur="indefinite" restart="never" nodeType="tmRoot">
+          <p:childTnLst>
+            <p:seq concurrent="1" nextAc="seek">
+              <p:cTn id="2" dur="indefinite" nodeType="mainSeq">
+                <p:childTnLst>
+                  <p:par>
+                    <p:cTn id="3" fill="hold">
+                      <p:stCondLst>
+                        <p:cond delay="indefinite"/>
+                        <p:cond evt="onBegin" delay="0">
+                          <p:tn val="2"/>
+                        </p:cond>
+                      </p:stCondLst>
+                      <p:childTnLst>
+                        <p:par>
+                          <p:cTn id="4" fill="hold">
+                            <p:stCondLst>
+                              <p:cond delay="0"/>
+                            </p:stCondLst>
+                            <p:childTnLst>
+                              <p:par>
+                                <p:cTn id="5" presetID="1" presetClass="mediacall" presetSubtype="0" fill="hold" nodeType="afterEffect">
+                                  <p:stCondLst>
+                                    <p:cond delay="0"/>
+                                  </p:stCondLst>
+                                  <p:childTnLst>
+                                    <p:cmd type="call" cmd="playFrom(0.0)">
+                                      <p:cBhvr>
+                                        <p:cTn id="6" dur="1" fill="hold"/>
+                                        <p:tgtEl>
+                                          <p:spTgt spid="8"/>
+                                        </p:tgtEl>
+                                      </p:cBhvr>
+                                    </p:cmd>
+                                  </p:childTnLst>
+                                </p:cTn>
+                              </p:par>
+                            </p:childTnLst>
+                          </p:cTn>
+                        </p:par>
+                      </p:childTnLst>
+                    </p:cTn>
+                  </p:par>
+                </p:childTnLst>
+              </p:cTn>
+              <p:prevCondLst>
+                <p:cond evt="onPrev" delay="0">
+                  <p:tgtEl>
+                    <p:sldTgt/>
+                  </p:tgtEl>
+                </p:cond>
+              </p:prevCondLst>
+              <p:nextCondLst>
+                <p:cond evt="onNext" delay="0">
+                  <p:tgtEl>
+                    <p:sldTgt/>
+                  </p:tgtEl>
+                </p:cond>
+              </p:nextCondLst>
+            </p:seq>
+            <p:audio isNarration="1">
+              <p:cMediaNode vol="80000" showWhenStopped="0">
+                <p:cTn id="7" fill="hold" display="0">
+                  <p:stCondLst>
+                    <p:cond delay="indefinite"/>
+                  </p:stCondLst>
+                  <p:endCondLst>
+                    <p:cond evt="onStopAudio" delay="0">
+                      <p:tgtEl>
+                        <p:sldTgt/>
+                      </p:tgtEl>
+                    </p:cond>
+                  </p:endCondLst>
+                </p:cTn>
+                <p:tgtEl>
+                  <p:spTgt spid="8"/>
+                </p:tgtEl>
+              </p:cMediaNode>
+            </p:audio>
+          </p:childTnLst>
+        </p:cTn>
+      </p:par>
+    </p:tnLst>
+  </p:timing>
 </p:sld>
 </file>
 
@@ -17849,8 +19795,9 @@
                 <a:solidFill>
                   <a:srgbClr val="BFCDE6"/>
                 </a:solidFill>
-                <a:latin typeface="微软雅黑"/>
-                <a:ea typeface="微软雅黑"/>
+                <a:latin typeface="宋体"/>
+                <a:ea typeface="宋体"/>
+                <a:cs typeface="宋体"/>
               </a:rPr>
               <a:t>04 · 结果</a:t>
             </a:r>
@@ -17892,8 +19839,9 @@
                 <a:solidFill>
                   <a:srgbClr val="FFFFFF"/>
                 </a:solidFill>
-                <a:latin typeface="微软雅黑"/>
-                <a:ea typeface="微软雅黑"/>
+                <a:latin typeface="宋体"/>
+                <a:ea typeface="宋体"/>
+                <a:cs typeface="宋体"/>
               </a:rPr>
               <a:t>随机森林的外推失效</a:t>
             </a:r>
@@ -17935,8 +19883,9 @@
                 <a:solidFill>
                   <a:srgbClr val="FFFFFF"/>
                 </a:solidFill>
-                <a:latin typeface="微软雅黑"/>
-                <a:ea typeface="微软雅黑"/>
+                <a:latin typeface="宋体"/>
+                <a:ea typeface="宋体"/>
+                <a:cs typeface="宋体"/>
               </a:rPr>
               <a:t>08</a:t>
             </a:r>
@@ -17945,8 +19894,9 @@
                 <a:solidFill>
                   <a:srgbClr val="9FB3D6"/>
                 </a:solidFill>
-                <a:latin typeface="微软雅黑"/>
-                <a:ea typeface="微软雅黑"/>
+                <a:latin typeface="宋体"/>
+                <a:ea typeface="宋体"/>
+                <a:cs typeface="宋体"/>
               </a:rPr>
               <a:t> / 13</a:t>
             </a:r>
@@ -17962,7 +19912,7 @@
           <p:nvPr/>
         </p:nvPicPr>
         <p:blipFill>
-          <a:blip r:embed="rId3"/>
+          <a:blip r:embed="rId5"/>
           <a:stretch>
             <a:fillRect/>
           </a:stretch>
@@ -18064,8 +20014,9 @@
                 <a:solidFill>
                   <a:srgbClr val="1F3864"/>
                 </a:solidFill>
-                <a:latin typeface="微软雅黑"/>
-                <a:ea typeface="微软雅黑"/>
+                <a:latin typeface="宋体"/>
+                <a:ea typeface="宋体"/>
+                <a:cs typeface="宋体"/>
               </a:rPr>
               <a:t>0.997</a:t>
             </a:r>
@@ -18107,8 +20058,9 @@
                 <a:solidFill>
                   <a:srgbClr val="595959"/>
                 </a:solidFill>
-                <a:latin typeface="微软雅黑"/>
-                <a:ea typeface="微软雅黑"/>
+                <a:latin typeface="宋体"/>
+                <a:ea typeface="宋体"/>
+                <a:cs typeface="宋体"/>
               </a:rPr>
               <a:t>训练段 R²（逐点记忆训练样本）</a:t>
             </a:r>
@@ -18197,8 +20149,9 @@
                 <a:solidFill>
                   <a:srgbClr val="B33030"/>
                 </a:solidFill>
-                <a:latin typeface="微软雅黑"/>
-                <a:ea typeface="微软雅黑"/>
+                <a:latin typeface="宋体"/>
+                <a:ea typeface="宋体"/>
+                <a:cs typeface="宋体"/>
               </a:rPr>
               <a:t>−3.57</a:t>
             </a:r>
@@ -18240,8 +20193,9 @@
                 <a:solidFill>
                   <a:srgbClr val="595959"/>
                 </a:solidFill>
-                <a:latin typeface="微软雅黑"/>
-                <a:ea typeface="微软雅黑"/>
+                <a:latin typeface="宋体"/>
+                <a:ea typeface="宋体"/>
+                <a:cs typeface="宋体"/>
               </a:rPr>
               <a:t>测试段 R² 最差（B0005），4/4 为负</a:t>
             </a:r>
@@ -18283,8 +20237,9 @@
                 <a:solidFill>
                   <a:srgbClr val="E07B27"/>
                 </a:solidFill>
-                <a:latin typeface="微软雅黑"/>
-                <a:ea typeface="微软雅黑"/>
+                <a:latin typeface="宋体"/>
+                <a:ea typeface="宋体"/>
+                <a:cs typeface="宋体"/>
               </a:rPr>
               <a:t>▪ </a:t>
             </a:r>
@@ -18293,8 +20248,9 @@
                 <a:solidFill>
                   <a:srgbClr val="1F3864"/>
                 </a:solidFill>
-                <a:latin typeface="微软雅黑"/>
-                <a:ea typeface="微软雅黑"/>
+                <a:latin typeface="宋体"/>
+                <a:ea typeface="宋体"/>
+                <a:cs typeface="宋体"/>
               </a:rPr>
               <a:t>机制可证明：</a:t>
             </a:r>
@@ -18303,8 +20259,9 @@
                 <a:solidFill>
                   <a:srgbClr val="262626"/>
                 </a:solidFill>
-                <a:latin typeface="微软雅黑"/>
-                <a:ea typeface="微软雅黑"/>
+                <a:latin typeface="宋体"/>
+                <a:ea typeface="宋体"/>
+                <a:cs typeface="宋体"/>
               </a:rPr>
               <a:t>超出训练区间的输入永远走同一条分裂路径，316 </a:t>
             </a:r>
@@ -18313,8 +20270,9 @@
                 <a:solidFill>
                   <a:srgbClr val="262626"/>
                 </a:solidFill>
-                <a:latin typeface="微软雅黑"/>
-                <a:ea typeface="微软雅黑"/>
+                <a:latin typeface="宋体"/>
+                <a:ea typeface="宋体"/>
+                <a:cs typeface="宋体"/>
               </a:rPr>
               <a:t>个测试点预测值完全相同（极差</a:t>
             </a:r>
@@ -18323,8 +20281,9 @@
                 <a:solidFill>
                   <a:srgbClr val="262626"/>
                 </a:solidFill>
-                <a:latin typeface="微软雅黑"/>
-                <a:ea typeface="微软雅黑"/>
+                <a:latin typeface="宋体"/>
+                <a:ea typeface="宋体"/>
+                <a:cs typeface="宋体"/>
               </a:rPr>
               <a:t> = 0）</a:t>
             </a:r>
@@ -18343,8 +20302,9 @@
                 <a:solidFill>
                   <a:srgbClr val="E07B27"/>
                 </a:solidFill>
-                <a:latin typeface="微软雅黑"/>
-                <a:ea typeface="微软雅黑"/>
+                <a:latin typeface="宋体"/>
+                <a:ea typeface="宋体"/>
+                <a:cs typeface="宋体"/>
               </a:rPr>
               <a:t>▪ </a:t>
             </a:r>
@@ -18353,8 +20313,9 @@
                 <a:solidFill>
                   <a:srgbClr val="1F3864"/>
                 </a:solidFill>
-                <a:latin typeface="微软雅黑"/>
-                <a:ea typeface="微软雅黑"/>
+                <a:latin typeface="宋体"/>
+                <a:ea typeface="宋体"/>
+                <a:cs typeface="宋体"/>
               </a:rPr>
               <a:t>树长到底时：</a:t>
             </a:r>
@@ -18363,8 +20324,9 @@
                 <a:solidFill>
                   <a:srgbClr val="262626"/>
                 </a:solidFill>
-                <a:latin typeface="微软雅黑"/>
-                <a:ea typeface="微软雅黑"/>
+                <a:latin typeface="宋体"/>
+                <a:ea typeface="宋体"/>
+                <a:cs typeface="宋体"/>
               </a:rPr>
               <a:t>外推值等于末次训练观测，即模型外推能力的信息上限</a:t>
             </a:r>
@@ -18390,8 +20352,9 @@
                 <a:solidFill>
                   <a:srgbClr val="E07B27"/>
                 </a:solidFill>
-                <a:latin typeface="微软雅黑"/>
-                <a:ea typeface="微软雅黑"/>
+                <a:latin typeface="宋体"/>
+                <a:ea typeface="宋体"/>
+                <a:cs typeface="宋体"/>
               </a:rPr>
               <a:t>▪ 加树不能修复：10 → 1000 </a:t>
             </a:r>
@@ -18400,8 +20363,9 @@
                 <a:solidFill>
                   <a:srgbClr val="E07B27"/>
                 </a:solidFill>
-                <a:latin typeface="微软雅黑"/>
-                <a:ea typeface="微软雅黑"/>
+                <a:latin typeface="宋体"/>
+                <a:ea typeface="宋体"/>
+                <a:cs typeface="宋体"/>
               </a:rPr>
               <a:t>棵，外推常数最多动</a:t>
             </a:r>
@@ -18410,8 +20374,9 @@
                 <a:solidFill>
                   <a:srgbClr val="E07B27"/>
                 </a:solidFill>
-                <a:latin typeface="微软雅黑"/>
-                <a:ea typeface="微软雅黑"/>
+                <a:latin typeface="宋体"/>
+                <a:ea typeface="宋体"/>
+                <a:cs typeface="宋体"/>
               </a:rPr>
               <a:t> 0.0037 </a:t>
             </a:r>
@@ -18420,8 +20385,9 @@
                 <a:solidFill>
                   <a:srgbClr val="E07B27"/>
                 </a:solidFill>
-                <a:latin typeface="微软雅黑"/>
-                <a:ea typeface="微软雅黑"/>
+                <a:latin typeface="宋体"/>
+                <a:ea typeface="宋体"/>
+                <a:cs typeface="宋体"/>
               </a:rPr>
               <a:t>Ah，失效源于偏差而非方差</a:t>
             </a:r>
@@ -18447,8 +20413,9 @@
                 <a:solidFill>
                   <a:srgbClr val="E07B27"/>
                 </a:solidFill>
-                <a:latin typeface="微软雅黑"/>
-                <a:ea typeface="微软雅黑"/>
+                <a:latin typeface="宋体"/>
+                <a:ea typeface="宋体"/>
+                <a:cs typeface="宋体"/>
               </a:rPr>
               <a:t>▪ </a:t>
             </a:r>
@@ -18457,8 +20424,9 @@
                 <a:solidFill>
                   <a:srgbClr val="1F3864"/>
                 </a:solidFill>
-                <a:latin typeface="微软雅黑"/>
-                <a:ea typeface="微软雅黑"/>
+                <a:latin typeface="宋体"/>
+                <a:ea typeface="宋体"/>
+                <a:cs typeface="宋体"/>
               </a:rPr>
               <a:t>寿命预测方向错误：</a:t>
             </a:r>
@@ -18467,8 +20435,9 @@
                 <a:solidFill>
                   <a:srgbClr val="262626"/>
                 </a:solidFill>
-                <a:latin typeface="微软雅黑"/>
-                <a:ea typeface="微软雅黑"/>
+                <a:latin typeface="宋体"/>
+                <a:ea typeface="宋体"/>
+                <a:cs typeface="宋体"/>
               </a:rPr>
               <a:t>对三块已失效个体均预测不越阈</a:t>
             </a:r>
@@ -18564,8 +20533,9 @@
                 <a:solidFill>
                   <a:srgbClr val="E07B27"/>
                 </a:solidFill>
-                <a:latin typeface="微软雅黑"/>
-                <a:ea typeface="微软雅黑"/>
+                <a:latin typeface="宋体"/>
+                <a:ea typeface="宋体"/>
+                <a:cs typeface="宋体"/>
               </a:rPr>
               <a:t>由该反例引出主模型设计：</a:t>
             </a:r>
@@ -18574,8 +20544,9 @@
                 <a:solidFill>
                   <a:srgbClr val="262626"/>
                 </a:solidFill>
-                <a:latin typeface="微软雅黑"/>
-                <a:ea typeface="微软雅黑"/>
+                <a:latin typeface="宋体"/>
+                <a:ea typeface="宋体"/>
+                <a:cs typeface="宋体"/>
               </a:rPr>
               <a:t>先拟合线性趋势，再以高斯过程建模残差，趋势项与残差项均显式携带方差</a:t>
             </a:r>
@@ -18584,8 +20555,9 @@
                 <a:solidFill>
                   <a:srgbClr val="262626"/>
                 </a:solidFill>
-                <a:latin typeface="微软雅黑"/>
-                <a:ea typeface="微软雅黑"/>
+                <a:latin typeface="宋体"/>
+                <a:ea typeface="宋体"/>
+                <a:cs typeface="宋体"/>
               </a:rPr>
               <a:t>。</a:t>
             </a:r>
@@ -18597,6 +20569,101 @@
   <p:clrMapOvr>
     <a:masterClrMapping/>
   </p:clrMapOvr>
+  <mc:AlternateContent xmlns:mc="http://schemas.openxmlformats.org/markup-compatibility/2006">
+    <mc:Choice xmlns:p14="http://schemas.microsoft.com/office/powerpoint/2010/main" Requires="p14">
+      <p:transition spd="slow" p14:dur="2000" advTm="4471"/>
+    </mc:Choice>
+    <mc:Fallback>
+      <p:transition spd="slow" advTm="4471"/>
+    </mc:Fallback>
+  </mc:AlternateContent>
+  <p:timing>
+    <p:tnLst>
+      <p:par>
+        <p:cTn id="1" dur="indefinite" restart="never" nodeType="tmRoot">
+          <p:childTnLst>
+            <p:seq concurrent="1" nextAc="seek">
+              <p:cTn id="2" dur="indefinite" nodeType="mainSeq">
+                <p:childTnLst>
+                  <p:par>
+                    <p:cTn id="3" fill="hold">
+                      <p:stCondLst>
+                        <p:cond delay="indefinite"/>
+                        <p:cond evt="onBegin" delay="0">
+                          <p:tn val="2"/>
+                        </p:cond>
+                      </p:stCondLst>
+                      <p:childTnLst>
+                        <p:par>
+                          <p:cTn id="4" fill="hold">
+                            <p:stCondLst>
+                              <p:cond delay="0"/>
+                            </p:stCondLst>
+                            <p:childTnLst>
+                              <p:par>
+                                <p:cTn id="5" presetID="1" presetClass="mediacall" presetSubtype="0" fill="hold" nodeType="afterEffect">
+                                  <p:stCondLst>
+                                    <p:cond delay="0"/>
+                                  </p:stCondLst>
+                                  <p:childTnLst>
+                                    <p:cmd type="call" cmd="playFrom(0.0)">
+                                      <p:cBhvr>
+                                        <p:cTn id="6" dur="1" fill="hold"/>
+                                        <p:tgtEl>
+                                          <p:spTgt spid="18"/>
+                                        </p:tgtEl>
+                                      </p:cBhvr>
+                                    </p:cmd>
+                                  </p:childTnLst>
+                                </p:cTn>
+                              </p:par>
+                            </p:childTnLst>
+                          </p:cTn>
+                        </p:par>
+                      </p:childTnLst>
+                    </p:cTn>
+                  </p:par>
+                </p:childTnLst>
+              </p:cTn>
+              <p:prevCondLst>
+                <p:cond evt="onPrev" delay="0">
+                  <p:tgtEl>
+                    <p:sldTgt/>
+                  </p:tgtEl>
+                </p:cond>
+              </p:prevCondLst>
+              <p:nextCondLst>
+                <p:cond evt="onNext" delay="0">
+                  <p:tgtEl>
+                    <p:sldTgt/>
+                  </p:tgtEl>
+                </p:cond>
+              </p:nextCondLst>
+            </p:seq>
+            <p:audio isNarration="1">
+              <p:cMediaNode vol="80000" showWhenStopped="0">
+                <p:cTn id="7" fill="hold" display="0">
+                  <p:stCondLst>
+                    <p:cond delay="indefinite"/>
+                  </p:stCondLst>
+                  <p:endCondLst>
+                    <p:cond evt="onStopAudio" delay="0">
+                      <p:tgtEl>
+                        <p:sldTgt/>
+                      </p:tgtEl>
+                    </p:cond>
+                  </p:endCondLst>
+                </p:cTn>
+                <p:tgtEl>
+                  <p:spTgt spid="18"/>
+                </p:tgtEl>
+              </p:cMediaNode>
+            </p:audio>
+          </p:childTnLst>
+        </p:cTn>
+      </p:par>
+    </p:tnLst>
+  </p:timing>
 </p:sld>
 </file>
 
@@ -18787,8 +20854,9 @@
                 <a:solidFill>
                   <a:srgbClr val="BFCDE6"/>
                 </a:solidFill>
-                <a:latin typeface="微软雅黑"/>
-                <a:ea typeface="微软雅黑"/>
+                <a:latin typeface="宋体"/>
+                <a:ea typeface="宋体"/>
+                <a:cs typeface="宋体"/>
               </a:rPr>
               <a:t>04 · 结果</a:t>
             </a:r>
@@ -18830,8 +20898,9 @@
                 <a:solidFill>
                   <a:srgbClr val="FFFFFF"/>
                 </a:solidFill>
-                <a:latin typeface="微软雅黑"/>
-                <a:ea typeface="微软雅黑"/>
+                <a:latin typeface="宋体"/>
+                <a:ea typeface="宋体"/>
+                <a:cs typeface="宋体"/>
               </a:rPr>
               <a:t>趋势和高斯过程回归的寿命后验分布</a:t>
             </a:r>
@@ -18873,8 +20942,9 @@
                 <a:solidFill>
                   <a:srgbClr val="FFFFFF"/>
                 </a:solidFill>
-                <a:latin typeface="微软雅黑"/>
-                <a:ea typeface="微软雅黑"/>
+                <a:latin typeface="宋体"/>
+                <a:ea typeface="宋体"/>
+                <a:cs typeface="宋体"/>
               </a:rPr>
               <a:t>09</a:t>
             </a:r>
@@ -18883,8 +20953,9 @@
                 <a:solidFill>
                   <a:srgbClr val="9FB3D6"/>
                 </a:solidFill>
-                <a:latin typeface="微软雅黑"/>
-                <a:ea typeface="微软雅黑"/>
+                <a:latin typeface="宋体"/>
+                <a:ea typeface="宋体"/>
+                <a:cs typeface="宋体"/>
               </a:rPr>
               <a:t> / 13</a:t>
             </a:r>
@@ -18900,7 +20971,7 @@
           <p:nvPr/>
         </p:nvPicPr>
         <p:blipFill>
-          <a:blip r:embed="rId3"/>
+          <a:blip r:embed="rId5"/>
           <a:stretch>
             <a:fillRect/>
           </a:stretch>
@@ -18929,7 +21000,7 @@
           <p:nvPr/>
         </p:nvPicPr>
         <p:blipFill>
-          <a:blip r:embed="rId4"/>
+          <a:blip r:embed="rId6"/>
           <a:stretch>
             <a:fillRect/>
           </a:stretch>
@@ -18984,8 +21055,9 @@
                 <a:solidFill>
                   <a:srgbClr val="1F3864"/>
                 </a:solidFill>
-                <a:latin typeface="微软雅黑"/>
-                <a:ea typeface="微软雅黑"/>
+                <a:latin typeface="宋体"/>
+                <a:ea typeface="宋体"/>
+                <a:cs typeface="宋体"/>
               </a:rPr>
               <a:t>结构：</a:t>
             </a:r>
@@ -18994,8 +21066,9 @@
                 <a:solidFill>
                   <a:srgbClr val="262626"/>
                 </a:solidFill>
-                <a:latin typeface="微软雅黑"/>
-                <a:ea typeface="微软雅黑"/>
+                <a:latin typeface="宋体"/>
+                <a:ea typeface="宋体"/>
+                <a:cs typeface="宋体"/>
               </a:rPr>
               <a:t>cap</a:t>
             </a:r>
@@ -19004,8 +21077,9 @@
                 <a:solidFill>
                   <a:srgbClr val="262626"/>
                 </a:solidFill>
-                <a:latin typeface="微软雅黑"/>
-                <a:ea typeface="微软雅黑"/>
+                <a:latin typeface="宋体"/>
+                <a:ea typeface="宋体"/>
+                <a:cs typeface="宋体"/>
               </a:rPr>
               <a:t>(t) = </a:t>
             </a:r>
@@ -19014,8 +21088,9 @@
                 <a:solidFill>
                   <a:srgbClr val="262626"/>
                 </a:solidFill>
-                <a:latin typeface="微软雅黑"/>
-                <a:ea typeface="微软雅黑"/>
+                <a:latin typeface="宋体"/>
+                <a:ea typeface="宋体"/>
+                <a:cs typeface="宋体"/>
               </a:rPr>
               <a:t>线性趋势和残差</a:t>
             </a:r>
@@ -19024,8 +21099,9 @@
                 <a:solidFill>
                   <a:srgbClr val="262626"/>
                 </a:solidFill>
-                <a:latin typeface="微软雅黑"/>
-                <a:ea typeface="微软雅黑"/>
+                <a:latin typeface="宋体"/>
+                <a:ea typeface="宋体"/>
+                <a:cs typeface="宋体"/>
               </a:rPr>
               <a:t> GP </a:t>
             </a:r>
@@ -19034,8 +21110,9 @@
                 <a:solidFill>
                   <a:srgbClr val="262626"/>
                 </a:solidFill>
-                <a:latin typeface="微软雅黑"/>
-                <a:ea typeface="微软雅黑"/>
+                <a:latin typeface="宋体"/>
+                <a:ea typeface="宋体"/>
+                <a:cs typeface="宋体"/>
               </a:rPr>
               <a:t>之和；趋势参数方差显式传播</a:t>
             </a:r>
@@ -19061,8 +21138,9 @@
                 <a:solidFill>
                   <a:srgbClr val="1F3864"/>
                 </a:solidFill>
-                <a:latin typeface="微软雅黑"/>
-                <a:ea typeface="微软雅黑"/>
+                <a:latin typeface="宋体"/>
+                <a:ea typeface="宋体"/>
+                <a:cs typeface="宋体"/>
               </a:rPr>
               <a:t>产出：</a:t>
             </a:r>
@@ -19071,8 +21149,9 @@
                 <a:solidFill>
                   <a:srgbClr val="262626"/>
                 </a:solidFill>
-                <a:latin typeface="微软雅黑"/>
-                <a:ea typeface="微软雅黑"/>
+                <a:latin typeface="宋体"/>
+                <a:ea typeface="宋体"/>
+                <a:cs typeface="宋体"/>
               </a:rPr>
               <a:t>300 </a:t>
             </a:r>
@@ -19081,8 +21160,9 @@
                 <a:solidFill>
                   <a:srgbClr val="262626"/>
                 </a:solidFill>
-                <a:latin typeface="微软雅黑"/>
-                <a:ea typeface="微软雅黑"/>
+                <a:latin typeface="宋体"/>
+                <a:ea typeface="宋体"/>
+                <a:cs typeface="宋体"/>
               </a:rPr>
               <a:t>条后验路径各自求穿越，EOL</a:t>
             </a:r>
@@ -19091,8 +21171,9 @@
                 <a:solidFill>
                   <a:srgbClr val="262626"/>
                 </a:solidFill>
-                <a:latin typeface="微软雅黑"/>
-                <a:ea typeface="微软雅黑"/>
+                <a:latin typeface="宋体"/>
+                <a:ea typeface="宋体"/>
+                <a:cs typeface="宋体"/>
               </a:rPr>
               <a:t> 成为分布（B0005 </a:t>
             </a:r>
@@ -19101,8 +21182,9 @@
                 <a:solidFill>
                   <a:srgbClr val="262626"/>
                 </a:solidFill>
-                <a:latin typeface="微软雅黑"/>
-                <a:ea typeface="微软雅黑"/>
+                <a:latin typeface="宋体"/>
+                <a:ea typeface="宋体"/>
+                <a:cs typeface="宋体"/>
               </a:rPr>
               <a:t>中位</a:t>
             </a:r>
@@ -19111,8 +21193,9 @@
                 <a:solidFill>
                   <a:srgbClr val="262626"/>
                 </a:solidFill>
-                <a:latin typeface="微软雅黑"/>
-                <a:ea typeface="微软雅黑"/>
+                <a:latin typeface="宋体"/>
+                <a:ea typeface="宋体"/>
+                <a:cs typeface="宋体"/>
               </a:rPr>
               <a:t> 145，90% </a:t>
             </a:r>
@@ -19121,8 +21204,9 @@
                 <a:solidFill>
                   <a:srgbClr val="262626"/>
                 </a:solidFill>
-                <a:latin typeface="微软雅黑"/>
-                <a:ea typeface="微软雅黑"/>
+                <a:latin typeface="宋体"/>
+                <a:ea typeface="宋体"/>
+                <a:cs typeface="宋体"/>
               </a:rPr>
               <a:t>区间</a:t>
             </a:r>
@@ -19131,8 +21215,9 @@
                 <a:solidFill>
                   <a:srgbClr val="262626"/>
                 </a:solidFill>
-                <a:latin typeface="微软雅黑"/>
-                <a:ea typeface="微软雅黑"/>
+                <a:latin typeface="宋体"/>
+                <a:ea typeface="宋体"/>
+                <a:cs typeface="宋体"/>
               </a:rPr>
               <a:t> 129–164）</a:t>
             </a:r>
@@ -19151,8 +21236,9 @@
                 <a:solidFill>
                   <a:srgbClr val="E07B27"/>
                 </a:solidFill>
-                <a:latin typeface="微软雅黑"/>
-                <a:ea typeface="微软雅黑"/>
+                <a:latin typeface="宋体"/>
+                <a:ea typeface="宋体"/>
+                <a:cs typeface="宋体"/>
               </a:rPr>
               <a:t>适用性说明：RBF</a:t>
             </a:r>
@@ -19161,8 +21247,9 @@
                 <a:solidFill>
                   <a:srgbClr val="E07B27"/>
                 </a:solidFill>
-                <a:latin typeface="微软雅黑"/>
-                <a:ea typeface="微软雅黑"/>
+                <a:latin typeface="宋体"/>
+                <a:ea typeface="宋体"/>
+                <a:cs typeface="宋体"/>
               </a:rPr>
               <a:t> </a:t>
             </a:r>
@@ -19171,8 +21258,9 @@
                 <a:solidFill>
                   <a:srgbClr val="E07B27"/>
                 </a:solidFill>
-                <a:latin typeface="微软雅黑"/>
-                <a:ea typeface="微软雅黑"/>
+                <a:latin typeface="宋体"/>
+                <a:ea typeface="宋体"/>
+                <a:cs typeface="宋体"/>
               </a:rPr>
               <a:t>核相关长度仅</a:t>
             </a:r>
@@ -19181,8 +21269,9 @@
                 <a:solidFill>
                   <a:srgbClr val="E07B27"/>
                 </a:solidFill>
-                <a:latin typeface="微软雅黑"/>
-                <a:ea typeface="微软雅黑"/>
+                <a:latin typeface="宋体"/>
+                <a:ea typeface="宋体"/>
+                <a:cs typeface="宋体"/>
               </a:rPr>
               <a:t> 3.6–23 </a:t>
             </a:r>
@@ -19191,8 +21280,9 @@
                 <a:solidFill>
                   <a:srgbClr val="E07B27"/>
                 </a:solidFill>
-                <a:latin typeface="微软雅黑"/>
-                <a:ea typeface="微软雅黑"/>
+                <a:latin typeface="宋体"/>
+                <a:ea typeface="宋体"/>
+                <a:cs typeface="宋体"/>
               </a:rPr>
               <a:t>循环，外推</a:t>
             </a:r>
@@ -19201,8 +21291,9 @@
                 <a:solidFill>
                   <a:srgbClr val="E07B27"/>
                 </a:solidFill>
-                <a:latin typeface="微软雅黑"/>
-                <a:ea typeface="微软雅黑"/>
+                <a:latin typeface="宋体"/>
+                <a:ea typeface="宋体"/>
+                <a:cs typeface="宋体"/>
               </a:rPr>
               <a:t> 52–88，远场点预测退化为趋势线，GP </a:t>
             </a:r>
@@ -19211,8 +21302,9 @@
                 <a:solidFill>
                   <a:srgbClr val="E07B27"/>
                 </a:solidFill>
-                <a:latin typeface="微软雅黑"/>
-                <a:ea typeface="微软雅黑"/>
+                <a:latin typeface="宋体"/>
+                <a:ea typeface="宋体"/>
+                <a:cs typeface="宋体"/>
               </a:rPr>
               <a:t>的贡献在于如实放大区间而非提升精度</a:t>
             </a:r>
@@ -19308,8 +21400,9 @@
                 <a:solidFill>
                   <a:srgbClr val="262626"/>
                 </a:solidFill>
-                <a:latin typeface="微软雅黑"/>
-                <a:ea typeface="微软雅黑"/>
+                <a:latin typeface="宋体"/>
+                <a:ea typeface="宋体"/>
+                <a:cs typeface="宋体"/>
               </a:rPr>
               <a:t>该区间仅含数据层不确定性（残差噪声与趋势参数方差</a:t>
             </a:r>
@@ -19318,8 +21411,9 @@
                 <a:solidFill>
                   <a:srgbClr val="262626"/>
                 </a:solidFill>
-                <a:latin typeface="微软雅黑"/>
-                <a:ea typeface="微软雅黑"/>
+                <a:latin typeface="宋体"/>
+                <a:ea typeface="宋体"/>
+                <a:cs typeface="宋体"/>
               </a:rPr>
               <a:t>），</a:t>
             </a:r>
@@ -19328,8 +21422,9 @@
                 <a:solidFill>
                   <a:srgbClr val="262626"/>
                 </a:solidFill>
-                <a:latin typeface="微软雅黑"/>
-                <a:ea typeface="微软雅黑"/>
+                <a:latin typeface="宋体"/>
+                <a:ea typeface="宋体"/>
+                <a:cs typeface="宋体"/>
               </a:rPr>
               <a:t>不含定义层与模型形式层，其校准缺口在第</a:t>
             </a:r>
@@ -19338,8 +21433,9 @@
                 <a:solidFill>
                   <a:srgbClr val="262626"/>
                 </a:solidFill>
-                <a:latin typeface="微软雅黑"/>
-                <a:ea typeface="微软雅黑"/>
+                <a:latin typeface="宋体"/>
+                <a:ea typeface="宋体"/>
+                <a:cs typeface="宋体"/>
               </a:rPr>
               <a:t> 6 </a:t>
             </a:r>
@@ -19348,8 +21444,9 @@
                 <a:solidFill>
                   <a:srgbClr val="262626"/>
                 </a:solidFill>
-                <a:latin typeface="微软雅黑"/>
-                <a:ea typeface="微软雅黑"/>
+                <a:latin typeface="宋体"/>
+                <a:ea typeface="宋体"/>
+                <a:cs typeface="宋体"/>
               </a:rPr>
               <a:t>章定量归因</a:t>
             </a:r>
@@ -19358,8 +21455,9 @@
                 <a:solidFill>
                   <a:srgbClr val="262626"/>
                 </a:solidFill>
-                <a:latin typeface="微软雅黑"/>
-                <a:ea typeface="微软雅黑"/>
+                <a:latin typeface="宋体"/>
+                <a:ea typeface="宋体"/>
+                <a:cs typeface="宋体"/>
               </a:rPr>
               <a:t>。</a:t>
             </a:r>
@@ -19371,6 +21469,101 @@
   <p:clrMapOvr>
     <a:masterClrMapping/>
   </p:clrMapOvr>
+  <mc:AlternateContent xmlns:mc="http://schemas.openxmlformats.org/markup-compatibility/2006">
+    <mc:Choice xmlns:p14="http://schemas.microsoft.com/office/powerpoint/2010/main" Requires="p14">
+      <p:transition spd="slow" p14:dur="2000" advTm="283"/>
+    </mc:Choice>
+    <mc:Fallback>
+      <p:transition spd="slow" advTm="283"/>
+    </mc:Fallback>
+  </mc:AlternateContent>
+  <p:timing>
+    <p:tnLst>
+      <p:par>
+        <p:cTn id="1" dur="indefinite" restart="never" nodeType="tmRoot">
+          <p:childTnLst>
+            <p:seq concurrent="1" nextAc="seek">
+              <p:cTn id="2" dur="indefinite" nodeType="mainSeq">
+                <p:childTnLst>
+                  <p:par>
+                    <p:cTn id="3" fill="hold">
+                      <p:stCondLst>
+                        <p:cond delay="indefinite"/>
+                        <p:cond evt="onBegin" delay="0">
+                          <p:tn val="2"/>
+                        </p:cond>
+                      </p:stCondLst>
+                      <p:childTnLst>
+                        <p:par>
+                          <p:cTn id="4" fill="hold">
+                            <p:stCondLst>
+                              <p:cond delay="0"/>
+                            </p:stCondLst>
+                            <p:childTnLst>
+                              <p:par>
+                                <p:cTn id="5" presetID="1" presetClass="mediacall" presetSubtype="0" fill="hold" nodeType="afterEffect">
+                                  <p:stCondLst>
+                                    <p:cond delay="0"/>
+                                  </p:stCondLst>
+                                  <p:childTnLst>
+                                    <p:cmd type="call" cmd="playFrom(0.0)">
+                                      <p:cBhvr>
+                                        <p:cTn id="6" dur="1" fill="hold"/>
+                                        <p:tgtEl>
+                                          <p:spTgt spid="13"/>
+                                        </p:tgtEl>
+                                      </p:cBhvr>
+                                    </p:cmd>
+                                  </p:childTnLst>
+                                </p:cTn>
+                              </p:par>
+                            </p:childTnLst>
+                          </p:cTn>
+                        </p:par>
+                      </p:childTnLst>
+                    </p:cTn>
+                  </p:par>
+                </p:childTnLst>
+              </p:cTn>
+              <p:prevCondLst>
+                <p:cond evt="onPrev" delay="0">
+                  <p:tgtEl>
+                    <p:sldTgt/>
+                  </p:tgtEl>
+                </p:cond>
+              </p:prevCondLst>
+              <p:nextCondLst>
+                <p:cond evt="onNext" delay="0">
+                  <p:tgtEl>
+                    <p:sldTgt/>
+                  </p:tgtEl>
+                </p:cond>
+              </p:nextCondLst>
+            </p:seq>
+            <p:audio isNarration="1">
+              <p:cMediaNode vol="80000" showWhenStopped="0">
+                <p:cTn id="7" fill="hold" display="0">
+                  <p:stCondLst>
+                    <p:cond delay="indefinite"/>
+                  </p:stCondLst>
+                  <p:endCondLst>
+                    <p:cond evt="onStopAudio" delay="0">
+                      <p:tgtEl>
+                        <p:sldTgt/>
+                      </p:tgtEl>
+                    </p:cond>
+                  </p:endCondLst>
+                </p:cTn>
+                <p:tgtEl>
+                  <p:spTgt spid="13"/>
+                </p:tgtEl>
+              </p:cMediaNode>
+            </p:audio>
+          </p:childTnLst>
+        </p:cTn>
+      </p:par>
+    </p:tnLst>
+  </p:timing>
 </p:sld>
 </file>
 

--- a/report/20_题3_黄锦添_v3.pptx
+++ b/report/20_题3_黄锦添_v3.pptx
@@ -1082,36 +1082,7 @@
           <a:lstStyle/>
           <a:p>
             <a:r>
-              <a:rPr dirty="0" err="1"/>
-              <a:t>个体差异按五个维度量化：初始容量相差</a:t>
-            </a:r>
-            <a:r>
-              <a:rPr dirty="0"/>
-              <a:t> 9.7%，</a:t>
-            </a:r>
-            <a:r>
-              <a:rPr dirty="0" err="1"/>
-              <a:t>衰减最快者是最慢者的</a:t>
-            </a:r>
-            <a:r>
-              <a:rPr dirty="0"/>
-              <a:t> 1.56 </a:t>
-            </a:r>
-            <a:r>
-              <a:rPr dirty="0" err="1"/>
-              <a:t>倍。同批三块的波动</a:t>
-            </a:r>
-            <a:r>
-              <a:rPr dirty="0"/>
-              <a:t> 82.4% </a:t>
-            </a:r>
-            <a:r>
-              <a:rPr dirty="0" err="1"/>
-              <a:t>来自共同成分，远高于独立基准的三分之一，说明回升不是随机抖动，不能平滑</a:t>
-            </a:r>
-            <a:r>
-              <a:rPr dirty="0"/>
-              <a:t>。</a:t>
+              <a:t>个体差异按五个维度量化：初始容量相差 9.7%，衰减最快者是最慢者的 1.56 倍。同批三块的波动 82.4% 来自共同成分，远高于独立基准的三分之一，说明回升不是随机抖动，不能平滑。</a:t>
             </a:r>
           </a:p>
         </p:txBody>
@@ -1181,36 +1152,7 @@
           <a:lstStyle/>
           <a:p>
             <a:r>
-              <a:rPr dirty="0" err="1"/>
-              <a:t>本页是全文口径的起点。阈值每移动</a:t>
-            </a:r>
-            <a:r>
-              <a:rPr dirty="0"/>
-              <a:t> 0.01 </a:t>
-            </a:r>
-            <a:r>
-              <a:rPr dirty="0" err="1"/>
-              <a:t>Ah，寿命相差</a:t>
-            </a:r>
-            <a:r>
-              <a:rPr dirty="0"/>
-              <a:t> 3 至 4 </a:t>
-            </a:r>
-            <a:r>
-              <a:rPr dirty="0" err="1"/>
-              <a:t>个循环；但排序在</a:t>
-            </a:r>
-            <a:r>
-              <a:rPr dirty="0"/>
-              <a:t> 80 </a:t>
-            </a:r>
-            <a:r>
-              <a:rPr dirty="0" err="1"/>
-              <a:t>个阈值上从未翻转。因此后文寿命数字都附带阈值口径</a:t>
-            </a:r>
-            <a:r>
-              <a:rPr dirty="0"/>
-              <a:t>。</a:t>
+              <a:t>本页是全文口径的起点。阈值每移动 0.01 Ah，寿命相差 3 至 4 个循环；但排序在 80 个阈值上从未翻转。因此后文寿命数字都附带阈值口径。</a:t>
             </a:r>
           </a:p>
         </p:txBody>
@@ -1694,7 +1636,7 @@
           <a:p>
             <a:fld id="{5BCAD085-E8A6-8845-BD4E-CB4CCA059FC4}" type="datetimeFigureOut">
               <a:rPr lang="en-US" smtClean="0"/>
-              <a:t>10/31/2026</a:t>
+              <a:t>10/30/2026</a:t>
             </a:fld>
             <a:endParaRPr lang="en-US"/>
           </a:p>
@@ -1862,7 +1804,7 @@
           <a:p>
             <a:fld id="{5BCAD085-E8A6-8845-BD4E-CB4CCA059FC4}" type="datetimeFigureOut">
               <a:rPr lang="en-US" smtClean="0"/>
-              <a:t>10/31/2026</a:t>
+              <a:t>10/30/2026</a:t>
             </a:fld>
             <a:endParaRPr lang="en-US"/>
           </a:p>
@@ -2040,7 +1982,7 @@
           <a:p>
             <a:fld id="{5BCAD085-E8A6-8845-BD4E-CB4CCA059FC4}" type="datetimeFigureOut">
               <a:rPr lang="en-US" smtClean="0"/>
-              <a:t>10/31/2026</a:t>
+              <a:t>10/30/2026</a:t>
             </a:fld>
             <a:endParaRPr lang="en-US"/>
           </a:p>
@@ -2208,7 +2150,7 @@
           <a:p>
             <a:fld id="{5BCAD085-E8A6-8845-BD4E-CB4CCA059FC4}" type="datetimeFigureOut">
               <a:rPr lang="en-US" smtClean="0"/>
-              <a:t>10/31/2026</a:t>
+              <a:t>10/30/2026</a:t>
             </a:fld>
             <a:endParaRPr lang="en-US"/>
           </a:p>
@@ -2453,7 +2395,7 @@
           <a:p>
             <a:fld id="{5BCAD085-E8A6-8845-BD4E-CB4CCA059FC4}" type="datetimeFigureOut">
               <a:rPr lang="en-US" smtClean="0"/>
-              <a:t>10/31/2026</a:t>
+              <a:t>10/30/2026</a:t>
             </a:fld>
             <a:endParaRPr lang="en-US"/>
           </a:p>
@@ -2738,7 +2680,7 @@
           <a:p>
             <a:fld id="{5BCAD085-E8A6-8845-BD4E-CB4CCA059FC4}" type="datetimeFigureOut">
               <a:rPr lang="en-US" smtClean="0"/>
-              <a:t>10/31/2026</a:t>
+              <a:t>10/30/2026</a:t>
             </a:fld>
             <a:endParaRPr lang="en-US"/>
           </a:p>
@@ -3157,7 +3099,7 @@
           <a:p>
             <a:fld id="{5BCAD085-E8A6-8845-BD4E-CB4CCA059FC4}" type="datetimeFigureOut">
               <a:rPr lang="en-US" smtClean="0"/>
-              <a:t>10/31/2026</a:t>
+              <a:t>10/30/2026</a:t>
             </a:fld>
             <a:endParaRPr lang="en-US"/>
           </a:p>
@@ -3274,7 +3216,7 @@
           <a:p>
             <a:fld id="{5BCAD085-E8A6-8845-BD4E-CB4CCA059FC4}" type="datetimeFigureOut">
               <a:rPr lang="en-US" smtClean="0"/>
-              <a:t>10/31/2026</a:t>
+              <a:t>10/30/2026</a:t>
             </a:fld>
             <a:endParaRPr lang="en-US"/>
           </a:p>
@@ -3369,7 +3311,7 @@
           <a:p>
             <a:fld id="{5BCAD085-E8A6-8845-BD4E-CB4CCA059FC4}" type="datetimeFigureOut">
               <a:rPr lang="en-US" smtClean="0"/>
-              <a:t>10/31/2026</a:t>
+              <a:t>10/30/2026</a:t>
             </a:fld>
             <a:endParaRPr lang="en-US"/>
           </a:p>
@@ -3644,7 +3586,7 @@
           <a:p>
             <a:fld id="{5BCAD085-E8A6-8845-BD4E-CB4CCA059FC4}" type="datetimeFigureOut">
               <a:rPr lang="en-US" smtClean="0"/>
-              <a:t>10/31/2026</a:t>
+              <a:t>10/30/2026</a:t>
             </a:fld>
             <a:endParaRPr lang="en-US"/>
           </a:p>
@@ -3896,7 +3838,7 @@
           <a:p>
             <a:fld id="{5BCAD085-E8A6-8845-BD4E-CB4CCA059FC4}" type="datetimeFigureOut">
               <a:rPr lang="en-US" smtClean="0"/>
-              <a:t>10/31/2026</a:t>
+              <a:t>10/30/2026</a:t>
             </a:fld>
             <a:endParaRPr lang="en-US"/>
           </a:p>
@@ -4107,7 +4049,7 @@
           <a:p>
             <a:fld id="{5BCAD085-E8A6-8845-BD4E-CB4CCA059FC4}" type="datetimeFigureOut">
               <a:rPr lang="en-US" smtClean="0"/>
-              <a:t>10/31/2026</a:t>
+              <a:t>10/30/2026</a:t>
             </a:fld>
             <a:endParaRPr lang="en-US"/>
           </a:p>
@@ -5135,101 +5077,6 @@
   <p:clrMapOvr>
     <a:masterClrMapping/>
   </p:clrMapOvr>
-  <mc:AlternateContent xmlns:mc="http://schemas.openxmlformats.org/markup-compatibility/2006">
-    <mc:Choice xmlns:p14="http://schemas.microsoft.com/office/powerpoint/2010/main" Requires="p14">
-      <p:transition spd="slow" p14:dur="2000" advTm="5498"/>
-    </mc:Choice>
-    <mc:Fallback>
-      <p:transition spd="slow" advTm="5498"/>
-    </mc:Fallback>
-  </mc:AlternateContent>
-  <p:timing>
-    <p:tnLst>
-      <p:par>
-        <p:cTn id="1" dur="indefinite" restart="never" nodeType="tmRoot">
-          <p:childTnLst>
-            <p:seq concurrent="1" nextAc="seek">
-              <p:cTn id="2" dur="indefinite" nodeType="mainSeq">
-                <p:childTnLst>
-                  <p:par>
-                    <p:cTn id="3" fill="hold">
-                      <p:stCondLst>
-                        <p:cond delay="indefinite"/>
-                        <p:cond evt="onBegin" delay="0">
-                          <p:tn val="2"/>
-                        </p:cond>
-                      </p:stCondLst>
-                      <p:childTnLst>
-                        <p:par>
-                          <p:cTn id="4" fill="hold">
-                            <p:stCondLst>
-                              <p:cond delay="0"/>
-                            </p:stCondLst>
-                            <p:childTnLst>
-                              <p:par>
-                                <p:cTn id="5" presetID="1" presetClass="mediacall" presetSubtype="0" fill="hold" nodeType="afterEffect">
-                                  <p:stCondLst>
-                                    <p:cond delay="0"/>
-                                  </p:stCondLst>
-                                  <p:childTnLst>
-                                    <p:cmd type="call" cmd="playFrom(0.0)">
-                                      <p:cBhvr>
-                                        <p:cTn id="6" dur="1" fill="hold"/>
-                                        <p:tgtEl>
-                                          <p:spTgt spid="16"/>
-                                        </p:tgtEl>
-                                      </p:cBhvr>
-                                    </p:cmd>
-                                  </p:childTnLst>
-                                </p:cTn>
-                              </p:par>
-                            </p:childTnLst>
-                          </p:cTn>
-                        </p:par>
-                      </p:childTnLst>
-                    </p:cTn>
-                  </p:par>
-                </p:childTnLst>
-              </p:cTn>
-              <p:prevCondLst>
-                <p:cond evt="onPrev" delay="0">
-                  <p:tgtEl>
-                    <p:sldTgt/>
-                  </p:tgtEl>
-                </p:cond>
-              </p:prevCondLst>
-              <p:nextCondLst>
-                <p:cond evt="onNext" delay="0">
-                  <p:tgtEl>
-                    <p:sldTgt/>
-                  </p:tgtEl>
-                </p:cond>
-              </p:nextCondLst>
-            </p:seq>
-            <p:audio isNarration="1">
-              <p:cMediaNode vol="80000" showWhenStopped="0">
-                <p:cTn id="7" fill="hold" display="0">
-                  <p:stCondLst>
-                    <p:cond delay="indefinite"/>
-                  </p:stCondLst>
-                  <p:endCondLst>
-                    <p:cond evt="onStopAudio" delay="0">
-                      <p:tgtEl>
-                        <p:sldTgt/>
-                      </p:tgtEl>
-                    </p:cond>
-                  </p:endCondLst>
-                </p:cTn>
-                <p:tgtEl>
-                  <p:spTgt spid="16"/>
-                </p:tgtEl>
-              </p:cMediaNode>
-            </p:audio>
-          </p:childTnLst>
-        </p:cTn>
-      </p:par>
-    </p:tnLst>
-  </p:timing>
 </p:sld>
 </file>
 
@@ -5919,7 +5766,7 @@
               </a:spcAft>
             </a:pPr>
             <a:r>
-              <a:rPr sz="1050" b="0" dirty="0" err="1">
+              <a:rPr sz="1050" b="0">
                 <a:solidFill>
                   <a:srgbClr val="262626"/>
                 </a:solidFill>
@@ -5927,37 +5774,8 @@
                 <a:ea typeface="宋体"/>
                 <a:cs typeface="宋体"/>
               </a:rPr>
-              <a:t>模型形式选择引入的</a:t>
-            </a:r>
-            <a:r>
-              <a:rPr sz="1050" b="0" dirty="0">
-                <a:solidFill>
-                  <a:srgbClr val="262626"/>
-                </a:solidFill>
-                <a:latin typeface="宋体"/>
-                <a:ea typeface="宋体"/>
-                <a:cs typeface="宋体"/>
-              </a:rPr>
-              <a:t> EOL </a:t>
-            </a:r>
-            <a:r>
-              <a:rPr sz="1050" b="0" dirty="0" err="1">
-                <a:solidFill>
-                  <a:srgbClr val="262626"/>
-                </a:solidFill>
-                <a:latin typeface="宋体"/>
-                <a:ea typeface="宋体"/>
-                <a:cs typeface="宋体"/>
-              </a:rPr>
-              <a:t>半极差，其宽度全部来自双指数模型，应解释为形式差异的上界</a:t>
-            </a:r>
-            <a:endParaRPr sz="1050" b="0" dirty="0">
-              <a:solidFill>
-                <a:srgbClr val="262626"/>
-              </a:solidFill>
-              <a:latin typeface="微软雅黑"/>
-              <a:ea typeface="微软雅黑"/>
-            </a:endParaRPr>
+              <a:t>模型形式选择引入的 EOL 半极差，其宽度全部来自双指数模型，应解释为形式差异的上界</a:t>
+            </a:r>
           </a:p>
         </p:txBody>
       </p:sp>
@@ -6216,7 +6034,7 @@
           <p:nvPr/>
         </p:nvPicPr>
         <p:blipFill>
-          <a:blip r:embed="rId5"/>
+          <a:blip r:embed="rId3"/>
           <a:stretch>
             <a:fillRect/>
           </a:stretch>
@@ -6240,7 +6058,7 @@
           <p:nvPr/>
         </p:nvPicPr>
         <p:blipFill>
-          <a:blip r:embed="rId6"/>
+          <a:blip r:embed="rId4"/>
           <a:stretch>
             <a:fillRect/>
           </a:stretch>
@@ -6260,101 +6078,6 @@
   <p:clrMapOvr>
     <a:masterClrMapping/>
   </p:clrMapOvr>
-  <mc:AlternateContent xmlns:mc="http://schemas.openxmlformats.org/markup-compatibility/2006">
-    <mc:Choice xmlns:p14="http://schemas.microsoft.com/office/powerpoint/2010/main" Requires="p14">
-      <p:transition spd="slow" p14:dur="2000" advTm="5312"/>
-    </mc:Choice>
-    <mc:Fallback>
-      <p:transition spd="slow" advTm="5312"/>
-    </mc:Fallback>
-  </mc:AlternateContent>
-  <p:timing>
-    <p:tnLst>
-      <p:par>
-        <p:cTn id="1" dur="indefinite" restart="never" nodeType="tmRoot">
-          <p:childTnLst>
-            <p:seq concurrent="1" nextAc="seek">
-              <p:cTn id="2" dur="indefinite" nodeType="mainSeq">
-                <p:childTnLst>
-                  <p:par>
-                    <p:cTn id="3" fill="hold">
-                      <p:stCondLst>
-                        <p:cond delay="indefinite"/>
-                        <p:cond evt="onBegin" delay="0">
-                          <p:tn val="2"/>
-                        </p:cond>
-                      </p:stCondLst>
-                      <p:childTnLst>
-                        <p:par>
-                          <p:cTn id="4" fill="hold">
-                            <p:stCondLst>
-                              <p:cond delay="0"/>
-                            </p:stCondLst>
-                            <p:childTnLst>
-                              <p:par>
-                                <p:cTn id="5" presetID="1" presetClass="mediacall" presetSubtype="0" fill="hold" nodeType="afterEffect">
-                                  <p:stCondLst>
-                                    <p:cond delay="0"/>
-                                  </p:stCondLst>
-                                  <p:childTnLst>
-                                    <p:cmd type="call" cmd="playFrom(0.0)">
-                                      <p:cBhvr>
-                                        <p:cTn id="6" dur="1" fill="hold"/>
-                                        <p:tgtEl>
-                                          <p:spTgt spid="8"/>
-                                        </p:tgtEl>
-                                      </p:cBhvr>
-                                    </p:cmd>
-                                  </p:childTnLst>
-                                </p:cTn>
-                              </p:par>
-                            </p:childTnLst>
-                          </p:cTn>
-                        </p:par>
-                      </p:childTnLst>
-                    </p:cTn>
-                  </p:par>
-                </p:childTnLst>
-              </p:cTn>
-              <p:prevCondLst>
-                <p:cond evt="onPrev" delay="0">
-                  <p:tgtEl>
-                    <p:sldTgt/>
-                  </p:tgtEl>
-                </p:cond>
-              </p:prevCondLst>
-              <p:nextCondLst>
-                <p:cond evt="onNext" delay="0">
-                  <p:tgtEl>
-                    <p:sldTgt/>
-                  </p:tgtEl>
-                </p:cond>
-              </p:nextCondLst>
-            </p:seq>
-            <p:audio isNarration="1">
-              <p:cMediaNode vol="80000" showWhenStopped="0">
-                <p:cTn id="7" fill="hold" display="0">
-                  <p:stCondLst>
-                    <p:cond delay="indefinite"/>
-                  </p:stCondLst>
-                  <p:endCondLst>
-                    <p:cond evt="onStopAudio" delay="0">
-                      <p:tgtEl>
-                        <p:sldTgt/>
-                      </p:tgtEl>
-                    </p:cond>
-                  </p:endCondLst>
-                </p:cTn>
-                <p:tgtEl>
-                  <p:spTgt spid="8"/>
-                </p:tgtEl>
-              </p:cMediaNode>
-            </p:audio>
-          </p:childTnLst>
-        </p:cTn>
-      </p:par>
-    </p:tnLst>
-  </p:timing>
 </p:sld>
 </file>
 
@@ -6954,7 +6677,7 @@
               </a:spcAft>
             </a:pPr>
             <a:r>
-              <a:rPr sz="1050" b="1" dirty="0">
+              <a:rPr sz="1050" b="1">
                 <a:solidFill>
                   <a:srgbClr val="E07B27"/>
                 </a:solidFill>
@@ -6962,70 +6685,8 @@
                 <a:ea typeface="宋体"/>
                 <a:cs typeface="宋体"/>
               </a:rPr>
-              <a:t>▪ </a:t>
-            </a:r>
-            <a:r>
-              <a:rPr sz="1050" b="1" dirty="0" err="1">
-                <a:solidFill>
-                  <a:srgbClr val="E07B27"/>
-                </a:solidFill>
-                <a:latin typeface="宋体"/>
-                <a:ea typeface="宋体"/>
-                <a:cs typeface="宋体"/>
-              </a:rPr>
-              <a:t>驱动因素是偏差：点预测中位偏差逐块差</a:t>
-            </a:r>
-            <a:r>
-              <a:rPr sz="1050" b="1" dirty="0">
-                <a:solidFill>
-                  <a:srgbClr val="E07B27"/>
-                </a:solidFill>
-                <a:latin typeface="宋体"/>
-                <a:ea typeface="宋体"/>
-                <a:cs typeface="宋体"/>
-              </a:rPr>
-              <a:t> 22.5 </a:t>
-            </a:r>
-            <a:r>
-              <a:rPr sz="1050" b="1" dirty="0" err="1">
-                <a:solidFill>
-                  <a:srgbClr val="E07B27"/>
-                </a:solidFill>
-                <a:latin typeface="宋体"/>
-                <a:ea typeface="宋体"/>
-                <a:cs typeface="宋体"/>
-              </a:rPr>
-              <a:t>倍，区间宽度只差</a:t>
-            </a:r>
-            <a:r>
-              <a:rPr sz="1050" b="1" dirty="0">
-                <a:solidFill>
-                  <a:srgbClr val="E07B27"/>
-                </a:solidFill>
-                <a:latin typeface="宋体"/>
-                <a:ea typeface="宋体"/>
-                <a:cs typeface="宋体"/>
-              </a:rPr>
-              <a:t> 1.15 </a:t>
-            </a:r>
-            <a:r>
-              <a:rPr sz="1050" b="1" dirty="0" err="1">
-                <a:solidFill>
-                  <a:srgbClr val="E07B27"/>
-                </a:solidFill>
-                <a:latin typeface="宋体"/>
-                <a:ea typeface="宋体"/>
-                <a:cs typeface="宋体"/>
-              </a:rPr>
-              <a:t>倍，区间宽度与预测精度相互独立</a:t>
-            </a:r>
-            <a:endParaRPr sz="1050" b="1" dirty="0">
-              <a:solidFill>
-                <a:srgbClr val="E07B27"/>
-              </a:solidFill>
-              <a:latin typeface="微软雅黑"/>
-              <a:ea typeface="微软雅黑"/>
-            </a:endParaRPr>
+              <a:t>▪ 驱动因素是偏差：点预测中位偏差逐块差 22.5 倍，区间宽度只差 1.15 倍，区间宽度与预测精度相互独立</a:t>
+            </a:r>
           </a:p>
           <a:p>
             <a:pPr algn="l">
@@ -7037,7 +6698,7 @@
               </a:spcAft>
             </a:pPr>
             <a:r>
-              <a:rPr sz="1050" b="1" dirty="0">
+              <a:rPr sz="1050" b="1">
                 <a:solidFill>
                   <a:srgbClr val="E07B27"/>
                 </a:solidFill>
@@ -7048,7 +6709,7 @@
               <a:t>▪ </a:t>
             </a:r>
             <a:r>
-              <a:rPr sz="1200" b="1" dirty="0">
+              <a:rPr sz="1200" b="1">
                 <a:solidFill>
                   <a:srgbClr val="1F3864"/>
                 </a:solidFill>
@@ -7059,7 +6720,7 @@
               <a:t>有效样本量受自相关折减：</a:t>
             </a:r>
             <a:r>
-              <a:rPr sz="1100" b="0" dirty="0">
+              <a:rPr sz="1100" b="0">
                 <a:solidFill>
                   <a:srgbClr val="262626"/>
                 </a:solidFill>
@@ -7067,29 +6728,7 @@
                 <a:ea typeface="宋体"/>
                 <a:cs typeface="宋体"/>
               </a:rPr>
-              <a:t>4 </a:t>
-            </a:r>
-            <a:r>
-              <a:rPr sz="1100" b="0" dirty="0" err="1">
-                <a:solidFill>
-                  <a:srgbClr val="262626"/>
-                </a:solidFill>
-                <a:latin typeface="宋体"/>
-                <a:ea typeface="宋体"/>
-                <a:cs typeface="宋体"/>
-              </a:rPr>
-              <a:t>条序列高度自相关，有效样本约</a:t>
-            </a:r>
-            <a:r>
-              <a:rPr sz="1100" b="0" dirty="0">
-                <a:solidFill>
-                  <a:srgbClr val="262626"/>
-                </a:solidFill>
-                <a:latin typeface="宋体"/>
-                <a:ea typeface="宋体"/>
-                <a:cs typeface="宋体"/>
-              </a:rPr>
-              <a:t> 109，块间差异在噪声范围内</a:t>
+              <a:t>4 条序列高度自相关，有效样本约 109，块间差异在噪声范围内</a:t>
             </a:r>
           </a:p>
           <a:p>
@@ -7102,7 +6741,7 @@
               </a:spcAft>
             </a:pPr>
             <a:r>
-              <a:rPr sz="1050" b="1" dirty="0">
+              <a:rPr sz="1050" b="1">
                 <a:solidFill>
                   <a:srgbClr val="E07B27"/>
                 </a:solidFill>
@@ -7113,7 +6752,7 @@
               <a:t>▪ </a:t>
             </a:r>
             <a:r>
-              <a:rPr sz="1200" b="1" dirty="0" err="1">
+              <a:rPr sz="1200" b="1">
                 <a:solidFill>
                   <a:srgbClr val="1F3864"/>
                 </a:solidFill>
@@ -7124,7 +6763,7 @@
               <a:t>结论随切分点摆动：</a:t>
             </a:r>
             <a:r>
-              <a:rPr sz="1100" b="0" dirty="0" err="1">
+              <a:rPr sz="1100" b="0">
                 <a:solidFill>
                   <a:srgbClr val="262626"/>
                 </a:solidFill>
@@ -7132,62 +6771,7 @@
                 <a:ea typeface="宋体"/>
                 <a:cs typeface="宋体"/>
               </a:rPr>
-              <a:t>M</a:t>
-            </a:r>
-            <a:r>
-              <a:rPr sz="1100" b="0" dirty="0">
-                <a:solidFill>
-                  <a:srgbClr val="262626"/>
-                </a:solidFill>
-                <a:latin typeface="宋体"/>
-                <a:ea typeface="宋体"/>
-                <a:cs typeface="宋体"/>
-              </a:rPr>
-              <a:t> = 60 / 80 / 100 </a:t>
-            </a:r>
-            <a:r>
-              <a:rPr sz="1100" b="0" dirty="0" err="1">
-                <a:solidFill>
-                  <a:srgbClr val="262626"/>
-                </a:solidFill>
-                <a:latin typeface="宋体"/>
-                <a:ea typeface="宋体"/>
-                <a:cs typeface="宋体"/>
-              </a:rPr>
-              <a:t>下合并覆盖率为</a:t>
-            </a:r>
-            <a:r>
-              <a:rPr sz="1100" b="0" dirty="0">
-                <a:solidFill>
-                  <a:srgbClr val="262626"/>
-                </a:solidFill>
-                <a:latin typeface="宋体"/>
-                <a:ea typeface="宋体"/>
-                <a:cs typeface="宋体"/>
-              </a:rPr>
-              <a:t> 34% / 63% / 67%，</a:t>
-            </a:r>
-            <a:r>
-              <a:rPr sz="1100" b="0" dirty="0" err="1">
-                <a:solidFill>
-                  <a:srgbClr val="262626"/>
-                </a:solidFill>
-                <a:latin typeface="宋体"/>
-                <a:ea typeface="宋体"/>
-                <a:cs typeface="宋体"/>
-              </a:rPr>
-              <a:t>引用必须带</a:t>
-            </a:r>
-            <a:r>
-              <a:rPr sz="1100" b="0" dirty="0">
-                <a:solidFill>
-                  <a:srgbClr val="262626"/>
-                </a:solidFill>
-                <a:latin typeface="宋体"/>
-                <a:ea typeface="宋体"/>
-                <a:cs typeface="宋体"/>
-              </a:rPr>
-              <a:t> M</a:t>
+              <a:t>M = 60 / 80 / 100 下合并覆盖率为 34% / 63% / 67%，引用必须带 M</a:t>
             </a:r>
           </a:p>
           <a:p>
@@ -7200,7 +6784,7 @@
               </a:spcAft>
             </a:pPr>
             <a:r>
-              <a:rPr sz="1050" b="1" dirty="0">
+              <a:rPr sz="1050" b="1">
                 <a:solidFill>
                   <a:srgbClr val="E07B27"/>
                 </a:solidFill>
@@ -7211,7 +6795,7 @@
               <a:t>▪ </a:t>
             </a:r>
             <a:r>
-              <a:rPr sz="1200" b="1" dirty="0" err="1">
+              <a:rPr sz="1200" b="1">
                 <a:solidFill>
                   <a:srgbClr val="1F3864"/>
                 </a:solidFill>
@@ -7219,54 +6803,10 @@
                 <a:ea typeface="宋体"/>
                 <a:cs typeface="宋体"/>
               </a:rPr>
-              <a:t>补到</a:t>
-            </a:r>
-            <a:r>
-              <a:rPr sz="1200" b="1" dirty="0">
-                <a:solidFill>
-                  <a:srgbClr val="1F3864"/>
-                </a:solidFill>
-                <a:latin typeface="宋体"/>
-                <a:ea typeface="宋体"/>
-                <a:cs typeface="宋体"/>
-              </a:rPr>
-              <a:t> 90% </a:t>
-            </a:r>
-            <a:r>
-              <a:rPr sz="1200" b="1" dirty="0" err="1">
-                <a:solidFill>
-                  <a:srgbClr val="1F3864"/>
-                </a:solidFill>
-                <a:latin typeface="宋体"/>
-                <a:ea typeface="宋体"/>
-                <a:cs typeface="宋体"/>
-              </a:rPr>
-              <a:t>需放宽</a:t>
-            </a:r>
-            <a:r>
-              <a:rPr sz="1200" b="1" dirty="0">
-                <a:solidFill>
-                  <a:srgbClr val="1F3864"/>
-                </a:solidFill>
-                <a:latin typeface="宋体"/>
-                <a:ea typeface="宋体"/>
-                <a:cs typeface="宋体"/>
-              </a:rPr>
-              <a:t> 2.8 </a:t>
-            </a:r>
-            <a:r>
-              <a:rPr sz="1200" b="1" dirty="0" err="1">
-                <a:solidFill>
-                  <a:srgbClr val="1F3864"/>
-                </a:solidFill>
-                <a:latin typeface="宋体"/>
-                <a:ea typeface="宋体"/>
-                <a:cs typeface="宋体"/>
-              </a:rPr>
-              <a:t>倍：</a:t>
-            </a:r>
-            <a:r>
-              <a:rPr sz="1100" b="0" dirty="0" err="1">
+              <a:t>补到 90% 需放宽 2.8 倍：</a:t>
+            </a:r>
+            <a:r>
+              <a:rPr sz="1100" b="0">
                 <a:solidFill>
                   <a:srgbClr val="262626"/>
                 </a:solidFill>
@@ -7276,13 +6816,6 @@
               </a:rPr>
               <a:t>测试集上的事后诊断量，不可直接部署</a:t>
             </a:r>
-            <a:endParaRPr sz="1100" b="0" dirty="0">
-              <a:solidFill>
-                <a:srgbClr val="262626"/>
-              </a:solidFill>
-              <a:latin typeface="微软雅黑"/>
-              <a:ea typeface="微软雅黑"/>
-            </a:endParaRPr>
           </a:p>
         </p:txBody>
       </p:sp>
@@ -7759,7 +7292,7 @@
               </a:spcAft>
             </a:pPr>
             <a:r>
-              <a:rPr sz="1050" b="0" dirty="0" err="1">
+              <a:rPr sz="1050" b="0">
                 <a:solidFill>
                   <a:srgbClr val="262626"/>
                 </a:solidFill>
@@ -7767,18 +7300,7 @@
                 <a:ea typeface="宋体"/>
                 <a:cs typeface="宋体"/>
               </a:rPr>
-              <a:t>等于更严阈值</a:t>
-            </a:r>
-            <a:r>
-              <a:rPr sz="1050" b="0" dirty="0">
-                <a:solidFill>
-                  <a:srgbClr val="262626"/>
-                </a:solidFill>
-                <a:latin typeface="宋体"/>
-                <a:ea typeface="宋体"/>
-                <a:cs typeface="宋体"/>
-              </a:rPr>
-              <a:t> 1.45 Ah 下的实测穿越点减去模型与数据裕度；该穿越点在完整序列上读出，属回测口径，在线部署须以预测穿越点替代，此时不晚于失效的构造保证不再成立</a:t>
+              <a:t>等于更严阈值 1.45 Ah 下的实测穿越点减去模型与数据裕度；该穿越点在完整序列上读出，属回测口径，在线部署须以预测穿越点替代，此时不晚于失效的构造保证不再成立</a:t>
             </a:r>
           </a:p>
         </p:txBody>
@@ -7791,7 +7313,7 @@
         </p:nvSpPr>
         <p:spPr>
           <a:xfrm>
-            <a:off x="6646154" y="2582106"/>
+            <a:off x="7543800" y="2542032"/>
             <a:ext cx="4114800" cy="1024128"/>
           </a:xfrm>
           <a:prstGeom prst="roundRect">
@@ -7905,7 +7427,7 @@
               </a:spcAft>
             </a:pPr>
             <a:r>
-              <a:rPr sz="1050" b="0" dirty="0" err="1">
+              <a:rPr sz="1050" b="0">
                 <a:solidFill>
                   <a:srgbClr val="262626"/>
                 </a:solidFill>
@@ -7913,59 +7435,8 @@
                 <a:ea typeface="宋体"/>
                 <a:cs typeface="宋体"/>
               </a:rPr>
-              <a:t>观测到预测稳定时刻（第</a:t>
-            </a:r>
-            <a:r>
-              <a:rPr sz="1050" b="0" dirty="0">
-                <a:solidFill>
-                  <a:srgbClr val="262626"/>
-                </a:solidFill>
-                <a:latin typeface="宋体"/>
-                <a:ea typeface="宋体"/>
-                <a:cs typeface="宋体"/>
-              </a:rPr>
-              <a:t> 50–100 </a:t>
-            </a:r>
-            <a:r>
-              <a:rPr sz="1050" b="0" dirty="0" err="1">
-                <a:solidFill>
-                  <a:srgbClr val="262626"/>
-                </a:solidFill>
-                <a:latin typeface="宋体"/>
-                <a:ea typeface="宋体"/>
-                <a:cs typeface="宋体"/>
-              </a:rPr>
-              <a:t>循环）再报寿命，可省</a:t>
-            </a:r>
-            <a:r>
-              <a:rPr sz="1050" b="0" dirty="0">
-                <a:solidFill>
-                  <a:srgbClr val="262626"/>
-                </a:solidFill>
-                <a:latin typeface="宋体"/>
-                <a:ea typeface="宋体"/>
-                <a:cs typeface="宋体"/>
-              </a:rPr>
-              <a:t> 68–98 </a:t>
-            </a:r>
-            <a:r>
-              <a:rPr sz="1050" b="0" dirty="0" err="1">
-                <a:solidFill>
-                  <a:srgbClr val="262626"/>
-                </a:solidFill>
-                <a:latin typeface="宋体"/>
-                <a:ea typeface="宋体"/>
-                <a:cs typeface="宋体"/>
-              </a:rPr>
-              <a:t>循环的数据量</a:t>
-            </a:r>
-            <a:endParaRPr sz="1050" b="0" dirty="0">
-              <a:solidFill>
-                <a:srgbClr val="262626"/>
-              </a:solidFill>
-              <a:latin typeface="微软雅黑"/>
-              <a:ea typeface="微软雅黑"/>
-            </a:endParaRPr>
+              <a:t>观测到预测稳定时刻（第 50–100 循环）再报寿命，可省 68–98 循环的数据量</a:t>
+            </a:r>
           </a:p>
         </p:txBody>
       </p:sp>
@@ -7977,7 +7448,7 @@
         </p:nvSpPr>
         <p:spPr>
           <a:xfrm>
-            <a:off x="6646154" y="3714796"/>
+            <a:off x="7543800" y="3712464"/>
             <a:ext cx="4114800" cy="1024128"/>
           </a:xfrm>
           <a:prstGeom prst="roundRect">
@@ -8091,7 +7562,7 @@
               </a:spcAft>
             </a:pPr>
             <a:r>
-              <a:rPr sz="1050" b="0" dirty="0" err="1">
+              <a:rPr sz="1050" b="0">
                 <a:solidFill>
                   <a:srgbClr val="262626"/>
                 </a:solidFill>
@@ -8099,59 +7570,8 @@
                 <a:ea typeface="宋体"/>
                 <a:cs typeface="宋体"/>
               </a:rPr>
-              <a:t>先把</a:t>
-            </a:r>
-            <a:r>
-              <a:rPr sz="1050" b="0" dirty="0">
-                <a:solidFill>
-                  <a:srgbClr val="262626"/>
-                </a:solidFill>
-                <a:latin typeface="宋体"/>
-                <a:ea typeface="宋体"/>
-                <a:cs typeface="宋体"/>
-              </a:rPr>
-              <a:t> τ </a:t>
-            </a:r>
-            <a:r>
-              <a:rPr sz="1050" b="0" dirty="0" err="1">
-                <a:solidFill>
-                  <a:srgbClr val="262626"/>
-                </a:solidFill>
-                <a:latin typeface="宋体"/>
-                <a:ea typeface="宋体"/>
-                <a:cs typeface="宋体"/>
-              </a:rPr>
-              <a:t>与窗口写进规范：报排序可以不带</a:t>
-            </a:r>
-            <a:r>
-              <a:rPr sz="1050" b="0" dirty="0">
-                <a:solidFill>
-                  <a:srgbClr val="262626"/>
-                </a:solidFill>
-                <a:latin typeface="宋体"/>
-                <a:ea typeface="宋体"/>
-                <a:cs typeface="宋体"/>
-              </a:rPr>
-              <a:t> </a:t>
-            </a:r>
-            <a:r>
-              <a:rPr sz="1050" b="0" dirty="0" err="1">
-                <a:solidFill>
-                  <a:srgbClr val="262626"/>
-                </a:solidFill>
-                <a:latin typeface="宋体"/>
-                <a:ea typeface="宋体"/>
-                <a:cs typeface="宋体"/>
-              </a:rPr>
-              <a:t>τ，报绝对寿命必须带</a:t>
-            </a:r>
-            <a:endParaRPr sz="1050" b="0" dirty="0">
-              <a:solidFill>
-                <a:srgbClr val="262626"/>
-              </a:solidFill>
-              <a:latin typeface="微软雅黑"/>
-              <a:ea typeface="微软雅黑"/>
-            </a:endParaRPr>
+              <a:t>先把 τ 与窗口写进规范：报排序可以不带 τ，报绝对寿命必须带</a:t>
+            </a:r>
           </a:p>
         </p:txBody>
       </p:sp>
@@ -8163,7 +7583,7 @@
         </p:nvSpPr>
         <p:spPr>
           <a:xfrm>
-            <a:off x="6646154" y="5029200"/>
+            <a:off x="7543800" y="5029200"/>
             <a:ext cx="4114800" cy="868680"/>
           </a:xfrm>
           <a:prstGeom prst="roundRect">
@@ -8233,7 +7653,7 @@
               </a:spcAft>
             </a:pPr>
             <a:r>
-              <a:rPr sz="1250" b="1" dirty="0">
+              <a:rPr sz="1250" b="1">
                 <a:solidFill>
                   <a:srgbClr val="B33030"/>
                 </a:solidFill>
@@ -8241,29 +7661,7 @@
                 <a:ea typeface="宋体"/>
                 <a:cs typeface="宋体"/>
               </a:rPr>
-              <a:t>例外：B0006 </a:t>
-            </a:r>
-            <a:r>
-              <a:rPr sz="1250" b="1" dirty="0" err="1">
-                <a:solidFill>
-                  <a:srgbClr val="B33030"/>
-                </a:solidFill>
-                <a:latin typeface="宋体"/>
-                <a:ea typeface="宋体"/>
-                <a:cs typeface="宋体"/>
-              </a:rPr>
-              <a:t>到达预测稳态时刻时已晚于建议更换点，其在线剩余寿命为负；对该个体不等待区间收敛，按早期观测直接安排更换</a:t>
-            </a:r>
-            <a:r>
-              <a:rPr sz="1250" b="1" dirty="0">
-                <a:solidFill>
-                  <a:srgbClr val="B33030"/>
-                </a:solidFill>
-                <a:latin typeface="宋体"/>
-                <a:ea typeface="宋体"/>
-                <a:cs typeface="宋体"/>
-              </a:rPr>
-              <a:t>。</a:t>
+              <a:t>例外：B0006 到达预测稳态时刻时已晚于建议更换点，其在线剩余寿命为负；对该个体不等待区间收敛，按早期观测直接安排更换。</a:t>
             </a:r>
           </a:p>
         </p:txBody>
@@ -8741,7 +8139,7 @@
               </a:spcAft>
             </a:pPr>
             <a:r>
-              <a:rPr sz="1350" b="1" dirty="0" err="1">
+              <a:rPr sz="1350" b="1">
                 <a:solidFill>
                   <a:srgbClr val="1F3864"/>
                 </a:solidFill>
@@ -8751,13 +8149,6 @@
               </a:rPr>
               <a:t>寿命是依赖阈值口径的统计量</a:t>
             </a:r>
-            <a:endParaRPr sz="1350" b="1" dirty="0">
-              <a:solidFill>
-                <a:srgbClr val="1F3864"/>
-              </a:solidFill>
-              <a:latin typeface="微软雅黑"/>
-              <a:ea typeface="微软雅黑"/>
-            </a:endParaRPr>
           </a:p>
         </p:txBody>
       </p:sp>
@@ -8927,7 +8318,7 @@
               </a:spcAft>
             </a:pPr>
             <a:r>
-              <a:rPr sz="1350" b="1" dirty="0" err="1">
+              <a:rPr sz="1350" b="1">
                 <a:solidFill>
                   <a:srgbClr val="1F3864"/>
                 </a:solidFill>
@@ -8937,13 +8328,6 @@
               </a:rPr>
               <a:t>高训练精度不构成外推能力的证据</a:t>
             </a:r>
-            <a:endParaRPr sz="1350" b="1" dirty="0">
-              <a:solidFill>
-                <a:srgbClr val="1F3864"/>
-              </a:solidFill>
-              <a:latin typeface="微软雅黑"/>
-              <a:ea typeface="微软雅黑"/>
-            </a:endParaRPr>
           </a:p>
         </p:txBody>
       </p:sp>
@@ -9113,7 +8497,7 @@
               </a:spcAft>
             </a:pPr>
             <a:r>
-              <a:rPr sz="1350" b="1" dirty="0" err="1">
+              <a:rPr sz="1350" b="1">
                 <a:solidFill>
                   <a:srgbClr val="1F3864"/>
                 </a:solidFill>
@@ -9123,13 +8507,6 @@
               </a:rPr>
               <a:t>定义层与模型形式层不确定性不小于数据层</a:t>
             </a:r>
-            <a:endParaRPr sz="1350" b="1" dirty="0">
-              <a:solidFill>
-                <a:srgbClr val="1F3864"/>
-              </a:solidFill>
-              <a:latin typeface="微软雅黑"/>
-              <a:ea typeface="微软雅黑"/>
-            </a:endParaRPr>
           </a:p>
         </p:txBody>
       </p:sp>
@@ -9299,7 +8676,7 @@
               </a:spcAft>
             </a:pPr>
             <a:r>
-              <a:rPr sz="1350" b="1" dirty="0" err="1">
+              <a:rPr sz="1350" b="1">
                 <a:solidFill>
                   <a:srgbClr val="1F3864"/>
                 </a:solidFill>
@@ -9309,13 +8686,6 @@
               </a:rPr>
               <a:t>区间宽度与预测精度相互独立</a:t>
             </a:r>
-            <a:endParaRPr sz="1350" b="1" dirty="0">
-              <a:solidFill>
-                <a:srgbClr val="1F3864"/>
-              </a:solidFill>
-              <a:latin typeface="微软雅黑"/>
-              <a:ea typeface="微软雅黑"/>
-            </a:endParaRPr>
           </a:p>
         </p:txBody>
       </p:sp>
@@ -9485,7 +8855,7 @@
               </a:spcAft>
             </a:pPr>
             <a:r>
-              <a:rPr sz="1350" b="1" dirty="0" err="1">
+              <a:rPr sz="1350" b="1">
                 <a:solidFill>
                   <a:srgbClr val="1F3864"/>
                 </a:solidFill>
@@ -9495,13 +8865,6 @@
               </a:rPr>
               <a:t>维护判据须将口径约定与不确定性分离报告</a:t>
             </a:r>
-            <a:endParaRPr sz="1350" b="1" dirty="0">
-              <a:solidFill>
-                <a:srgbClr val="1F3864"/>
-              </a:solidFill>
-              <a:latin typeface="微软雅黑"/>
-              <a:ea typeface="微软雅黑"/>
-            </a:endParaRPr>
           </a:p>
         </p:txBody>
       </p:sp>
@@ -9536,7 +8899,7 @@
               </a:spcAft>
             </a:pPr>
             <a:r>
-              <a:rPr sz="1100" b="0" dirty="0" err="1">
+              <a:rPr sz="1100" b="0">
                 <a:solidFill>
                   <a:srgbClr val="595959"/>
                 </a:solidFill>
@@ -9544,81 +8907,8 @@
                 <a:ea typeface="宋体"/>
                 <a:cs typeface="宋体"/>
               </a:rPr>
-              <a:t>更换时刻</a:t>
-            </a:r>
-            <a:r>
-              <a:rPr sz="1100" b="0" dirty="0">
-                <a:solidFill>
-                  <a:srgbClr val="595959"/>
-                </a:solidFill>
-                <a:latin typeface="宋体"/>
-                <a:ea typeface="宋体"/>
-                <a:cs typeface="宋体"/>
-              </a:rPr>
-              <a:t> = </a:t>
-            </a:r>
-            <a:r>
-              <a:rPr sz="1100" b="0" dirty="0" err="1">
-                <a:solidFill>
-                  <a:srgbClr val="595959"/>
-                </a:solidFill>
-                <a:latin typeface="宋体"/>
-                <a:ea typeface="宋体"/>
-                <a:cs typeface="宋体"/>
-              </a:rPr>
-              <a:t>更严阈值穿越点</a:t>
-            </a:r>
-            <a:r>
-              <a:rPr sz="1100" b="0" dirty="0">
-                <a:solidFill>
-                  <a:srgbClr val="595959"/>
-                </a:solidFill>
-                <a:latin typeface="宋体"/>
-                <a:ea typeface="宋体"/>
-                <a:cs typeface="宋体"/>
-              </a:rPr>
-              <a:t> − </a:t>
-            </a:r>
-            <a:r>
-              <a:rPr sz="1100" b="0" dirty="0" err="1">
-                <a:solidFill>
-                  <a:srgbClr val="595959"/>
-                </a:solidFill>
-                <a:latin typeface="宋体"/>
-                <a:ea typeface="宋体"/>
-                <a:cs typeface="宋体"/>
-              </a:rPr>
-              <a:t>裕度；代价</a:t>
-            </a:r>
-            <a:r>
-              <a:rPr sz="1100" b="0" dirty="0">
-                <a:solidFill>
-                  <a:srgbClr val="595959"/>
-                </a:solidFill>
-                <a:latin typeface="宋体"/>
-                <a:ea typeface="宋体"/>
-                <a:cs typeface="宋体"/>
-              </a:rPr>
-              <a:t> 26.3%–41.6% </a:t>
-            </a:r>
-            <a:r>
-              <a:rPr sz="1100" b="0" dirty="0" err="1">
-                <a:solidFill>
-                  <a:srgbClr val="595959"/>
-                </a:solidFill>
-                <a:latin typeface="宋体"/>
-                <a:ea typeface="宋体"/>
-                <a:cs typeface="宋体"/>
-              </a:rPr>
-              <a:t>寿命</a:t>
-            </a:r>
-            <a:endParaRPr sz="1100" b="0" dirty="0">
-              <a:solidFill>
-                <a:srgbClr val="595959"/>
-              </a:solidFill>
-              <a:latin typeface="微软雅黑"/>
-              <a:ea typeface="微软雅黑"/>
-            </a:endParaRPr>
+              <a:t>更换时刻 = 更严阈值穿越点 − 裕度；代价 26.3%–41.6% 寿命</a:t>
+            </a:r>
           </a:p>
         </p:txBody>
       </p:sp>
@@ -13557,7 +12847,7 @@
           <p:nvPr/>
         </p:nvPicPr>
         <p:blipFill>
-          <a:blip r:embed="rId5"/>
+          <a:blip r:embed="rId3"/>
           <a:stretch>
             <a:fillRect/>
           </a:stretch>
@@ -13820,101 +13110,6 @@
   <p:clrMapOvr>
     <a:masterClrMapping/>
   </p:clrMapOvr>
-  <mc:AlternateContent xmlns:mc="http://schemas.openxmlformats.org/markup-compatibility/2006">
-    <mc:Choice xmlns:p14="http://schemas.microsoft.com/office/powerpoint/2010/main" Requires="p14">
-      <p:transition spd="slow" p14:dur="2000" advTm="924"/>
-    </mc:Choice>
-    <mc:Fallback>
-      <p:transition spd="slow" advTm="924"/>
-    </mc:Fallback>
-  </mc:AlternateContent>
-  <p:timing>
-    <p:tnLst>
-      <p:par>
-        <p:cTn id="1" dur="indefinite" restart="never" nodeType="tmRoot">
-          <p:childTnLst>
-            <p:seq concurrent="1" nextAc="seek">
-              <p:cTn id="2" dur="indefinite" nodeType="mainSeq">
-                <p:childTnLst>
-                  <p:par>
-                    <p:cTn id="3" fill="hold">
-                      <p:stCondLst>
-                        <p:cond delay="indefinite"/>
-                        <p:cond evt="onBegin" delay="0">
-                          <p:tn val="2"/>
-                        </p:cond>
-                      </p:stCondLst>
-                      <p:childTnLst>
-                        <p:par>
-                          <p:cTn id="4" fill="hold">
-                            <p:stCondLst>
-                              <p:cond delay="0"/>
-                            </p:stCondLst>
-                            <p:childTnLst>
-                              <p:par>
-                                <p:cTn id="5" presetID="1" presetClass="mediacall" presetSubtype="0" fill="hold" nodeType="afterEffect">
-                                  <p:stCondLst>
-                                    <p:cond delay="0"/>
-                                  </p:stCondLst>
-                                  <p:childTnLst>
-                                    <p:cmd type="call" cmd="playFrom(0.0)">
-                                      <p:cBhvr>
-                                        <p:cTn id="6" dur="1" fill="hold"/>
-                                        <p:tgtEl>
-                                          <p:spTgt spid="10"/>
-                                        </p:tgtEl>
-                                      </p:cBhvr>
-                                    </p:cmd>
-                                  </p:childTnLst>
-                                </p:cTn>
-                              </p:par>
-                            </p:childTnLst>
-                          </p:cTn>
-                        </p:par>
-                      </p:childTnLst>
-                    </p:cTn>
-                  </p:par>
-                </p:childTnLst>
-              </p:cTn>
-              <p:prevCondLst>
-                <p:cond evt="onPrev" delay="0">
-                  <p:tgtEl>
-                    <p:sldTgt/>
-                  </p:tgtEl>
-                </p:cond>
-              </p:prevCondLst>
-              <p:nextCondLst>
-                <p:cond evt="onNext" delay="0">
-                  <p:tgtEl>
-                    <p:sldTgt/>
-                  </p:tgtEl>
-                </p:cond>
-              </p:nextCondLst>
-            </p:seq>
-            <p:audio isNarration="1">
-              <p:cMediaNode vol="80000" showWhenStopped="0">
-                <p:cTn id="7" fill="hold" display="0">
-                  <p:stCondLst>
-                    <p:cond delay="indefinite"/>
-                  </p:stCondLst>
-                  <p:endCondLst>
-                    <p:cond evt="onStopAudio" delay="0">
-                      <p:tgtEl>
-                        <p:sldTgt/>
-                      </p:tgtEl>
-                    </p:cond>
-                  </p:endCondLst>
-                </p:cTn>
-                <p:tgtEl>
-                  <p:spTgt spid="10"/>
-                </p:tgtEl>
-              </p:cMediaNode>
-            </p:audio>
-          </p:childTnLst>
-        </p:cTn>
-      </p:par>
-    </p:tnLst>
-  </p:timing>
 </p:sld>
 </file>
 
@@ -14560,7 +13755,7 @@
               </a:spcAft>
             </a:pPr>
             <a:r>
-              <a:rPr sz="1150" b="0" dirty="0">
+              <a:rPr sz="1150" b="0">
                 <a:solidFill>
                   <a:srgbClr val="262626"/>
                 </a:solidFill>
@@ -14568,48 +13763,8 @@
                 <a:ea typeface="宋体"/>
                 <a:cs typeface="宋体"/>
               </a:rPr>
-              <a:t>B0006 前 7 </a:t>
-            </a:r>
-            <a:r>
-              <a:rPr sz="1150" b="0" dirty="0" err="1">
-                <a:solidFill>
-                  <a:srgbClr val="262626"/>
-                </a:solidFill>
-                <a:latin typeface="宋体"/>
-                <a:ea typeface="宋体"/>
-                <a:cs typeface="宋体"/>
-              </a:rPr>
-              <a:t>循环</a:t>
-            </a:r>
-            <a:r>
-              <a:rPr sz="1150" b="0" dirty="0">
-                <a:solidFill>
-                  <a:srgbClr val="262626"/>
-                </a:solidFill>
-                <a:latin typeface="宋体"/>
-                <a:ea typeface="宋体"/>
-                <a:cs typeface="宋体"/>
-              </a:rPr>
-              <a:t> &gt; 2.0 </a:t>
-            </a:r>
-            <a:r>
-              <a:rPr sz="1150" b="0" dirty="0" err="1">
-                <a:solidFill>
-                  <a:srgbClr val="262626"/>
-                </a:solidFill>
-                <a:latin typeface="宋体"/>
-                <a:ea typeface="宋体"/>
-                <a:cs typeface="宋体"/>
-              </a:rPr>
-              <a:t>Ah，保留原值并加标记列，截断将改变衰减斜率</a:t>
-            </a:r>
-            <a:endParaRPr sz="1150" b="0" dirty="0">
-              <a:solidFill>
-                <a:srgbClr val="262626"/>
-              </a:solidFill>
-              <a:latin typeface="微软雅黑"/>
-              <a:ea typeface="微软雅黑"/>
-            </a:endParaRPr>
+              <a:t>B0006 前 7 循环 &gt; 2.0 Ah，保留原值并加标记列，截断将改变衰减斜率</a:t>
+            </a:r>
           </a:p>
         </p:txBody>
       </p:sp>
@@ -15294,7 +14449,7 @@
               </a:spcAft>
             </a:pPr>
             <a:r>
-              <a:rPr sz="1400" b="1" dirty="0" err="1">
+              <a:rPr sz="1400" b="1">
                 <a:solidFill>
                   <a:srgbClr val="E07B27"/>
                 </a:solidFill>
@@ -15302,18 +14457,7 @@
                 <a:ea typeface="宋体"/>
                 <a:cs typeface="宋体"/>
               </a:rPr>
-              <a:t>陷阱</a:t>
-            </a:r>
-            <a:r>
-              <a:rPr sz="1400" b="1" dirty="0">
-                <a:solidFill>
-                  <a:srgbClr val="E07B27"/>
-                </a:solidFill>
-                <a:latin typeface="宋体"/>
-                <a:ea typeface="宋体"/>
-                <a:cs typeface="宋体"/>
-              </a:rPr>
-              <a:t> 6｜特征泄漏</a:t>
+              <a:t>陷阱 6｜特征泄漏</a:t>
             </a:r>
           </a:p>
         </p:txBody>
@@ -15473,101 +14617,6 @@
   <p:clrMapOvr>
     <a:masterClrMapping/>
   </p:clrMapOvr>
-  <mc:AlternateContent xmlns:mc="http://schemas.openxmlformats.org/markup-compatibility/2006">
-    <mc:Choice xmlns:p14="http://schemas.microsoft.com/office/powerpoint/2010/main" Requires="p14">
-      <p:transition spd="slow" p14:dur="2000" advTm="627"/>
-    </mc:Choice>
-    <mc:Fallback>
-      <p:transition spd="slow" advTm="627"/>
-    </mc:Fallback>
-  </mc:AlternateContent>
-  <p:timing>
-    <p:tnLst>
-      <p:par>
-        <p:cTn id="1" dur="indefinite" restart="never" nodeType="tmRoot">
-          <p:childTnLst>
-            <p:seq concurrent="1" nextAc="seek">
-              <p:cTn id="2" dur="indefinite" nodeType="mainSeq">
-                <p:childTnLst>
-                  <p:par>
-                    <p:cTn id="3" fill="hold">
-                      <p:stCondLst>
-                        <p:cond delay="indefinite"/>
-                        <p:cond evt="onBegin" delay="0">
-                          <p:tn val="2"/>
-                        </p:cond>
-                      </p:stCondLst>
-                      <p:childTnLst>
-                        <p:par>
-                          <p:cTn id="4" fill="hold">
-                            <p:stCondLst>
-                              <p:cond delay="0"/>
-                            </p:stCondLst>
-                            <p:childTnLst>
-                              <p:par>
-                                <p:cTn id="5" presetID="1" presetClass="mediacall" presetSubtype="0" fill="hold" nodeType="afterEffect">
-                                  <p:stCondLst>
-                                    <p:cond delay="0"/>
-                                  </p:stCondLst>
-                                  <p:childTnLst>
-                                    <p:cmd type="call" cmd="playFrom(0.0)">
-                                      <p:cBhvr>
-                                        <p:cTn id="6" dur="1" fill="hold"/>
-                                        <p:tgtEl>
-                                          <p:spTgt spid="33"/>
-                                        </p:tgtEl>
-                                      </p:cBhvr>
-                                    </p:cmd>
-                                  </p:childTnLst>
-                                </p:cTn>
-                              </p:par>
-                            </p:childTnLst>
-                          </p:cTn>
-                        </p:par>
-                      </p:childTnLst>
-                    </p:cTn>
-                  </p:par>
-                </p:childTnLst>
-              </p:cTn>
-              <p:prevCondLst>
-                <p:cond evt="onPrev" delay="0">
-                  <p:tgtEl>
-                    <p:sldTgt/>
-                  </p:tgtEl>
-                </p:cond>
-              </p:prevCondLst>
-              <p:nextCondLst>
-                <p:cond evt="onNext" delay="0">
-                  <p:tgtEl>
-                    <p:sldTgt/>
-                  </p:tgtEl>
-                </p:cond>
-              </p:nextCondLst>
-            </p:seq>
-            <p:audio isNarration="1">
-              <p:cMediaNode vol="80000" showWhenStopped="0">
-                <p:cTn id="7" fill="hold" display="0">
-                  <p:stCondLst>
-                    <p:cond delay="indefinite"/>
-                  </p:stCondLst>
-                  <p:endCondLst>
-                    <p:cond evt="onStopAudio" delay="0">
-                      <p:tgtEl>
-                        <p:sldTgt/>
-                      </p:tgtEl>
-                    </p:cond>
-                  </p:endCondLst>
-                </p:cTn>
-                <p:tgtEl>
-                  <p:spTgt spid="33"/>
-                </p:tgtEl>
-              </p:cMediaNode>
-            </p:audio>
-          </p:childTnLst>
-        </p:cTn>
-      </p:par>
-    </p:tnLst>
-  </p:timing>
 </p:sld>
 </file>
 
@@ -15930,7 +14979,7 @@
           <p:nvPr/>
         </p:nvPicPr>
         <p:blipFill>
-          <a:blip r:embed="rId5"/>
+          <a:blip r:embed="rId3"/>
           <a:stretch>
             <a:fillRect/>
           </a:stretch>
@@ -16253,7 +15302,7 @@
           <p:nvPr/>
         </p:nvPicPr>
         <p:blipFill>
-          <a:blip r:embed="rId6"/>
+          <a:blip r:embed="rId4"/>
           <a:stretch>
             <a:fillRect/>
           </a:stretch>
@@ -16277,7 +15326,7 @@
           <p:nvPr/>
         </p:nvPicPr>
         <p:blipFill>
-          <a:blip r:embed="rId7"/>
+          <a:blip r:embed="rId5"/>
           <a:stretch>
             <a:fillRect/>
           </a:stretch>
@@ -16297,101 +15346,6 @@
   <p:clrMapOvr>
     <a:masterClrMapping/>
   </p:clrMapOvr>
-  <mc:AlternateContent xmlns:mc="http://schemas.openxmlformats.org/markup-compatibility/2006">
-    <mc:Choice xmlns:p14="http://schemas.microsoft.com/office/powerpoint/2010/main" Requires="p14">
-      <p:transition spd="slow" p14:dur="2000" advTm="255"/>
-    </mc:Choice>
-    <mc:Fallback>
-      <p:transition spd="slow" advTm="255"/>
-    </mc:Fallback>
-  </mc:AlternateContent>
-  <p:timing>
-    <p:tnLst>
-      <p:par>
-        <p:cTn id="1" dur="indefinite" restart="never" nodeType="tmRoot">
-          <p:childTnLst>
-            <p:seq concurrent="1" nextAc="seek">
-              <p:cTn id="2" dur="indefinite" nodeType="mainSeq">
-                <p:childTnLst>
-                  <p:par>
-                    <p:cTn id="3" fill="hold">
-                      <p:stCondLst>
-                        <p:cond delay="indefinite"/>
-                        <p:cond evt="onBegin" delay="0">
-                          <p:tn val="2"/>
-                        </p:cond>
-                      </p:stCondLst>
-                      <p:childTnLst>
-                        <p:par>
-                          <p:cTn id="4" fill="hold">
-                            <p:stCondLst>
-                              <p:cond delay="0"/>
-                            </p:stCondLst>
-                            <p:childTnLst>
-                              <p:par>
-                                <p:cTn id="5" presetID="1" presetClass="mediacall" presetSubtype="0" fill="hold" nodeType="afterEffect">
-                                  <p:stCondLst>
-                                    <p:cond delay="0"/>
-                                  </p:stCondLst>
-                                  <p:childTnLst>
-                                    <p:cmd type="call" cmd="playFrom(0.0)">
-                                      <p:cBhvr>
-                                        <p:cTn id="6" dur="1" fill="hold"/>
-                                        <p:tgtEl>
-                                          <p:spTgt spid="8"/>
-                                        </p:tgtEl>
-                                      </p:cBhvr>
-                                    </p:cmd>
-                                  </p:childTnLst>
-                                </p:cTn>
-                              </p:par>
-                            </p:childTnLst>
-                          </p:cTn>
-                        </p:par>
-                      </p:childTnLst>
-                    </p:cTn>
-                  </p:par>
-                </p:childTnLst>
-              </p:cTn>
-              <p:prevCondLst>
-                <p:cond evt="onPrev" delay="0">
-                  <p:tgtEl>
-                    <p:sldTgt/>
-                  </p:tgtEl>
-                </p:cond>
-              </p:prevCondLst>
-              <p:nextCondLst>
-                <p:cond evt="onNext" delay="0">
-                  <p:tgtEl>
-                    <p:sldTgt/>
-                  </p:tgtEl>
-                </p:cond>
-              </p:nextCondLst>
-            </p:seq>
-            <p:audio isNarration="1">
-              <p:cMediaNode vol="80000" showWhenStopped="0">
-                <p:cTn id="7" fill="hold" display="0">
-                  <p:stCondLst>
-                    <p:cond delay="indefinite"/>
-                  </p:stCondLst>
-                  <p:endCondLst>
-                    <p:cond evt="onStopAudio" delay="0">
-                      <p:tgtEl>
-                        <p:sldTgt/>
-                      </p:tgtEl>
-                    </p:cond>
-                  </p:endCondLst>
-                </p:cTn>
-                <p:tgtEl>
-                  <p:spTgt spid="8"/>
-                </p:tgtEl>
-              </p:cMediaNode>
-            </p:audio>
-          </p:childTnLst>
-        </p:cTn>
-      </p:par>
-    </p:tnLst>
-  </p:timing>
 </p:sld>
 </file>
 
@@ -16699,7 +15653,7 @@
           <p:nvPr/>
         </p:nvPicPr>
         <p:blipFill>
-          <a:blip r:embed="rId5"/>
+          <a:blip r:embed="rId3"/>
           <a:stretch>
             <a:fillRect/>
           </a:stretch>
@@ -16750,7 +15704,7 @@
               </a:spcAft>
             </a:pPr>
             <a:r>
-              <a:rPr sz="1150" b="1" dirty="0">
+              <a:rPr sz="1150" b="1">
                 <a:solidFill>
                   <a:srgbClr val="E07B27"/>
                 </a:solidFill>
@@ -16761,7 +15715,7 @@
               <a:t>▪ </a:t>
             </a:r>
             <a:r>
-              <a:rPr sz="1300" b="1" dirty="0">
+              <a:rPr sz="1300" b="1">
                 <a:solidFill>
                   <a:srgbClr val="1F3864"/>
                 </a:solidFill>
@@ -16769,21 +15723,10 @@
                 <a:ea typeface="宋体"/>
                 <a:cs typeface="宋体"/>
               </a:rPr>
-              <a:t>±0.05 Ah </a:t>
-            </a:r>
-            <a:r>
-              <a:rPr sz="1300" b="1" dirty="0" err="1">
-                <a:solidFill>
-                  <a:srgbClr val="1F3864"/>
-                </a:solidFill>
-                <a:latin typeface="宋体"/>
-                <a:ea typeface="宋体"/>
-                <a:cs typeface="宋体"/>
-              </a:rPr>
-              <a:t>窗口：</a:t>
-            </a:r>
-            <a:r>
-              <a:rPr sz="1200" b="0" dirty="0" err="1">
+              <a:t>±0.05 Ah 窗口：</a:t>
+            </a:r>
+            <a:r>
+              <a:rPr sz="1200" b="0">
                 <a:solidFill>
                   <a:srgbClr val="262626"/>
                 </a:solidFill>
@@ -16791,37 +15734,8 @@
                 <a:ea typeface="宋体"/>
                 <a:cs typeface="宋体"/>
               </a:rPr>
-              <a:t>寿命读数极差</a:t>
-            </a:r>
-            <a:r>
-              <a:rPr sz="1200" b="0" dirty="0">
-                <a:solidFill>
-                  <a:srgbClr val="262626"/>
-                </a:solidFill>
-                <a:latin typeface="宋体"/>
-                <a:ea typeface="宋体"/>
-                <a:cs typeface="宋体"/>
-              </a:rPr>
-              <a:t> 30–40 </a:t>
-            </a:r>
-            <a:r>
-              <a:rPr sz="1200" b="0" dirty="0" err="1">
-                <a:solidFill>
-                  <a:srgbClr val="262626"/>
-                </a:solidFill>
-                <a:latin typeface="宋体"/>
-                <a:ea typeface="宋体"/>
-                <a:cs typeface="宋体"/>
-              </a:rPr>
-              <a:t>循环</a:t>
-            </a:r>
-            <a:endParaRPr sz="1200" b="0" dirty="0">
-              <a:solidFill>
-                <a:srgbClr val="262626"/>
-              </a:solidFill>
-              <a:latin typeface="微软雅黑"/>
-              <a:ea typeface="微软雅黑"/>
-            </a:endParaRPr>
+              <a:t>寿命读数极差 30–40 循环</a:t>
+            </a:r>
           </a:p>
           <a:p>
             <a:pPr algn="l">
@@ -16833,7 +15747,7 @@
               </a:spcAft>
             </a:pPr>
             <a:r>
-              <a:rPr sz="1150" b="1" dirty="0">
+              <a:rPr sz="1150" b="1">
                 <a:solidFill>
                   <a:srgbClr val="E07B27"/>
                 </a:solidFill>
@@ -16844,7 +15758,7 @@
               <a:t>▪ </a:t>
             </a:r>
             <a:r>
-              <a:rPr sz="1300" b="1" dirty="0">
+              <a:rPr sz="1300" b="1">
                 <a:solidFill>
                   <a:srgbClr val="1F3864"/>
                 </a:solidFill>
@@ -16852,21 +15766,10 @@
                 <a:ea typeface="宋体"/>
                 <a:cs typeface="宋体"/>
               </a:rPr>
-              <a:t>换 EOL </a:t>
-            </a:r>
-            <a:r>
-              <a:rPr sz="1300" b="1" dirty="0" err="1">
-                <a:solidFill>
-                  <a:srgbClr val="1F3864"/>
-                </a:solidFill>
-                <a:latin typeface="宋体"/>
-                <a:ea typeface="宋体"/>
-                <a:cs typeface="宋体"/>
-              </a:rPr>
-              <a:t>口径：</a:t>
-            </a:r>
-            <a:r>
-              <a:rPr sz="1200" b="0" dirty="0" err="1">
+              <a:t>换 EOL 口径：</a:t>
+            </a:r>
+            <a:r>
+              <a:rPr sz="1200" b="0">
                 <a:solidFill>
                   <a:srgbClr val="262626"/>
                 </a:solidFill>
@@ -16874,40 +15777,7 @@
                 <a:ea typeface="宋体"/>
                 <a:cs typeface="宋体"/>
               </a:rPr>
-              <a:t>同一块电池寿命最大相差</a:t>
-            </a:r>
-            <a:r>
-              <a:rPr sz="1200" b="0" dirty="0">
-                <a:solidFill>
-                  <a:srgbClr val="262626"/>
-                </a:solidFill>
-                <a:latin typeface="宋体"/>
-                <a:ea typeface="宋体"/>
-                <a:cs typeface="宋体"/>
-              </a:rPr>
-              <a:t> 2.16 </a:t>
-            </a:r>
-            <a:r>
-              <a:rPr sz="1200" b="0" dirty="0" err="1">
-                <a:solidFill>
-                  <a:srgbClr val="262626"/>
-                </a:solidFill>
-                <a:latin typeface="宋体"/>
-                <a:ea typeface="宋体"/>
-                <a:cs typeface="宋体"/>
-              </a:rPr>
-              <a:t>倍；计入删失下界至少</a:t>
-            </a:r>
-            <a:r>
-              <a:rPr sz="1200" b="0" dirty="0">
-                <a:solidFill>
-                  <a:srgbClr val="262626"/>
-                </a:solidFill>
-                <a:latin typeface="宋体"/>
-                <a:ea typeface="宋体"/>
-                <a:cs typeface="宋体"/>
-              </a:rPr>
-              <a:t> 2.96 倍</a:t>
+              <a:t>同一块电池寿命最大相差 2.16 倍；计入删失下界至少 2.96 倍</a:t>
             </a:r>
           </a:p>
           <a:p>
@@ -16920,7 +15790,7 @@
               </a:spcAft>
             </a:pPr>
             <a:r>
-              <a:rPr sz="1150" b="1" dirty="0">
+              <a:rPr sz="1150" b="1">
                 <a:solidFill>
                   <a:srgbClr val="E07B27"/>
                 </a:solidFill>
@@ -16931,7 +15801,7 @@
               <a:t>▪ </a:t>
             </a:r>
             <a:r>
-              <a:rPr sz="1300" b="1" dirty="0">
+              <a:rPr sz="1300" b="1">
                 <a:solidFill>
                   <a:srgbClr val="1F3864"/>
                 </a:solidFill>
@@ -16942,7 +15812,7 @@
               <a:t>排序稳定：</a:t>
             </a:r>
             <a:r>
-              <a:rPr sz="1200" b="0" dirty="0">
+              <a:rPr sz="1200" b="0">
                 <a:solidFill>
                   <a:srgbClr val="262626"/>
                 </a:solidFill>
@@ -16950,29 +15820,7 @@
                 <a:ea typeface="宋体"/>
                 <a:cs typeface="宋体"/>
               </a:rPr>
-              <a:t>80 </a:t>
-            </a:r>
-            <a:r>
-              <a:rPr sz="1200" b="0" dirty="0" err="1">
-                <a:solidFill>
-                  <a:srgbClr val="262626"/>
-                </a:solidFill>
-                <a:latin typeface="宋体"/>
-                <a:ea typeface="宋体"/>
-                <a:cs typeface="宋体"/>
-              </a:rPr>
-              <a:t>个阈值上恒为</a:t>
-            </a:r>
-            <a:r>
-              <a:rPr sz="1200" b="0" dirty="0">
-                <a:solidFill>
-                  <a:srgbClr val="262626"/>
-                </a:solidFill>
-                <a:latin typeface="宋体"/>
-                <a:ea typeface="宋体"/>
-                <a:cs typeface="宋体"/>
-              </a:rPr>
-              <a:t> B0018 &lt; B0006 &lt; B0005 &lt; B0007</a:t>
+              <a:t>80 个阈值上恒为 B0018 &lt; B0006 &lt; B0005 &lt; B0007</a:t>
             </a:r>
           </a:p>
           <a:p>
@@ -16985,7 +15833,7 @@
               </a:spcAft>
             </a:pPr>
             <a:r>
-              <a:rPr sz="1150" b="1" dirty="0">
+              <a:rPr sz="1150" b="1">
                 <a:solidFill>
                   <a:srgbClr val="E07B27"/>
                 </a:solidFill>
@@ -16996,7 +15844,7 @@
               <a:t>▪ </a:t>
             </a:r>
             <a:r>
-              <a:rPr sz="1300" b="1" dirty="0">
+              <a:rPr sz="1300" b="1">
                 <a:solidFill>
                   <a:srgbClr val="1F3864"/>
                 </a:solidFill>
@@ -17004,21 +15852,10 @@
                 <a:ea typeface="宋体"/>
                 <a:cs typeface="宋体"/>
               </a:rPr>
-              <a:t>B0007 </a:t>
-            </a:r>
-            <a:r>
-              <a:rPr sz="1300" b="1" dirty="0" err="1">
-                <a:solidFill>
-                  <a:srgbClr val="1F3864"/>
-                </a:solidFill>
-                <a:latin typeface="宋体"/>
-                <a:ea typeface="宋体"/>
-                <a:cs typeface="宋体"/>
-              </a:rPr>
-              <a:t>删失裕度极小：</a:t>
-            </a:r>
-            <a:r>
-              <a:rPr sz="1200" b="0" dirty="0" err="1">
+              <a:t>B0007 删失裕度极小：</a:t>
+            </a:r>
+            <a:r>
+              <a:rPr sz="1200" b="0">
                 <a:solidFill>
                   <a:srgbClr val="262626"/>
                 </a:solidFill>
@@ -17026,40 +15863,7 @@
                 <a:ea typeface="宋体"/>
                 <a:cs typeface="宋体"/>
               </a:rPr>
-              <a:t>最低容量距阈值仅</a:t>
-            </a:r>
-            <a:r>
-              <a:rPr sz="1200" b="0" dirty="0">
-                <a:solidFill>
-                  <a:srgbClr val="262626"/>
-                </a:solidFill>
-                <a:latin typeface="宋体"/>
-                <a:ea typeface="宋体"/>
-                <a:cs typeface="宋体"/>
-              </a:rPr>
-              <a:t> 0.0005 </a:t>
-            </a:r>
-            <a:r>
-              <a:rPr sz="1200" b="0" dirty="0" err="1">
-                <a:solidFill>
-                  <a:srgbClr val="262626"/>
-                </a:solidFill>
-                <a:latin typeface="宋体"/>
-                <a:ea typeface="宋体"/>
-                <a:cs typeface="宋体"/>
-              </a:rPr>
-              <a:t>Ah（额定的</a:t>
-            </a:r>
-            <a:r>
-              <a:rPr sz="1200" b="0" dirty="0">
-                <a:solidFill>
-                  <a:srgbClr val="262626"/>
-                </a:solidFill>
-                <a:latin typeface="宋体"/>
-                <a:ea typeface="宋体"/>
-                <a:cs typeface="宋体"/>
-              </a:rPr>
-              <a:t> 0.025%）</a:t>
+              <a:t>最低容量距阈值仅 0.0005 Ah（额定的 0.025%）</a:t>
             </a:r>
           </a:p>
         </p:txBody>
@@ -17181,101 +15985,6 @@
   <p:clrMapOvr>
     <a:masterClrMapping/>
   </p:clrMapOvr>
-  <mc:AlternateContent xmlns:mc="http://schemas.openxmlformats.org/markup-compatibility/2006">
-    <mc:Choice xmlns:p14="http://schemas.microsoft.com/office/powerpoint/2010/main" Requires="p14">
-      <p:transition spd="slow" p14:dur="2000" advTm="199"/>
-    </mc:Choice>
-    <mc:Fallback>
-      <p:transition spd="slow" advTm="199"/>
-    </mc:Fallback>
-  </mc:AlternateContent>
-  <p:timing>
-    <p:tnLst>
-      <p:par>
-        <p:cTn id="1" dur="indefinite" restart="never" nodeType="tmRoot">
-          <p:childTnLst>
-            <p:seq concurrent="1" nextAc="seek">
-              <p:cTn id="2" dur="indefinite" nodeType="mainSeq">
-                <p:childTnLst>
-                  <p:par>
-                    <p:cTn id="3" fill="hold">
-                      <p:stCondLst>
-                        <p:cond delay="indefinite"/>
-                        <p:cond evt="onBegin" delay="0">
-                          <p:tn val="2"/>
-                        </p:cond>
-                      </p:stCondLst>
-                      <p:childTnLst>
-                        <p:par>
-                          <p:cTn id="4" fill="hold">
-                            <p:stCondLst>
-                              <p:cond delay="0"/>
-                            </p:stCondLst>
-                            <p:childTnLst>
-                              <p:par>
-                                <p:cTn id="5" presetID="1" presetClass="mediacall" presetSubtype="0" fill="hold" nodeType="afterEffect">
-                                  <p:stCondLst>
-                                    <p:cond delay="0"/>
-                                  </p:stCondLst>
-                                  <p:childTnLst>
-                                    <p:cmd type="call" cmd="playFrom(0.0)">
-                                      <p:cBhvr>
-                                        <p:cTn id="6" dur="1" fill="hold"/>
-                                        <p:tgtEl>
-                                          <p:spTgt spid="12"/>
-                                        </p:tgtEl>
-                                      </p:cBhvr>
-                                    </p:cmd>
-                                  </p:childTnLst>
-                                </p:cTn>
-                              </p:par>
-                            </p:childTnLst>
-                          </p:cTn>
-                        </p:par>
-                      </p:childTnLst>
-                    </p:cTn>
-                  </p:par>
-                </p:childTnLst>
-              </p:cTn>
-              <p:prevCondLst>
-                <p:cond evt="onPrev" delay="0">
-                  <p:tgtEl>
-                    <p:sldTgt/>
-                  </p:tgtEl>
-                </p:cond>
-              </p:prevCondLst>
-              <p:nextCondLst>
-                <p:cond evt="onNext" delay="0">
-                  <p:tgtEl>
-                    <p:sldTgt/>
-                  </p:tgtEl>
-                </p:cond>
-              </p:nextCondLst>
-            </p:seq>
-            <p:audio isNarration="1">
-              <p:cMediaNode vol="80000" showWhenStopped="0">
-                <p:cTn id="7" fill="hold" display="0">
-                  <p:stCondLst>
-                    <p:cond delay="indefinite"/>
-                  </p:stCondLst>
-                  <p:endCondLst>
-                    <p:cond evt="onStopAudio" delay="0">
-                      <p:tgtEl>
-                        <p:sldTgt/>
-                      </p:tgtEl>
-                    </p:cond>
-                  </p:endCondLst>
-                </p:cTn>
-                <p:tgtEl>
-                  <p:spTgt spid="12"/>
-                </p:tgtEl>
-              </p:cMediaNode>
-            </p:audio>
-          </p:childTnLst>
-        </p:cTn>
-      </p:par>
-    </p:tnLst>
-  </p:timing>
 </p:sld>
 </file>
 
@@ -18105,7 +16814,7 @@
               </a:spcAft>
             </a:pPr>
             <a:r>
-              <a:rPr sz="1200" b="1" dirty="0">
+              <a:rPr sz="1200" b="1">
                 <a:solidFill>
                   <a:srgbClr val="E07B27"/>
                 </a:solidFill>
@@ -18116,7 +16825,7 @@
               <a:t>▪ </a:t>
             </a:r>
             <a:r>
-              <a:rPr sz="1250" b="1" dirty="0" err="1">
+              <a:rPr sz="1250" b="1">
                 <a:solidFill>
                   <a:srgbClr val="1F3864"/>
                 </a:solidFill>
@@ -18127,7 +16836,7 @@
               <a:t>输入：</a:t>
             </a:r>
             <a:r>
-              <a:rPr sz="1200" b="0" dirty="0" err="1">
+              <a:rPr sz="1200" b="0">
                 <a:solidFill>
                   <a:srgbClr val="262626"/>
                 </a:solidFill>
@@ -18135,59 +16844,8 @@
                 <a:ea typeface="宋体"/>
                 <a:cs typeface="宋体"/>
               </a:rPr>
-              <a:t>前</a:t>
-            </a:r>
-            <a:r>
-              <a:rPr sz="1200" b="0" dirty="0">
-                <a:solidFill>
-                  <a:srgbClr val="262626"/>
-                </a:solidFill>
-                <a:latin typeface="宋体"/>
-                <a:ea typeface="宋体"/>
-                <a:cs typeface="宋体"/>
-              </a:rPr>
-              <a:t> K = 50 </a:t>
-            </a:r>
-            <a:r>
-              <a:rPr sz="1200" b="0" dirty="0" err="1">
-                <a:solidFill>
-                  <a:srgbClr val="262626"/>
-                </a:solidFill>
-                <a:latin typeface="宋体"/>
-                <a:ea typeface="宋体"/>
-                <a:cs typeface="宋体"/>
-              </a:rPr>
-              <a:t>循环提取的</a:t>
-            </a:r>
-            <a:r>
-              <a:rPr sz="1200" b="0" dirty="0">
-                <a:solidFill>
-                  <a:srgbClr val="262626"/>
-                </a:solidFill>
-                <a:latin typeface="宋体"/>
-                <a:ea typeface="宋体"/>
-                <a:cs typeface="宋体"/>
-              </a:rPr>
-              <a:t> 10 </a:t>
-            </a:r>
-            <a:r>
-              <a:rPr sz="1200" b="0" dirty="0" err="1">
-                <a:solidFill>
-                  <a:srgbClr val="262626"/>
-                </a:solidFill>
-                <a:latin typeface="宋体"/>
-                <a:ea typeface="宋体"/>
-                <a:cs typeface="宋体"/>
-              </a:rPr>
-              <a:t>个统计特征</a:t>
-            </a:r>
-            <a:endParaRPr sz="1200" b="0" dirty="0">
-              <a:solidFill>
-                <a:srgbClr val="262626"/>
-              </a:solidFill>
-              <a:latin typeface="微软雅黑"/>
-              <a:ea typeface="微软雅黑"/>
-            </a:endParaRPr>
+              <a:t>前 K = 50 循环提取的 10 个统计特征</a:t>
+            </a:r>
           </a:p>
           <a:p>
             <a:pPr algn="l">
@@ -18199,7 +16857,7 @@
               </a:spcAft>
             </a:pPr>
             <a:r>
-              <a:rPr sz="1200" b="1" dirty="0">
+              <a:rPr sz="1200" b="1">
                 <a:solidFill>
                   <a:srgbClr val="E07B27"/>
                 </a:solidFill>
@@ -18210,7 +16868,7 @@
               <a:t>▪ </a:t>
             </a:r>
             <a:r>
-              <a:rPr sz="1250" b="1" dirty="0" err="1">
+              <a:rPr sz="1250" b="1">
                 <a:solidFill>
                   <a:srgbClr val="1F3864"/>
                 </a:solidFill>
@@ -18221,7 +16879,7 @@
               <a:t>输出：</a:t>
             </a:r>
             <a:r>
-              <a:rPr sz="1200" b="0" dirty="0" err="1">
+              <a:rPr sz="1200" b="0">
                 <a:solidFill>
                   <a:srgbClr val="262626"/>
                 </a:solidFill>
@@ -18231,13 +16889,6 @@
               </a:rPr>
               <a:t>一块没见过的电池的寿命</a:t>
             </a:r>
-            <a:endParaRPr sz="1200" b="0" dirty="0">
-              <a:solidFill>
-                <a:srgbClr val="262626"/>
-              </a:solidFill>
-              <a:latin typeface="微软雅黑"/>
-              <a:ea typeface="微软雅黑"/>
-            </a:endParaRPr>
           </a:p>
           <a:p>
             <a:pPr algn="l">
@@ -18249,7 +16900,7 @@
               </a:spcAft>
             </a:pPr>
             <a:r>
-              <a:rPr sz="1200" b="1" dirty="0">
+              <a:rPr sz="1200" b="1">
                 <a:solidFill>
                   <a:srgbClr val="E07B27"/>
                 </a:solidFill>
@@ -18260,7 +16911,7 @@
               <a:t>▪ </a:t>
             </a:r>
             <a:r>
-              <a:rPr sz="1250" b="1" dirty="0" err="1">
+              <a:rPr sz="1250" b="1">
                 <a:solidFill>
                   <a:srgbClr val="1F3864"/>
                 </a:solidFill>
@@ -18271,7 +16922,7 @@
               <a:t>验证：</a:t>
             </a:r>
             <a:r>
-              <a:rPr sz="1200" b="0" dirty="0" err="1">
+              <a:rPr sz="1200" b="0">
                 <a:solidFill>
                   <a:srgbClr val="262626"/>
                 </a:solidFill>
@@ -18279,18 +16930,7 @@
                 <a:ea typeface="宋体"/>
                 <a:cs typeface="宋体"/>
               </a:rPr>
-              <a:t>留一电池交叉验证（LOBOCV</a:t>
-            </a:r>
-            <a:r>
-              <a:rPr sz="1200" b="0" dirty="0">
-                <a:solidFill>
-                  <a:srgbClr val="262626"/>
-                </a:solidFill>
-                <a:latin typeface="宋体"/>
-                <a:ea typeface="宋体"/>
-                <a:cs typeface="宋体"/>
-              </a:rPr>
-              <a:t>）</a:t>
+              <a:t>留一电池交叉验证（LOBOCV）</a:t>
             </a:r>
           </a:p>
           <a:p>
@@ -18303,7 +16943,7 @@
               </a:spcAft>
             </a:pPr>
             <a:r>
-              <a:rPr sz="1200" b="1" dirty="0">
+              <a:rPr sz="1200" b="1">
                 <a:solidFill>
                   <a:srgbClr val="E07B27"/>
                 </a:solidFill>
@@ -18314,7 +16954,7 @@
               <a:t>▪ </a:t>
             </a:r>
             <a:r>
-              <a:rPr sz="1250" b="1" dirty="0" err="1">
+              <a:rPr sz="1250" b="1">
                 <a:solidFill>
                   <a:srgbClr val="1F3864"/>
                 </a:solidFill>
@@ -18325,7 +16965,7 @@
               <a:t>循环序号：</a:t>
             </a:r>
             <a:r>
-              <a:rPr sz="1200" b="0" dirty="0" err="1">
+              <a:rPr sz="1200" b="0">
                 <a:solidFill>
                   <a:srgbClr val="262626"/>
                 </a:solidFill>
@@ -18335,13 +16975,6 @@
               </a:rPr>
               <a:t>标签泄漏特征，禁止使用</a:t>
             </a:r>
-            <a:endParaRPr sz="1200" b="0" dirty="0">
-              <a:solidFill>
-                <a:srgbClr val="262626"/>
-              </a:solidFill>
-              <a:latin typeface="微软雅黑"/>
-              <a:ea typeface="微软雅黑"/>
-            </a:endParaRPr>
           </a:p>
           <a:p>
             <a:pPr algn="l">
@@ -18353,7 +16986,7 @@
               </a:spcAft>
             </a:pPr>
             <a:r>
-              <a:rPr sz="1200" b="1" dirty="0">
+              <a:rPr sz="1200" b="1">
                 <a:solidFill>
                   <a:srgbClr val="E07B27"/>
                 </a:solidFill>
@@ -18361,48 +16994,8 @@
                 <a:ea typeface="宋体"/>
                 <a:cs typeface="宋体"/>
               </a:rPr>
-              <a:t>▪ </a:t>
-            </a:r>
-            <a:r>
-              <a:rPr sz="1200" b="1" dirty="0" err="1">
-                <a:solidFill>
-                  <a:srgbClr val="E07B27"/>
-                </a:solidFill>
-                <a:latin typeface="宋体"/>
-                <a:ea typeface="宋体"/>
-                <a:cs typeface="宋体"/>
-              </a:rPr>
-              <a:t>结果：无一特征优于零基准，MAE</a:t>
-            </a:r>
-            <a:r>
-              <a:rPr sz="1200" b="1" dirty="0">
-                <a:solidFill>
-                  <a:srgbClr val="E07B27"/>
-                </a:solidFill>
-                <a:latin typeface="宋体"/>
-                <a:ea typeface="宋体"/>
-                <a:cs typeface="宋体"/>
-              </a:rPr>
-              <a:t> 14.7 </a:t>
-            </a:r>
-            <a:r>
-              <a:rPr sz="1200" b="1" dirty="0" err="1">
-                <a:solidFill>
-                  <a:srgbClr val="E07B27"/>
-                </a:solidFill>
-                <a:latin typeface="宋体"/>
-                <a:ea typeface="宋体"/>
-                <a:cs typeface="宋体"/>
-              </a:rPr>
-              <a:t>循环</a:t>
-            </a:r>
-            <a:endParaRPr sz="1200" b="1" dirty="0">
-              <a:solidFill>
-                <a:srgbClr val="E07B27"/>
-              </a:solidFill>
-              <a:latin typeface="微软雅黑"/>
-              <a:ea typeface="微软雅黑"/>
-            </a:endParaRPr>
+              <a:t>▪ 结果：无一特征优于零基准，MAE 14.7 循环</a:t>
+            </a:r>
           </a:p>
         </p:txBody>
       </p:sp>
@@ -18567,101 +17160,6 @@
   <p:clrMapOvr>
     <a:masterClrMapping/>
   </p:clrMapOvr>
-  <mc:AlternateContent xmlns:mc="http://schemas.openxmlformats.org/markup-compatibility/2006">
-    <mc:Choice xmlns:p14="http://schemas.microsoft.com/office/powerpoint/2010/main" Requires="p14">
-      <p:transition spd="slow" p14:dur="2000" advTm="216"/>
-    </mc:Choice>
-    <mc:Fallback>
-      <p:transition spd="slow" advTm="216"/>
-    </mc:Fallback>
-  </mc:AlternateContent>
-  <p:timing>
-    <p:tnLst>
-      <p:par>
-        <p:cTn id="1" dur="indefinite" restart="never" nodeType="tmRoot">
-          <p:childTnLst>
-            <p:seq concurrent="1" nextAc="seek">
-              <p:cTn id="2" dur="indefinite" nodeType="mainSeq">
-                <p:childTnLst>
-                  <p:par>
-                    <p:cTn id="3" fill="hold">
-                      <p:stCondLst>
-                        <p:cond delay="indefinite"/>
-                        <p:cond evt="onBegin" delay="0">
-                          <p:tn val="2"/>
-                        </p:cond>
-                      </p:stCondLst>
-                      <p:childTnLst>
-                        <p:par>
-                          <p:cTn id="4" fill="hold">
-                            <p:stCondLst>
-                              <p:cond delay="0"/>
-                            </p:stCondLst>
-                            <p:childTnLst>
-                              <p:par>
-                                <p:cTn id="5" presetID="1" presetClass="mediacall" presetSubtype="0" fill="hold" nodeType="afterEffect">
-                                  <p:stCondLst>
-                                    <p:cond delay="0"/>
-                                  </p:stCondLst>
-                                  <p:childTnLst>
-                                    <p:cmd type="call" cmd="playFrom(0.0)">
-                                      <p:cBhvr>
-                                        <p:cTn id="6" dur="1" fill="hold"/>
-                                        <p:tgtEl>
-                                          <p:spTgt spid="18"/>
-                                        </p:tgtEl>
-                                      </p:cBhvr>
-                                    </p:cmd>
-                                  </p:childTnLst>
-                                </p:cTn>
-                              </p:par>
-                            </p:childTnLst>
-                          </p:cTn>
-                        </p:par>
-                      </p:childTnLst>
-                    </p:cTn>
-                  </p:par>
-                </p:childTnLst>
-              </p:cTn>
-              <p:prevCondLst>
-                <p:cond evt="onPrev" delay="0">
-                  <p:tgtEl>
-                    <p:sldTgt/>
-                  </p:tgtEl>
-                </p:cond>
-              </p:prevCondLst>
-              <p:nextCondLst>
-                <p:cond evt="onNext" delay="0">
-                  <p:tgtEl>
-                    <p:sldTgt/>
-                  </p:tgtEl>
-                </p:cond>
-              </p:nextCondLst>
-            </p:seq>
-            <p:audio isNarration="1">
-              <p:cMediaNode vol="80000" showWhenStopped="0">
-                <p:cTn id="7" fill="hold" display="0">
-                  <p:stCondLst>
-                    <p:cond delay="indefinite"/>
-                  </p:stCondLst>
-                  <p:endCondLst>
-                    <p:cond evt="onStopAudio" delay="0">
-                      <p:tgtEl>
-                        <p:sldTgt/>
-                      </p:tgtEl>
-                    </p:cond>
-                  </p:endCondLst>
-                </p:cTn>
-                <p:tgtEl>
-                  <p:spTgt spid="18"/>
-                </p:tgtEl>
-              </p:cMediaNode>
-            </p:audio>
-          </p:childTnLst>
-        </p:cTn>
-      </p:par>
-    </p:tnLst>
-  </p:timing>
 </p:sld>
 </file>
 
@@ -19346,7 +17844,7 @@
         <p:spPr>
           <a:xfrm>
             <a:off x="7025335" y="3861600"/>
-            <a:ext cx="3749039" cy="652551"/>
+            <a:ext cx="3749039" cy="777240"/>
           </a:xfrm>
           <a:prstGeom prst="rect">
             <a:avLst/>
@@ -19466,7 +17964,7 @@
           <p:nvPr/>
         </p:nvPicPr>
         <p:blipFill>
-          <a:blip r:embed="rId5"/>
+          <a:blip r:embed="rId3"/>
           <a:stretch>
             <a:fillRect/>
           </a:stretch>
@@ -19490,7 +17988,7 @@
           <p:nvPr/>
         </p:nvPicPr>
         <p:blipFill>
-          <a:blip r:embed="rId6"/>
+          <a:blip r:embed="rId4"/>
           <a:stretch>
             <a:fillRect/>
           </a:stretch>
@@ -19510,101 +18008,6 @@
   <p:clrMapOvr>
     <a:masterClrMapping/>
   </p:clrMapOvr>
-  <mc:AlternateContent xmlns:mc="http://schemas.openxmlformats.org/markup-compatibility/2006">
-    <mc:Choice xmlns:p14="http://schemas.microsoft.com/office/powerpoint/2010/main" Requires="p14">
-      <p:transition spd="slow" p14:dur="2000" advTm="237"/>
-    </mc:Choice>
-    <mc:Fallback>
-      <p:transition spd="slow" advTm="237"/>
-    </mc:Fallback>
-  </mc:AlternateContent>
-  <p:timing>
-    <p:tnLst>
-      <p:par>
-        <p:cTn id="1" dur="indefinite" restart="never" nodeType="tmRoot">
-          <p:childTnLst>
-            <p:seq concurrent="1" nextAc="seek">
-              <p:cTn id="2" dur="indefinite" nodeType="mainSeq">
-                <p:childTnLst>
-                  <p:par>
-                    <p:cTn id="3" fill="hold">
-                      <p:stCondLst>
-                        <p:cond delay="indefinite"/>
-                        <p:cond evt="onBegin" delay="0">
-                          <p:tn val="2"/>
-                        </p:cond>
-                      </p:stCondLst>
-                      <p:childTnLst>
-                        <p:par>
-                          <p:cTn id="4" fill="hold">
-                            <p:stCondLst>
-                              <p:cond delay="0"/>
-                            </p:stCondLst>
-                            <p:childTnLst>
-                              <p:par>
-                                <p:cTn id="5" presetID="1" presetClass="mediacall" presetSubtype="0" fill="hold" nodeType="afterEffect">
-                                  <p:stCondLst>
-                                    <p:cond delay="0"/>
-                                  </p:stCondLst>
-                                  <p:childTnLst>
-                                    <p:cmd type="call" cmd="playFrom(0.0)">
-                                      <p:cBhvr>
-                                        <p:cTn id="6" dur="1" fill="hold"/>
-                                        <p:tgtEl>
-                                          <p:spTgt spid="8"/>
-                                        </p:tgtEl>
-                                      </p:cBhvr>
-                                    </p:cmd>
-                                  </p:childTnLst>
-                                </p:cTn>
-                              </p:par>
-                            </p:childTnLst>
-                          </p:cTn>
-                        </p:par>
-                      </p:childTnLst>
-                    </p:cTn>
-                  </p:par>
-                </p:childTnLst>
-              </p:cTn>
-              <p:prevCondLst>
-                <p:cond evt="onPrev" delay="0">
-                  <p:tgtEl>
-                    <p:sldTgt/>
-                  </p:tgtEl>
-                </p:cond>
-              </p:prevCondLst>
-              <p:nextCondLst>
-                <p:cond evt="onNext" delay="0">
-                  <p:tgtEl>
-                    <p:sldTgt/>
-                  </p:tgtEl>
-                </p:cond>
-              </p:nextCondLst>
-            </p:seq>
-            <p:audio isNarration="1">
-              <p:cMediaNode vol="80000" showWhenStopped="0">
-                <p:cTn id="7" fill="hold" display="0">
-                  <p:stCondLst>
-                    <p:cond delay="indefinite"/>
-                  </p:stCondLst>
-                  <p:endCondLst>
-                    <p:cond evt="onStopAudio" delay="0">
-                      <p:tgtEl>
-                        <p:sldTgt/>
-                      </p:tgtEl>
-                    </p:cond>
-                  </p:endCondLst>
-                </p:cTn>
-                <p:tgtEl>
-                  <p:spTgt spid="8"/>
-                </p:tgtEl>
-              </p:cMediaNode>
-            </p:audio>
-          </p:childTnLst>
-        </p:cTn>
-      </p:par>
-    </p:tnLst>
-  </p:timing>
 </p:sld>
 </file>
 
@@ -19912,7 +18315,7 @@
           <p:nvPr/>
         </p:nvPicPr>
         <p:blipFill>
-          <a:blip r:embed="rId5"/>
+          <a:blip r:embed="rId3"/>
           <a:stretch>
             <a:fillRect/>
           </a:stretch>
@@ -20569,101 +18972,6 @@
   <p:clrMapOvr>
     <a:masterClrMapping/>
   </p:clrMapOvr>
-  <mc:AlternateContent xmlns:mc="http://schemas.openxmlformats.org/markup-compatibility/2006">
-    <mc:Choice xmlns:p14="http://schemas.microsoft.com/office/powerpoint/2010/main" Requires="p14">
-      <p:transition spd="slow" p14:dur="2000" advTm="4471"/>
-    </mc:Choice>
-    <mc:Fallback>
-      <p:transition spd="slow" advTm="4471"/>
-    </mc:Fallback>
-  </mc:AlternateContent>
-  <p:timing>
-    <p:tnLst>
-      <p:par>
-        <p:cTn id="1" dur="indefinite" restart="never" nodeType="tmRoot">
-          <p:childTnLst>
-            <p:seq concurrent="1" nextAc="seek">
-              <p:cTn id="2" dur="indefinite" nodeType="mainSeq">
-                <p:childTnLst>
-                  <p:par>
-                    <p:cTn id="3" fill="hold">
-                      <p:stCondLst>
-                        <p:cond delay="indefinite"/>
-                        <p:cond evt="onBegin" delay="0">
-                          <p:tn val="2"/>
-                        </p:cond>
-                      </p:stCondLst>
-                      <p:childTnLst>
-                        <p:par>
-                          <p:cTn id="4" fill="hold">
-                            <p:stCondLst>
-                              <p:cond delay="0"/>
-                            </p:stCondLst>
-                            <p:childTnLst>
-                              <p:par>
-                                <p:cTn id="5" presetID="1" presetClass="mediacall" presetSubtype="0" fill="hold" nodeType="afterEffect">
-                                  <p:stCondLst>
-                                    <p:cond delay="0"/>
-                                  </p:stCondLst>
-                                  <p:childTnLst>
-                                    <p:cmd type="call" cmd="playFrom(0.0)">
-                                      <p:cBhvr>
-                                        <p:cTn id="6" dur="1" fill="hold"/>
-                                        <p:tgtEl>
-                                          <p:spTgt spid="18"/>
-                                        </p:tgtEl>
-                                      </p:cBhvr>
-                                    </p:cmd>
-                                  </p:childTnLst>
-                                </p:cTn>
-                              </p:par>
-                            </p:childTnLst>
-                          </p:cTn>
-                        </p:par>
-                      </p:childTnLst>
-                    </p:cTn>
-                  </p:par>
-                </p:childTnLst>
-              </p:cTn>
-              <p:prevCondLst>
-                <p:cond evt="onPrev" delay="0">
-                  <p:tgtEl>
-                    <p:sldTgt/>
-                  </p:tgtEl>
-                </p:cond>
-              </p:prevCondLst>
-              <p:nextCondLst>
-                <p:cond evt="onNext" delay="0">
-                  <p:tgtEl>
-                    <p:sldTgt/>
-                  </p:tgtEl>
-                </p:cond>
-              </p:nextCondLst>
-            </p:seq>
-            <p:audio isNarration="1">
-              <p:cMediaNode vol="80000" showWhenStopped="0">
-                <p:cTn id="7" fill="hold" display="0">
-                  <p:stCondLst>
-                    <p:cond delay="indefinite"/>
-                  </p:stCondLst>
-                  <p:endCondLst>
-                    <p:cond evt="onStopAudio" delay="0">
-                      <p:tgtEl>
-                        <p:sldTgt/>
-                      </p:tgtEl>
-                    </p:cond>
-                  </p:endCondLst>
-                </p:cTn>
-                <p:tgtEl>
-                  <p:spTgt spid="18"/>
-                </p:tgtEl>
-              </p:cMediaNode>
-            </p:audio>
-          </p:childTnLst>
-        </p:cTn>
-      </p:par>
-    </p:tnLst>
-  </p:timing>
 </p:sld>
 </file>
 
@@ -20971,7 +19279,7 @@
           <p:nvPr/>
         </p:nvPicPr>
         <p:blipFill>
-          <a:blip r:embed="rId5"/>
+          <a:blip r:embed="rId3"/>
           <a:stretch>
             <a:fillRect/>
           </a:stretch>
@@ -21000,7 +19308,7 @@
           <p:nvPr/>
         </p:nvPicPr>
         <p:blipFill>
-          <a:blip r:embed="rId6"/>
+          <a:blip r:embed="rId4"/>
           <a:stretch>
             <a:fillRect/>
           </a:stretch>
@@ -21469,101 +19777,6 @@
   <p:clrMapOvr>
     <a:masterClrMapping/>
   </p:clrMapOvr>
-  <mc:AlternateContent xmlns:mc="http://schemas.openxmlformats.org/markup-compatibility/2006">
-    <mc:Choice xmlns:p14="http://schemas.microsoft.com/office/powerpoint/2010/main" Requires="p14">
-      <p:transition spd="slow" p14:dur="2000" advTm="283"/>
-    </mc:Choice>
-    <mc:Fallback>
-      <p:transition spd="slow" advTm="283"/>
-    </mc:Fallback>
-  </mc:AlternateContent>
-  <p:timing>
-    <p:tnLst>
-      <p:par>
-        <p:cTn id="1" dur="indefinite" restart="never" nodeType="tmRoot">
-          <p:childTnLst>
-            <p:seq concurrent="1" nextAc="seek">
-              <p:cTn id="2" dur="indefinite" nodeType="mainSeq">
-                <p:childTnLst>
-                  <p:par>
-                    <p:cTn id="3" fill="hold">
-                      <p:stCondLst>
-                        <p:cond delay="indefinite"/>
-                        <p:cond evt="onBegin" delay="0">
-                          <p:tn val="2"/>
-                        </p:cond>
-                      </p:stCondLst>
-                      <p:childTnLst>
-                        <p:par>
-                          <p:cTn id="4" fill="hold">
-                            <p:stCondLst>
-                              <p:cond delay="0"/>
-                            </p:stCondLst>
-                            <p:childTnLst>
-                              <p:par>
-                                <p:cTn id="5" presetID="1" presetClass="mediacall" presetSubtype="0" fill="hold" nodeType="afterEffect">
-                                  <p:stCondLst>
-                                    <p:cond delay="0"/>
-                                  </p:stCondLst>
-                                  <p:childTnLst>
-                                    <p:cmd type="call" cmd="playFrom(0.0)">
-                                      <p:cBhvr>
-                                        <p:cTn id="6" dur="1" fill="hold"/>
-                                        <p:tgtEl>
-                                          <p:spTgt spid="13"/>
-                                        </p:tgtEl>
-                                      </p:cBhvr>
-                                    </p:cmd>
-                                  </p:childTnLst>
-                                </p:cTn>
-                              </p:par>
-                            </p:childTnLst>
-                          </p:cTn>
-                        </p:par>
-                      </p:childTnLst>
-                    </p:cTn>
-                  </p:par>
-                </p:childTnLst>
-              </p:cTn>
-              <p:prevCondLst>
-                <p:cond evt="onPrev" delay="0">
-                  <p:tgtEl>
-                    <p:sldTgt/>
-                  </p:tgtEl>
-                </p:cond>
-              </p:prevCondLst>
-              <p:nextCondLst>
-                <p:cond evt="onNext" delay="0">
-                  <p:tgtEl>
-                    <p:sldTgt/>
-                  </p:tgtEl>
-                </p:cond>
-              </p:nextCondLst>
-            </p:seq>
-            <p:audio isNarration="1">
-              <p:cMediaNode vol="80000" showWhenStopped="0">
-                <p:cTn id="7" fill="hold" display="0">
-                  <p:stCondLst>
-                    <p:cond delay="indefinite"/>
-                  </p:stCondLst>
-                  <p:endCondLst>
-                    <p:cond evt="onStopAudio" delay="0">
-                      <p:tgtEl>
-                        <p:sldTgt/>
-                      </p:tgtEl>
-                    </p:cond>
-                  </p:endCondLst>
-                </p:cTn>
-                <p:tgtEl>
-                  <p:spTgt spid="13"/>
-                </p:tgtEl>
-              </p:cMediaNode>
-            </p:audio>
-          </p:childTnLst>
-        </p:cTn>
-      </p:par>
-    </p:tnLst>
-  </p:timing>
 </p:sld>
 </file>
 
